--- a/开题报告/于琪-开题PPT(20260809) .pptx
+++ b/开题报告/于琪-开题PPT(20260809) .pptx
@@ -139,7 +139,7 @@
   </p:defaultTextStyle>
   <p:extLst>
     <p:ext uri="{EFAFB233-063F-42B5-8137-9DF3F51BA10A}">
-      <p15:sldGuideLst xmlns:p15="http://schemas.microsoft.com/office/powerpoint/2012/main" xmlns="">
+      <p15:sldGuideLst xmlns:p15="http://schemas.microsoft.com/office/powerpoint/2012/main">
         <p15:guide id="1" orient="horz" pos="1665" userDrawn="1">
           <p15:clr>
             <a:srgbClr val="A4A3A4"/>
@@ -244,7 +244,7 @@
           <a:p>
             <a:fld id="{2B8150AE-BE8D-4426-9D1B-FC5D65E95960}" type="datetimeFigureOut">
               <a:rPr lang="zh-CN" altLang="en-US" smtClean="0"/>
-              <a:t>2026/6/29</a:t>
+              <a:t>2026/8/10</a:t>
             </a:fld>
             <a:endParaRPr lang="zh-CN" altLang="en-US"/>
           </a:p>
@@ -583,6 +583,11 @@
         </p:txBody>
       </p:sp>
     </p:spTree>
+    <p:extLst>
+      <p:ext uri="{BB962C8B-B14F-4D97-AF65-F5344CB8AC3E}">
+        <p14:creationId xmlns:p14="http://schemas.microsoft.com/office/powerpoint/2010/main" val="1625937042"/>
+      </p:ext>
+    </p:extLst>
   </p:cSld>
   <p:clrMapOvr>
     <a:masterClrMapping/>
@@ -667,6 +672,11 @@
         </p:txBody>
       </p:sp>
     </p:spTree>
+    <p:extLst>
+      <p:ext uri="{BB962C8B-B14F-4D97-AF65-F5344CB8AC3E}">
+        <p14:creationId xmlns:p14="http://schemas.microsoft.com/office/powerpoint/2010/main" val="3930353875"/>
+      </p:ext>
+    </p:extLst>
   </p:cSld>
   <p:clrMapOvr>
     <a:masterClrMapping/>
@@ -750,6 +760,11 @@
         </p:txBody>
       </p:sp>
     </p:spTree>
+    <p:extLst>
+      <p:ext uri="{BB962C8B-B14F-4D97-AF65-F5344CB8AC3E}">
+        <p14:creationId xmlns:p14="http://schemas.microsoft.com/office/powerpoint/2010/main" val="4121839153"/>
+      </p:ext>
+    </p:extLst>
   </p:cSld>
   <p:clrMapOvr>
     <a:masterClrMapping/>
@@ -829,6 +844,11 @@
         </p:txBody>
       </p:sp>
     </p:spTree>
+    <p:extLst>
+      <p:ext uri="{BB962C8B-B14F-4D97-AF65-F5344CB8AC3E}">
+        <p14:creationId xmlns:p14="http://schemas.microsoft.com/office/powerpoint/2010/main" val="2007009264"/>
+      </p:ext>
+    </p:extLst>
   </p:cSld>
   <p:clrMapOvr>
     <a:masterClrMapping/>
@@ -908,6 +928,11 @@
         </p:txBody>
       </p:sp>
     </p:spTree>
+    <p:extLst>
+      <p:ext uri="{BB962C8B-B14F-4D97-AF65-F5344CB8AC3E}">
+        <p14:creationId xmlns:p14="http://schemas.microsoft.com/office/powerpoint/2010/main" val="3335383337"/>
+      </p:ext>
+    </p:extLst>
   </p:cSld>
   <p:clrMapOvr>
     <a:masterClrMapping/>
@@ -1003,6 +1028,11 @@
         </p:txBody>
       </p:sp>
     </p:spTree>
+    <p:extLst>
+      <p:ext uri="{BB962C8B-B14F-4D97-AF65-F5344CB8AC3E}">
+        <p14:creationId xmlns:p14="http://schemas.microsoft.com/office/powerpoint/2010/main" val="1778924114"/>
+      </p:ext>
+    </p:extLst>
   </p:cSld>
   <p:clrMapOvr>
     <a:masterClrMapping/>
@@ -1162,6 +1192,11 @@
         </p:txBody>
       </p:sp>
     </p:spTree>
+    <p:extLst>
+      <p:ext uri="{BB962C8B-B14F-4D97-AF65-F5344CB8AC3E}">
+        <p14:creationId xmlns:p14="http://schemas.microsoft.com/office/powerpoint/2010/main" val="1014376209"/>
+      </p:ext>
+    </p:extLst>
   </p:cSld>
   <p:clrMapOvr>
     <a:masterClrMapping/>
@@ -1250,6 +1285,11 @@
         </p:txBody>
       </p:sp>
     </p:spTree>
+    <p:extLst>
+      <p:ext uri="{BB962C8B-B14F-4D97-AF65-F5344CB8AC3E}">
+        <p14:creationId xmlns:p14="http://schemas.microsoft.com/office/powerpoint/2010/main" val="2401722865"/>
+      </p:ext>
+    </p:extLst>
   </p:cSld>
   <p:clrMapOvr>
     <a:masterClrMapping/>
@@ -1348,6 +1388,11 @@
         </p:txBody>
       </p:sp>
     </p:spTree>
+    <p:extLst>
+      <p:ext uri="{BB962C8B-B14F-4D97-AF65-F5344CB8AC3E}">
+        <p14:creationId xmlns:p14="http://schemas.microsoft.com/office/powerpoint/2010/main" val="725870366"/>
+      </p:ext>
+    </p:extLst>
   </p:cSld>
   <p:clrMapOvr>
     <a:masterClrMapping/>
@@ -1363,7 +1408,7 @@
         <p:cNvPr id="1" name="">
           <a:extLst>
             <a:ext uri="{FF2B5EF4-FFF2-40B4-BE49-F238E27FC236}">
-              <a16:creationId xmlns:a16="http://schemas.microsoft.com/office/drawing/2014/main" xmlns="" id="{2BE56581-B324-1CDB-8DF4-9E261B6C57FF}"/>
+              <a16:creationId xmlns="" xmlns:a16="http://schemas.microsoft.com/office/drawing/2014/main" id="{2BE56581-B324-1CDB-8DF4-9E261B6C57FF}"/>
             </a:ext>
           </a:extLst>
         </p:cNvPr>
@@ -1383,7 +1428,7 @@
           <p:cNvPr id="2" name="幻灯片图像占位符 1">
             <a:extLst>
               <a:ext uri="{FF2B5EF4-FFF2-40B4-BE49-F238E27FC236}">
-                <a16:creationId xmlns:a16="http://schemas.microsoft.com/office/drawing/2014/main" xmlns="" id="{2D444830-BA78-1CD7-FDDB-D92BA4D2995B}"/>
+                <a16:creationId xmlns="" xmlns:a16="http://schemas.microsoft.com/office/drawing/2014/main" id="{2D444830-BA78-1CD7-FDDB-D92BA4D2995B}"/>
               </a:ext>
             </a:extLst>
           </p:cNvPr>
@@ -1401,7 +1446,7 @@
           <p:cNvPr id="3" name="备注占位符 2">
             <a:extLst>
               <a:ext uri="{FF2B5EF4-FFF2-40B4-BE49-F238E27FC236}">
-                <a16:creationId xmlns:a16="http://schemas.microsoft.com/office/drawing/2014/main" xmlns="" id="{7469A4A5-C9C1-83CE-52AB-0520D18945D8}"/>
+                <a16:creationId xmlns="" xmlns:a16="http://schemas.microsoft.com/office/drawing/2014/main" id="{7469A4A5-C9C1-83CE-52AB-0520D18945D8}"/>
               </a:ext>
             </a:extLst>
           </p:cNvPr>
@@ -1435,7 +1480,7 @@
           <p:cNvPr id="4" name="灯片编号占位符 3">
             <a:extLst>
               <a:ext uri="{FF2B5EF4-FFF2-40B4-BE49-F238E27FC236}">
-                <a16:creationId xmlns:a16="http://schemas.microsoft.com/office/drawing/2014/main" xmlns="" id="{F338DF29-DD0C-CF2A-A9C5-8BFC4A015344}"/>
+                <a16:creationId xmlns="" xmlns:a16="http://schemas.microsoft.com/office/drawing/2014/main" id="{F338DF29-DD0C-CF2A-A9C5-8BFC4A015344}"/>
               </a:ext>
             </a:extLst>
           </p:cNvPr>
@@ -1480,7 +1525,7 @@
         <p:cNvPr id="1" name="">
           <a:extLst>
             <a:ext uri="{FF2B5EF4-FFF2-40B4-BE49-F238E27FC236}">
-              <a16:creationId xmlns:a16="http://schemas.microsoft.com/office/drawing/2014/main" xmlns="" id="{BC313052-C8BF-76DC-39DF-6A1D7A4CE559}"/>
+              <a16:creationId xmlns="" xmlns:a16="http://schemas.microsoft.com/office/drawing/2014/main" id="{BC313052-C8BF-76DC-39DF-6A1D7A4CE559}"/>
             </a:ext>
           </a:extLst>
         </p:cNvPr>
@@ -1500,7 +1545,7 @@
           <p:cNvPr id="2" name="幻灯片图像占位符 1">
             <a:extLst>
               <a:ext uri="{FF2B5EF4-FFF2-40B4-BE49-F238E27FC236}">
-                <a16:creationId xmlns:a16="http://schemas.microsoft.com/office/drawing/2014/main" xmlns="" id="{3BDBECFE-92E9-6936-D675-D8A0C5913CFA}"/>
+                <a16:creationId xmlns="" xmlns:a16="http://schemas.microsoft.com/office/drawing/2014/main" id="{3BDBECFE-92E9-6936-D675-D8A0C5913CFA}"/>
               </a:ext>
             </a:extLst>
           </p:cNvPr>
@@ -1518,7 +1563,7 @@
           <p:cNvPr id="3" name="备注占位符 2">
             <a:extLst>
               <a:ext uri="{FF2B5EF4-FFF2-40B4-BE49-F238E27FC236}">
-                <a16:creationId xmlns:a16="http://schemas.microsoft.com/office/drawing/2014/main" xmlns="" id="{C445F9F4-1F11-A50A-E429-97A66FB73225}"/>
+                <a16:creationId xmlns="" xmlns:a16="http://schemas.microsoft.com/office/drawing/2014/main" id="{C445F9F4-1F11-A50A-E429-97A66FB73225}"/>
               </a:ext>
             </a:extLst>
           </p:cNvPr>
@@ -1562,7 +1607,7 @@
           <p:cNvPr id="4" name="灯片编号占位符 3">
             <a:extLst>
               <a:ext uri="{FF2B5EF4-FFF2-40B4-BE49-F238E27FC236}">
-                <a16:creationId xmlns:a16="http://schemas.microsoft.com/office/drawing/2014/main" xmlns="" id="{32D18AEB-9D89-F929-837F-350907E70D8C}"/>
+                <a16:creationId xmlns="" xmlns:a16="http://schemas.microsoft.com/office/drawing/2014/main" id="{32D18AEB-9D89-F929-837F-350907E70D8C}"/>
               </a:ext>
             </a:extLst>
           </p:cNvPr>
@@ -1671,6 +1716,11 @@
         </p:txBody>
       </p:sp>
     </p:spTree>
+    <p:extLst>
+      <p:ext uri="{BB962C8B-B14F-4D97-AF65-F5344CB8AC3E}">
+        <p14:creationId xmlns:p14="http://schemas.microsoft.com/office/powerpoint/2010/main" val="853056708"/>
+      </p:ext>
+    </p:extLst>
   </p:cSld>
   <p:clrMapOvr>
     <a:masterClrMapping/>
@@ -1686,7 +1736,7 @@
         <p:cNvPr id="1" name="">
           <a:extLst>
             <a:ext uri="{FF2B5EF4-FFF2-40B4-BE49-F238E27FC236}">
-              <a16:creationId xmlns:a16="http://schemas.microsoft.com/office/drawing/2014/main" xmlns="" id="{B50A14B2-7840-26D5-ECC6-2C2494639757}"/>
+              <a16:creationId xmlns="" xmlns:a16="http://schemas.microsoft.com/office/drawing/2014/main" id="{B50A14B2-7840-26D5-ECC6-2C2494639757}"/>
             </a:ext>
           </a:extLst>
         </p:cNvPr>
@@ -1706,7 +1756,7 @@
           <p:cNvPr id="2" name="幻灯片图像占位符 1">
             <a:extLst>
               <a:ext uri="{FF2B5EF4-FFF2-40B4-BE49-F238E27FC236}">
-                <a16:creationId xmlns:a16="http://schemas.microsoft.com/office/drawing/2014/main" xmlns="" id="{611279E3-0234-D703-167D-57EBB530F270}"/>
+                <a16:creationId xmlns="" xmlns:a16="http://schemas.microsoft.com/office/drawing/2014/main" id="{611279E3-0234-D703-167D-57EBB530F270}"/>
               </a:ext>
             </a:extLst>
           </p:cNvPr>
@@ -1724,7 +1774,7 @@
           <p:cNvPr id="3" name="备注占位符 2">
             <a:extLst>
               <a:ext uri="{FF2B5EF4-FFF2-40B4-BE49-F238E27FC236}">
-                <a16:creationId xmlns:a16="http://schemas.microsoft.com/office/drawing/2014/main" xmlns="" id="{B7CDA78B-AAC0-027F-B983-B8E458B34763}"/>
+                <a16:creationId xmlns="" xmlns:a16="http://schemas.microsoft.com/office/drawing/2014/main" id="{B7CDA78B-AAC0-027F-B983-B8E458B34763}"/>
               </a:ext>
             </a:extLst>
           </p:cNvPr>
@@ -1758,7 +1808,7 @@
           <p:cNvPr id="4" name="灯片编号占位符 3">
             <a:extLst>
               <a:ext uri="{FF2B5EF4-FFF2-40B4-BE49-F238E27FC236}">
-                <a16:creationId xmlns:a16="http://schemas.microsoft.com/office/drawing/2014/main" xmlns="" id="{0EBAA1AC-6D2C-34B8-2A22-9E6C251B63C0}"/>
+                <a16:creationId xmlns="" xmlns:a16="http://schemas.microsoft.com/office/drawing/2014/main" id="{0EBAA1AC-6D2C-34B8-2A22-9E6C251B63C0}"/>
               </a:ext>
             </a:extLst>
           </p:cNvPr>
@@ -1883,6 +1933,11 @@
         </p:txBody>
       </p:sp>
     </p:spTree>
+    <p:extLst>
+      <p:ext uri="{BB962C8B-B14F-4D97-AF65-F5344CB8AC3E}">
+        <p14:creationId xmlns:p14="http://schemas.microsoft.com/office/powerpoint/2010/main" val="1131541203"/>
+      </p:ext>
+    </p:extLst>
   </p:cSld>
   <p:clrMapOvr>
     <a:masterClrMapping/>
@@ -1898,7 +1953,7 @@
         <p:cNvPr id="1" name="">
           <a:extLst>
             <a:ext uri="{FF2B5EF4-FFF2-40B4-BE49-F238E27FC236}">
-              <a16:creationId xmlns:a16="http://schemas.microsoft.com/office/drawing/2014/main" xmlns="" id="{C69E56C8-E57A-3BDC-BAAA-4D6E0B3AC836}"/>
+              <a16:creationId xmlns="" xmlns:a16="http://schemas.microsoft.com/office/drawing/2014/main" id="{C69E56C8-E57A-3BDC-BAAA-4D6E0B3AC836}"/>
             </a:ext>
           </a:extLst>
         </p:cNvPr>
@@ -1918,7 +1973,7 @@
           <p:cNvPr id="2" name="幻灯片图像占位符 1">
             <a:extLst>
               <a:ext uri="{FF2B5EF4-FFF2-40B4-BE49-F238E27FC236}">
-                <a16:creationId xmlns:a16="http://schemas.microsoft.com/office/drawing/2014/main" xmlns="" id="{D90D4530-AF9E-6C31-19EB-A19698040BB5}"/>
+                <a16:creationId xmlns="" xmlns:a16="http://schemas.microsoft.com/office/drawing/2014/main" id="{D90D4530-AF9E-6C31-19EB-A19698040BB5}"/>
               </a:ext>
             </a:extLst>
           </p:cNvPr>
@@ -1936,7 +1991,7 @@
           <p:cNvPr id="3" name="备注占位符 2">
             <a:extLst>
               <a:ext uri="{FF2B5EF4-FFF2-40B4-BE49-F238E27FC236}">
-                <a16:creationId xmlns:a16="http://schemas.microsoft.com/office/drawing/2014/main" xmlns="" id="{BFE4FDD0-5FA1-780F-FBE6-A44A9B149616}"/>
+                <a16:creationId xmlns="" xmlns:a16="http://schemas.microsoft.com/office/drawing/2014/main" id="{BFE4FDD0-5FA1-780F-FBE6-A44A9B149616}"/>
               </a:ext>
             </a:extLst>
           </p:cNvPr>
@@ -1977,7 +2032,7 @@
           <p:cNvPr id="4" name="灯片编号占位符 3">
             <a:extLst>
               <a:ext uri="{FF2B5EF4-FFF2-40B4-BE49-F238E27FC236}">
-                <a16:creationId xmlns:a16="http://schemas.microsoft.com/office/drawing/2014/main" xmlns="" id="{06991240-3D91-1AAD-4FFD-7C2BA53CA6FA}"/>
+                <a16:creationId xmlns="" xmlns:a16="http://schemas.microsoft.com/office/drawing/2014/main" id="{06991240-3D91-1AAD-4FFD-7C2BA53CA6FA}"/>
               </a:ext>
             </a:extLst>
           </p:cNvPr>
@@ -2022,7 +2077,7 @@
         <p:cNvPr id="1" name="">
           <a:extLst>
             <a:ext uri="{FF2B5EF4-FFF2-40B4-BE49-F238E27FC236}">
-              <a16:creationId xmlns:a16="http://schemas.microsoft.com/office/drawing/2014/main" xmlns="" id="{4D2B53E3-1F39-1549-E122-48DF2D3C44ED}"/>
+              <a16:creationId xmlns="" xmlns:a16="http://schemas.microsoft.com/office/drawing/2014/main" id="{4D2B53E3-1F39-1549-E122-48DF2D3C44ED}"/>
             </a:ext>
           </a:extLst>
         </p:cNvPr>
@@ -2042,7 +2097,7 @@
           <p:cNvPr id="2" name="幻灯片图像占位符 1">
             <a:extLst>
               <a:ext uri="{FF2B5EF4-FFF2-40B4-BE49-F238E27FC236}">
-                <a16:creationId xmlns:a16="http://schemas.microsoft.com/office/drawing/2014/main" xmlns="" id="{0BA0B599-49F2-8CA4-D009-ACAE0E07AC32}"/>
+                <a16:creationId xmlns="" xmlns:a16="http://schemas.microsoft.com/office/drawing/2014/main" id="{0BA0B599-49F2-8CA4-D009-ACAE0E07AC32}"/>
               </a:ext>
             </a:extLst>
           </p:cNvPr>
@@ -2060,7 +2115,7 @@
           <p:cNvPr id="3" name="备注占位符 2">
             <a:extLst>
               <a:ext uri="{FF2B5EF4-FFF2-40B4-BE49-F238E27FC236}">
-                <a16:creationId xmlns:a16="http://schemas.microsoft.com/office/drawing/2014/main" xmlns="" id="{FF3687F8-A292-CF71-DE05-C1CAAE11E445}"/>
+                <a16:creationId xmlns="" xmlns:a16="http://schemas.microsoft.com/office/drawing/2014/main" id="{FF3687F8-A292-CF71-DE05-C1CAAE11E445}"/>
               </a:ext>
             </a:extLst>
           </p:cNvPr>
@@ -2101,7 +2156,7 @@
           <p:cNvPr id="4" name="灯片编号占位符 3">
             <a:extLst>
               <a:ext uri="{FF2B5EF4-FFF2-40B4-BE49-F238E27FC236}">
-                <a16:creationId xmlns:a16="http://schemas.microsoft.com/office/drawing/2014/main" xmlns="" id="{57D8FAA8-1649-0101-A37B-B5C6F7312860}"/>
+                <a16:creationId xmlns="" xmlns:a16="http://schemas.microsoft.com/office/drawing/2014/main" id="{57D8FAA8-1649-0101-A37B-B5C6F7312860}"/>
               </a:ext>
             </a:extLst>
           </p:cNvPr>
@@ -2146,7 +2201,7 @@
         <p:cNvPr id="1" name="">
           <a:extLst>
             <a:ext uri="{FF2B5EF4-FFF2-40B4-BE49-F238E27FC236}">
-              <a16:creationId xmlns:a16="http://schemas.microsoft.com/office/drawing/2014/main" xmlns="" id="{8B76DEFC-CEB7-857E-0424-3F332B266548}"/>
+              <a16:creationId xmlns="" xmlns:a16="http://schemas.microsoft.com/office/drawing/2014/main" id="{8B76DEFC-CEB7-857E-0424-3F332B266548}"/>
             </a:ext>
           </a:extLst>
         </p:cNvPr>
@@ -2166,7 +2221,7 @@
           <p:cNvPr id="2" name="幻灯片图像占位符 1">
             <a:extLst>
               <a:ext uri="{FF2B5EF4-FFF2-40B4-BE49-F238E27FC236}">
-                <a16:creationId xmlns:a16="http://schemas.microsoft.com/office/drawing/2014/main" xmlns="" id="{D3B91689-A2E5-0031-14CC-1E4142026081}"/>
+                <a16:creationId xmlns="" xmlns:a16="http://schemas.microsoft.com/office/drawing/2014/main" id="{D3B91689-A2E5-0031-14CC-1E4142026081}"/>
               </a:ext>
             </a:extLst>
           </p:cNvPr>
@@ -2184,7 +2239,7 @@
           <p:cNvPr id="3" name="备注占位符 2">
             <a:extLst>
               <a:ext uri="{FF2B5EF4-FFF2-40B4-BE49-F238E27FC236}">
-                <a16:creationId xmlns:a16="http://schemas.microsoft.com/office/drawing/2014/main" xmlns="" id="{3A1A81B0-C988-C9AB-128B-57102918C8A5}"/>
+                <a16:creationId xmlns="" xmlns:a16="http://schemas.microsoft.com/office/drawing/2014/main" id="{3A1A81B0-C988-C9AB-128B-57102918C8A5}"/>
               </a:ext>
             </a:extLst>
           </p:cNvPr>
@@ -2225,7 +2280,7 @@
           <p:cNvPr id="4" name="灯片编号占位符 3">
             <a:extLst>
               <a:ext uri="{FF2B5EF4-FFF2-40B4-BE49-F238E27FC236}">
-                <a16:creationId xmlns:a16="http://schemas.microsoft.com/office/drawing/2014/main" xmlns="" id="{D82D57CA-49D3-C70F-2A74-7D7444A2C217}"/>
+                <a16:creationId xmlns="" xmlns:a16="http://schemas.microsoft.com/office/drawing/2014/main" id="{D82D57CA-49D3-C70F-2A74-7D7444A2C217}"/>
               </a:ext>
             </a:extLst>
           </p:cNvPr>
@@ -2334,6 +2389,11 @@
         </p:txBody>
       </p:sp>
     </p:spTree>
+    <p:extLst>
+      <p:ext uri="{BB962C8B-B14F-4D97-AF65-F5344CB8AC3E}">
+        <p14:creationId xmlns:p14="http://schemas.microsoft.com/office/powerpoint/2010/main" val="3508779386"/>
+      </p:ext>
+    </p:extLst>
   </p:cSld>
   <p:clrMapOvr>
     <a:masterClrMapping/>
@@ -2416,6 +2476,11 @@
         </p:txBody>
       </p:sp>
     </p:spTree>
+    <p:extLst>
+      <p:ext uri="{BB962C8B-B14F-4D97-AF65-F5344CB8AC3E}">
+        <p14:creationId xmlns:p14="http://schemas.microsoft.com/office/powerpoint/2010/main" val="2400442288"/>
+      </p:ext>
+    </p:extLst>
   </p:cSld>
   <p:clrMapOvr>
     <a:masterClrMapping/>
@@ -2495,6 +2560,11 @@
         </p:txBody>
       </p:sp>
     </p:spTree>
+    <p:extLst>
+      <p:ext uri="{BB962C8B-B14F-4D97-AF65-F5344CB8AC3E}">
+        <p14:creationId xmlns:p14="http://schemas.microsoft.com/office/powerpoint/2010/main" val="1328552317"/>
+      </p:ext>
+    </p:extLst>
   </p:cSld>
   <p:clrMapOvr>
     <a:masterClrMapping/>
@@ -2574,6 +2644,11 @@
         </p:txBody>
       </p:sp>
     </p:spTree>
+    <p:extLst>
+      <p:ext uri="{BB962C8B-B14F-4D97-AF65-F5344CB8AC3E}">
+        <p14:creationId xmlns:p14="http://schemas.microsoft.com/office/powerpoint/2010/main" val="2632665396"/>
+      </p:ext>
+    </p:extLst>
   </p:cSld>
   <p:clrMapOvr>
     <a:masterClrMapping/>
@@ -2653,6 +2728,11 @@
         </p:txBody>
       </p:sp>
     </p:spTree>
+    <p:extLst>
+      <p:ext uri="{BB962C8B-B14F-4D97-AF65-F5344CB8AC3E}">
+        <p14:creationId xmlns:p14="http://schemas.microsoft.com/office/powerpoint/2010/main" val="4148606237"/>
+      </p:ext>
+    </p:extLst>
   </p:cSld>
   <p:clrMapOvr>
     <a:masterClrMapping/>
@@ -2745,6 +2825,11 @@
         </p:txBody>
       </p:sp>
     </p:spTree>
+    <p:extLst>
+      <p:ext uri="{BB962C8B-B14F-4D97-AF65-F5344CB8AC3E}">
+        <p14:creationId xmlns:p14="http://schemas.microsoft.com/office/powerpoint/2010/main" val="1711899409"/>
+      </p:ext>
+    </p:extLst>
   </p:cSld>
   <p:clrMapOvr>
     <a:masterClrMapping/>
@@ -2824,6 +2909,11 @@
         </p:txBody>
       </p:sp>
     </p:spTree>
+    <p:extLst>
+      <p:ext uri="{BB962C8B-B14F-4D97-AF65-F5344CB8AC3E}">
+        <p14:creationId xmlns:p14="http://schemas.microsoft.com/office/powerpoint/2010/main" val="4079453601"/>
+      </p:ext>
+    </p:extLst>
   </p:cSld>
   <p:clrMapOvr>
     <a:masterClrMapping/>
@@ -2912,6 +3002,11 @@
         </p:txBody>
       </p:sp>
     </p:spTree>
+    <p:extLst>
+      <p:ext uri="{BB962C8B-B14F-4D97-AF65-F5344CB8AC3E}">
+        <p14:creationId xmlns:p14="http://schemas.microsoft.com/office/powerpoint/2010/main" val="974955706"/>
+      </p:ext>
+    </p:extLst>
   </p:cSld>
   <p:clrMapOvr>
     <a:masterClrMapping/>
@@ -2991,6 +3086,11 @@
         </p:txBody>
       </p:sp>
     </p:spTree>
+    <p:extLst>
+      <p:ext uri="{BB962C8B-B14F-4D97-AF65-F5344CB8AC3E}">
+        <p14:creationId xmlns:p14="http://schemas.microsoft.com/office/powerpoint/2010/main" val="3206422353"/>
+      </p:ext>
+    </p:extLst>
   </p:cSld>
   <p:clrMapOvr>
     <a:masterClrMapping/>
@@ -3070,6 +3170,11 @@
         </p:txBody>
       </p:sp>
     </p:spTree>
+    <p:extLst>
+      <p:ext uri="{BB962C8B-B14F-4D97-AF65-F5344CB8AC3E}">
+        <p14:creationId xmlns:p14="http://schemas.microsoft.com/office/powerpoint/2010/main" val="3370229259"/>
+      </p:ext>
+    </p:extLst>
   </p:cSld>
   <p:clrMapOvr>
     <a:masterClrMapping/>
@@ -3149,6 +3254,11 @@
         </p:txBody>
       </p:sp>
     </p:spTree>
+    <p:extLst>
+      <p:ext uri="{BB962C8B-B14F-4D97-AF65-F5344CB8AC3E}">
+        <p14:creationId xmlns:p14="http://schemas.microsoft.com/office/powerpoint/2010/main" val="1166498656"/>
+      </p:ext>
+    </p:extLst>
   </p:cSld>
   <p:clrMapOvr>
     <a:masterClrMapping/>
@@ -3335,7 +3445,7 @@
           <a:p>
             <a:fld id="{530820CF-B880-4189-942D-D702A7CBA730}" type="datetimeFigureOut">
               <a:rPr lang="zh-CN" altLang="en-US" smtClean="0"/>
-              <a:t>2026/6/29</a:t>
+              <a:t>2026/8/10</a:t>
             </a:fld>
             <a:endParaRPr lang="zh-CN" altLang="en-US"/>
           </a:p>
@@ -3498,7 +3608,7 @@
           <a:p>
             <a:fld id="{530820CF-B880-4189-942D-D702A7CBA730}" type="datetimeFigureOut">
               <a:rPr lang="zh-CN" altLang="en-US" smtClean="0"/>
-              <a:t>2026/6/29</a:t>
+              <a:t>2026/8/10</a:t>
             </a:fld>
             <a:endParaRPr lang="zh-CN" altLang="en-US"/>
           </a:p>
@@ -3671,7 +3781,7 @@
           <a:p>
             <a:fld id="{530820CF-B880-4189-942D-D702A7CBA730}" type="datetimeFigureOut">
               <a:rPr lang="zh-CN" altLang="en-US" smtClean="0"/>
-              <a:t>2026/6/29</a:t>
+              <a:t>2026/8/10</a:t>
             </a:fld>
             <a:endParaRPr lang="zh-CN" altLang="en-US"/>
           </a:p>
@@ -3834,7 +3944,7 @@
           <a:p>
             <a:fld id="{530820CF-B880-4189-942D-D702A7CBA730}" type="datetimeFigureOut">
               <a:rPr lang="zh-CN" altLang="en-US" smtClean="0"/>
-              <a:t>2026/6/29</a:t>
+              <a:t>2026/8/10</a:t>
             </a:fld>
             <a:endParaRPr lang="zh-CN" altLang="en-US"/>
           </a:p>
@@ -4074,7 +4184,7 @@
           <a:p>
             <a:fld id="{530820CF-B880-4189-942D-D702A7CBA730}" type="datetimeFigureOut">
               <a:rPr lang="zh-CN" altLang="en-US" smtClean="0"/>
-              <a:t>2026/6/29</a:t>
+              <a:t>2026/8/10</a:t>
             </a:fld>
             <a:endParaRPr lang="zh-CN" altLang="en-US"/>
           </a:p>
@@ -4354,7 +4464,7 @@
           <a:p>
             <a:fld id="{530820CF-B880-4189-942D-D702A7CBA730}" type="datetimeFigureOut">
               <a:rPr lang="zh-CN" altLang="en-US" smtClean="0"/>
-              <a:t>2026/6/29</a:t>
+              <a:t>2026/8/10</a:t>
             </a:fld>
             <a:endParaRPr lang="zh-CN" altLang="en-US"/>
           </a:p>
@@ -4768,7 +4878,7 @@
           <a:p>
             <a:fld id="{530820CF-B880-4189-942D-D702A7CBA730}" type="datetimeFigureOut">
               <a:rPr lang="zh-CN" altLang="en-US" smtClean="0"/>
-              <a:t>2026/6/29</a:t>
+              <a:t>2026/8/10</a:t>
             </a:fld>
             <a:endParaRPr lang="zh-CN" altLang="en-US"/>
           </a:p>
@@ -4880,7 +4990,7 @@
           <a:p>
             <a:fld id="{530820CF-B880-4189-942D-D702A7CBA730}" type="datetimeFigureOut">
               <a:rPr lang="zh-CN" altLang="en-US" smtClean="0"/>
-              <a:t>2026/6/29</a:t>
+              <a:t>2026/8/10</a:t>
             </a:fld>
             <a:endParaRPr lang="zh-CN" altLang="en-US"/>
           </a:p>
@@ -4970,7 +5080,7 @@
           <a:p>
             <a:fld id="{530820CF-B880-4189-942D-D702A7CBA730}" type="datetimeFigureOut">
               <a:rPr lang="zh-CN" altLang="en-US" smtClean="0"/>
-              <a:t>2026/6/29</a:t>
+              <a:t>2026/8/10</a:t>
             </a:fld>
             <a:endParaRPr lang="zh-CN" altLang="en-US"/>
           </a:p>
@@ -5240,7 +5350,7 @@
           <a:p>
             <a:fld id="{530820CF-B880-4189-942D-D702A7CBA730}" type="datetimeFigureOut">
               <a:rPr lang="zh-CN" altLang="en-US" smtClean="0"/>
-              <a:t>2026/6/29</a:t>
+              <a:t>2026/8/10</a:t>
             </a:fld>
             <a:endParaRPr lang="zh-CN" altLang="en-US"/>
           </a:p>
@@ -5487,7 +5597,7 @@
           <a:p>
             <a:fld id="{530820CF-B880-4189-942D-D702A7CBA730}" type="datetimeFigureOut">
               <a:rPr lang="zh-CN" altLang="en-US" smtClean="0"/>
-              <a:t>2026/6/29</a:t>
+              <a:t>2026/8/10</a:t>
             </a:fld>
             <a:endParaRPr lang="zh-CN" altLang="en-US"/>
           </a:p>
@@ -5693,7 +5803,7 @@
           <a:p>
             <a:fld id="{530820CF-B880-4189-942D-D702A7CBA730}" type="datetimeFigureOut">
               <a:rPr lang="zh-CN" altLang="en-US" smtClean="0"/>
-              <a:t>2026/6/29</a:t>
+              <a:t>2026/8/10</a:t>
             </a:fld>
             <a:endParaRPr lang="zh-CN" altLang="en-US"/>
           </a:p>
@@ -6096,28 +6206,15 @@
                 <a:latin typeface="微软雅黑" panose="020B0503020204020204" pitchFamily="34" charset="-122"/>
                 <a:ea typeface="微软雅黑" panose="020B0503020204020204" pitchFamily="34" charset="-122"/>
               </a:rPr>
-              <a:t>工业互联网环境下移动</a:t>
-            </a:r>
-            <a:r>
-              <a:rPr lang="en-US" altLang="zh-CN" sz="2700" b="1" spc="225" dirty="0">
-                <a:solidFill>
-                  <a:srgbClr val="044875"/>
-                </a:solidFill>
-                <a:latin typeface="微软雅黑" panose="020B0503020204020204" pitchFamily="34" charset="-122"/>
-                <a:ea typeface="微软雅黑" panose="020B0503020204020204" pitchFamily="34" charset="-122"/>
-              </a:rPr>
-              <a:t>-</a:t>
-            </a:r>
-            <a:r>
-              <a:rPr lang="zh-CN" altLang="en-US" sz="2700" b="1" spc="225" dirty="0">
-                <a:solidFill>
-                  <a:srgbClr val="044875"/>
-                </a:solidFill>
-                <a:latin typeface="微软雅黑" panose="020B0503020204020204" pitchFamily="34" charset="-122"/>
-                <a:ea typeface="微软雅黑" panose="020B0503020204020204" pitchFamily="34" charset="-122"/>
-              </a:rPr>
-              <a:t>固定多智能体协同调度及抗扰性研究</a:t>
-            </a:r>
+              <a:t>工业互联网环境下异构柔性作业车间无冲突调度的协同优化及抗扰性研究</a:t>
+            </a:r>
+            <a:endParaRPr lang="zh-CN" altLang="en-US" sz="2700" b="1" spc="225" dirty="0">
+              <a:solidFill>
+                <a:srgbClr val="044875"/>
+              </a:solidFill>
+              <a:latin typeface="微软雅黑" panose="020B0503020204020204" pitchFamily="34" charset="-122"/>
+              <a:ea typeface="微软雅黑" panose="020B0503020204020204" pitchFamily="34" charset="-122"/>
+            </a:endParaRPr>
           </a:p>
         </p:txBody>
       </p:sp>
@@ -7286,7 +7383,7 @@
           <p:cNvPr id="20" name="TextBox 19">
             <a:extLst>
               <a:ext uri="{FF2B5EF4-FFF2-40B4-BE49-F238E27FC236}">
-                <a16:creationId xmlns:a16="http://schemas.microsoft.com/office/drawing/2014/main" xmlns="" id="{B463265E-52CA-8331-C429-A514361321C9}"/>
+                <a16:creationId xmlns="" xmlns:a16="http://schemas.microsoft.com/office/drawing/2014/main" id="{B463265E-52CA-8331-C429-A514361321C9}"/>
               </a:ext>
             </a:extLst>
           </p:cNvPr>
@@ -7844,7 +7941,7 @@
           <p:cNvPr id="9" name="Picture 8">
             <a:extLst>
               <a:ext uri="{FF2B5EF4-FFF2-40B4-BE49-F238E27FC236}">
-                <a16:creationId xmlns:a16="http://schemas.microsoft.com/office/drawing/2014/main" xmlns="" id="{91682C3C-243E-DD02-5AB1-80EF1E7BDF21}"/>
+                <a16:creationId xmlns="" xmlns:a16="http://schemas.microsoft.com/office/drawing/2014/main" id="{91682C3C-243E-DD02-5AB1-80EF1E7BDF21}"/>
               </a:ext>
             </a:extLst>
           </p:cNvPr>
@@ -7861,13 +7958,14 @@
               </a:ext>
             </a:extLst>
           </a:blip>
-          <a:srcRect/>
-          <a:stretch/>
+          <a:stretch>
+            <a:fillRect/>
+          </a:stretch>
         </p:blipFill>
         <p:spPr>
           <a:xfrm>
-            <a:off x="207712" y="711924"/>
-            <a:ext cx="8728575" cy="4157538"/>
+            <a:off x="207712" y="712953"/>
+            <a:ext cx="8728575" cy="4155479"/>
           </a:xfrm>
           <a:prstGeom prst="rect">
             <a:avLst/>
@@ -9843,7 +9941,7 @@
           <p:cNvPr id="9" name="TextBox 8">
             <a:extLst>
               <a:ext uri="{FF2B5EF4-FFF2-40B4-BE49-F238E27FC236}">
-                <a16:creationId xmlns:a16="http://schemas.microsoft.com/office/drawing/2014/main" xmlns="" id="{9F983F25-BE03-BC64-7B5D-2A3B7512ECB6}"/>
+                <a16:creationId xmlns="" xmlns:a16="http://schemas.microsoft.com/office/drawing/2014/main" id="{9F983F25-BE03-BC64-7B5D-2A3B7512ECB6}"/>
               </a:ext>
             </a:extLst>
           </p:cNvPr>
@@ -9894,7 +9992,7 @@
           <p:cNvPr id="10" name="TextBox 9">
             <a:extLst>
               <a:ext uri="{FF2B5EF4-FFF2-40B4-BE49-F238E27FC236}">
-                <a16:creationId xmlns:a16="http://schemas.microsoft.com/office/drawing/2014/main" xmlns="" id="{C12E34B3-BE35-4868-6735-25D134DEF5C8}"/>
+                <a16:creationId xmlns="" xmlns:a16="http://schemas.microsoft.com/office/drawing/2014/main" id="{C12E34B3-BE35-4868-6735-25D134DEF5C8}"/>
               </a:ext>
             </a:extLst>
           </p:cNvPr>
@@ -9953,7 +10051,7 @@
           <p:cNvPr id="14" name="Arrow: Curved Right 13">
             <a:extLst>
               <a:ext uri="{FF2B5EF4-FFF2-40B4-BE49-F238E27FC236}">
-                <a16:creationId xmlns:a16="http://schemas.microsoft.com/office/drawing/2014/main" xmlns="" id="{311C2079-B052-92BB-66F3-2CD95A065427}"/>
+                <a16:creationId xmlns="" xmlns:a16="http://schemas.microsoft.com/office/drawing/2014/main" id="{311C2079-B052-92BB-66F3-2CD95A065427}"/>
               </a:ext>
             </a:extLst>
           </p:cNvPr>
@@ -10003,7 +10101,7 @@
           <p:cNvPr id="15" name="Arrow: Curved Right 14">
             <a:extLst>
               <a:ext uri="{FF2B5EF4-FFF2-40B4-BE49-F238E27FC236}">
-                <a16:creationId xmlns:a16="http://schemas.microsoft.com/office/drawing/2014/main" xmlns="" id="{FF88AC0A-C5A2-CAB1-A427-5A9658C9F8C2}"/>
+                <a16:creationId xmlns="" xmlns:a16="http://schemas.microsoft.com/office/drawing/2014/main" id="{FF88AC0A-C5A2-CAB1-A427-5A9658C9F8C2}"/>
               </a:ext>
             </a:extLst>
           </p:cNvPr>
@@ -10053,7 +10151,7 @@
           <p:cNvPr id="21" name="TextBox 20">
             <a:extLst>
               <a:ext uri="{FF2B5EF4-FFF2-40B4-BE49-F238E27FC236}">
-                <a16:creationId xmlns:a16="http://schemas.microsoft.com/office/drawing/2014/main" xmlns="" id="{70B67195-43C4-4C5D-F3B4-0C34C602A93D}"/>
+                <a16:creationId xmlns="" xmlns:a16="http://schemas.microsoft.com/office/drawing/2014/main" id="{70B67195-43C4-4C5D-F3B4-0C34C602A93D}"/>
               </a:ext>
             </a:extLst>
           </p:cNvPr>
@@ -10534,7 +10632,7 @@
           <p:cNvPr id="9" name="Picture 8">
             <a:extLst>
               <a:ext uri="{FF2B5EF4-FFF2-40B4-BE49-F238E27FC236}">
-                <a16:creationId xmlns:a16="http://schemas.microsoft.com/office/drawing/2014/main" xmlns="" id="{4160488D-D0FD-2A08-7CC1-253060BBC941}"/>
+                <a16:creationId xmlns="" xmlns:a16="http://schemas.microsoft.com/office/drawing/2014/main" id="{4160488D-D0FD-2A08-7CC1-253060BBC941}"/>
               </a:ext>
             </a:extLst>
           </p:cNvPr>
@@ -10570,7 +10668,7 @@
           <p:cNvPr id="12" name="Picture 11">
             <a:extLst>
               <a:ext uri="{FF2B5EF4-FFF2-40B4-BE49-F238E27FC236}">
-                <a16:creationId xmlns:a16="http://schemas.microsoft.com/office/drawing/2014/main" xmlns="" id="{42C3910C-B661-038F-2EDE-55EBECD4D73A}"/>
+                <a16:creationId xmlns="" xmlns:a16="http://schemas.microsoft.com/office/drawing/2014/main" id="{42C3910C-B661-038F-2EDE-55EBECD4D73A}"/>
               </a:ext>
             </a:extLst>
           </p:cNvPr>
@@ -10606,7 +10704,7 @@
           <p:cNvPr id="17" name="Arrow: Bent-Up 16">
             <a:extLst>
               <a:ext uri="{FF2B5EF4-FFF2-40B4-BE49-F238E27FC236}">
-                <a16:creationId xmlns:a16="http://schemas.microsoft.com/office/drawing/2014/main" xmlns="" id="{0D113175-3B95-E60E-9840-0865AAD5775F}"/>
+                <a16:creationId xmlns="" xmlns:a16="http://schemas.microsoft.com/office/drawing/2014/main" id="{0D113175-3B95-E60E-9840-0865AAD5775F}"/>
               </a:ext>
             </a:extLst>
           </p:cNvPr>
@@ -10660,7 +10758,7 @@
           <p:cNvPr id="19" name="矩形 10">
             <a:extLst>
               <a:ext uri="{FF2B5EF4-FFF2-40B4-BE49-F238E27FC236}">
-                <a16:creationId xmlns:a16="http://schemas.microsoft.com/office/drawing/2014/main" xmlns="" id="{698E5D4B-7CAC-2DCD-E074-AC1A369ED0A4}"/>
+                <a16:creationId xmlns="" xmlns:a16="http://schemas.microsoft.com/office/drawing/2014/main" id="{698E5D4B-7CAC-2DCD-E074-AC1A369ED0A4}"/>
               </a:ext>
             </a:extLst>
           </p:cNvPr>
@@ -10706,7 +10804,7 @@
           <p:cNvPr id="20" name="矩形 11">
             <a:extLst>
               <a:ext uri="{FF2B5EF4-FFF2-40B4-BE49-F238E27FC236}">
-                <a16:creationId xmlns:a16="http://schemas.microsoft.com/office/drawing/2014/main" xmlns="" id="{4B83D5F3-D8C6-A650-836A-E3274EDD7B90}"/>
+                <a16:creationId xmlns="" xmlns:a16="http://schemas.microsoft.com/office/drawing/2014/main" id="{4B83D5F3-D8C6-A650-836A-E3274EDD7B90}"/>
               </a:ext>
             </a:extLst>
           </p:cNvPr>
@@ -10752,7 +10850,7 @@
           <p:cNvPr id="23" name="TextBox 22">
             <a:extLst>
               <a:ext uri="{FF2B5EF4-FFF2-40B4-BE49-F238E27FC236}">
-                <a16:creationId xmlns:a16="http://schemas.microsoft.com/office/drawing/2014/main" xmlns="" id="{A200EEA4-3B4D-8DA6-FAF7-1DD72D7FBF63}"/>
+                <a16:creationId xmlns="" xmlns:a16="http://schemas.microsoft.com/office/drawing/2014/main" id="{A200EEA4-3B4D-8DA6-FAF7-1DD72D7FBF63}"/>
               </a:ext>
             </a:extLst>
           </p:cNvPr>
@@ -10794,7 +10892,7 @@
           <p:cNvPr id="24" name="TextBox 23">
             <a:extLst>
               <a:ext uri="{FF2B5EF4-FFF2-40B4-BE49-F238E27FC236}">
-                <a16:creationId xmlns:a16="http://schemas.microsoft.com/office/drawing/2014/main" xmlns="" id="{895E8596-0FCF-8A83-373F-8E6314542606}"/>
+                <a16:creationId xmlns="" xmlns:a16="http://schemas.microsoft.com/office/drawing/2014/main" id="{895E8596-0FCF-8A83-373F-8E6314542606}"/>
               </a:ext>
             </a:extLst>
           </p:cNvPr>
@@ -11271,7 +11369,7 @@
           <p:cNvPr id="10" name="矩形 10">
             <a:extLst>
               <a:ext uri="{FF2B5EF4-FFF2-40B4-BE49-F238E27FC236}">
-                <a16:creationId xmlns:a16="http://schemas.microsoft.com/office/drawing/2014/main" xmlns="" id="{CD0B42CA-8CB7-804D-5241-1F1E2778AE41}"/>
+                <a16:creationId xmlns="" xmlns:a16="http://schemas.microsoft.com/office/drawing/2014/main" id="{CD0B42CA-8CB7-804D-5241-1F1E2778AE41}"/>
               </a:ext>
             </a:extLst>
           </p:cNvPr>
@@ -11317,7 +11415,7 @@
           <p:cNvPr id="15" name="矩形 11">
             <a:extLst>
               <a:ext uri="{FF2B5EF4-FFF2-40B4-BE49-F238E27FC236}">
-                <a16:creationId xmlns:a16="http://schemas.microsoft.com/office/drawing/2014/main" xmlns="" id="{4A703DAD-7FEB-879B-47FE-F61D2140B2A6}"/>
+                <a16:creationId xmlns="" xmlns:a16="http://schemas.microsoft.com/office/drawing/2014/main" id="{4A703DAD-7FEB-879B-47FE-F61D2140B2A6}"/>
               </a:ext>
             </a:extLst>
           </p:cNvPr>
@@ -11363,7 +11461,7 @@
           <p:cNvPr id="21" name="TextBox 7">
             <a:extLst>
               <a:ext uri="{FF2B5EF4-FFF2-40B4-BE49-F238E27FC236}">
-                <a16:creationId xmlns:a16="http://schemas.microsoft.com/office/drawing/2014/main" xmlns="" id="{31154B70-F08D-5359-62A2-63A5F4902493}"/>
+                <a16:creationId xmlns="" xmlns:a16="http://schemas.microsoft.com/office/drawing/2014/main" id="{31154B70-F08D-5359-62A2-63A5F4902493}"/>
               </a:ext>
             </a:extLst>
           </p:cNvPr>
@@ -11468,7 +11566,7 @@
           <p:cNvPr id="25" name="矩形 15">
             <a:extLst>
               <a:ext uri="{FF2B5EF4-FFF2-40B4-BE49-F238E27FC236}">
-                <a16:creationId xmlns:a16="http://schemas.microsoft.com/office/drawing/2014/main" xmlns="" id="{F719B801-ED16-F8F9-B3FA-9BCD302179FA}"/>
+                <a16:creationId xmlns="" xmlns:a16="http://schemas.microsoft.com/office/drawing/2014/main" id="{F719B801-ED16-F8F9-B3FA-9BCD302179FA}"/>
               </a:ext>
             </a:extLst>
           </p:cNvPr>
@@ -11569,7 +11667,7 @@
           <p:cNvPr id="26" name="矩形 16">
             <a:extLst>
               <a:ext uri="{FF2B5EF4-FFF2-40B4-BE49-F238E27FC236}">
-                <a16:creationId xmlns:a16="http://schemas.microsoft.com/office/drawing/2014/main" xmlns="" id="{A766754D-A161-FC7B-0309-BD33A23321F9}"/>
+                <a16:creationId xmlns="" xmlns:a16="http://schemas.microsoft.com/office/drawing/2014/main" id="{A766754D-A161-FC7B-0309-BD33A23321F9}"/>
               </a:ext>
             </a:extLst>
           </p:cNvPr>
@@ -11699,7 +11797,7 @@
           <p:cNvPr id="27" name="矩形 17">
             <a:extLst>
               <a:ext uri="{FF2B5EF4-FFF2-40B4-BE49-F238E27FC236}">
-                <a16:creationId xmlns:a16="http://schemas.microsoft.com/office/drawing/2014/main" xmlns="" id="{D2110BA3-CA83-937F-E77C-2F8AED1CFA58}"/>
+                <a16:creationId xmlns="" xmlns:a16="http://schemas.microsoft.com/office/drawing/2014/main" id="{D2110BA3-CA83-937F-E77C-2F8AED1CFA58}"/>
               </a:ext>
             </a:extLst>
           </p:cNvPr>
@@ -11790,7 +11888,7 @@
           <p:cNvPr id="28" name="右箭头 21">
             <a:extLst>
               <a:ext uri="{FF2B5EF4-FFF2-40B4-BE49-F238E27FC236}">
-                <a16:creationId xmlns:a16="http://schemas.microsoft.com/office/drawing/2014/main" xmlns="" id="{D8B8B683-A4B6-BA44-DFAA-C2FC006E9FDF}"/>
+                <a16:creationId xmlns="" xmlns:a16="http://schemas.microsoft.com/office/drawing/2014/main" id="{D8B8B683-A4B6-BA44-DFAA-C2FC006E9FDF}"/>
               </a:ext>
             </a:extLst>
           </p:cNvPr>
@@ -11836,7 +11934,7 @@
           <p:cNvPr id="29" name="右箭头 22">
             <a:extLst>
               <a:ext uri="{FF2B5EF4-FFF2-40B4-BE49-F238E27FC236}">
-                <a16:creationId xmlns:a16="http://schemas.microsoft.com/office/drawing/2014/main" xmlns="" id="{09D718F2-0D21-4490-89D8-71E437948539}"/>
+                <a16:creationId xmlns="" xmlns:a16="http://schemas.microsoft.com/office/drawing/2014/main" id="{09D718F2-0D21-4490-89D8-71E437948539}"/>
               </a:ext>
             </a:extLst>
           </p:cNvPr>
@@ -12297,7 +12395,7 @@
           <p:cNvPr id="9" name="TextBox 8">
             <a:extLst>
               <a:ext uri="{FF2B5EF4-FFF2-40B4-BE49-F238E27FC236}">
-                <a16:creationId xmlns:a16="http://schemas.microsoft.com/office/drawing/2014/main" xmlns="" id="{AF612170-EF4C-B2EC-93F0-25975D263C2E}"/>
+                <a16:creationId xmlns="" xmlns:a16="http://schemas.microsoft.com/office/drawing/2014/main" id="{AF612170-EF4C-B2EC-93F0-25975D263C2E}"/>
               </a:ext>
             </a:extLst>
           </p:cNvPr>
@@ -12341,7 +12439,7 @@
               <p:cNvPr id="10" name="TextBox 9">
                 <a:extLst>
                   <a:ext uri="{FF2B5EF4-FFF2-40B4-BE49-F238E27FC236}">
-                    <a16:creationId xmlns:a16="http://schemas.microsoft.com/office/drawing/2014/main" xmlns="" id="{414D82EE-10CA-D554-10D0-69B7E7460DCC}"/>
+                    <a16:creationId xmlns="" xmlns:a16="http://schemas.microsoft.com/office/drawing/2014/main" id="{414D82EE-10CA-D554-10D0-69B7E7460DCC}"/>
                   </a:ext>
                 </a:extLst>
               </p:cNvPr>
@@ -12389,7 +12487,7 @@
                           <m:endChr m:val="]"/>
                           <m:ctrlPr>
                             <a:rPr lang="en-US" i="1">
-                              <a:latin typeface="Cambria Math"/>
+                              <a:latin typeface="Cambria Math" panose="02040503050406030204" pitchFamily="18" charset="0"/>
                             </a:rPr>
                           </m:ctrlPr>
                         </m:dPr>
@@ -12407,7 +12505,7 @@
                               </m:mcs>
                               <m:ctrlPr>
                                 <a:rPr lang="en-US" i="1">
-                                  <a:latin typeface="Cambria Math"/>
+                                  <a:latin typeface="Cambria Math" panose="02040503050406030204" pitchFamily="18" charset="0"/>
                                 </a:rPr>
                               </m:ctrlPr>
                             </m:mPr>
@@ -12417,7 +12515,7 @@
                                   <m:sSubPr>
                                     <m:ctrlPr>
                                       <a:rPr lang="en-US" i="1">
-                                        <a:latin typeface="Cambria Math"/>
+                                        <a:latin typeface="Cambria Math" panose="02040503050406030204" pitchFamily="18" charset="0"/>
                                       </a:rPr>
                                     </m:ctrlPr>
                                   </m:sSubPr>
@@ -12444,7 +12542,7 @@
                                   <m:sSubPr>
                                     <m:ctrlPr>
                                       <a:rPr lang="en-US" i="1">
-                                        <a:latin typeface="Cambria Math"/>
+                                        <a:latin typeface="Cambria Math" panose="02040503050406030204" pitchFamily="18" charset="0"/>
                                       </a:rPr>
                                     </m:ctrlPr>
                                   </m:sSubPr>
@@ -12479,7 +12577,7 @@
                                   <m:sSubPr>
                                     <m:ctrlPr>
                                       <a:rPr lang="en-US" i="1">
-                                        <a:latin typeface="Cambria Math"/>
+                                        <a:latin typeface="Cambria Math" panose="02040503050406030204" pitchFamily="18" charset="0"/>
                                       </a:rPr>
                                     </m:ctrlPr>
                                   </m:sSubPr>
@@ -12514,7 +12612,7 @@
                                   <m:sSubPr>
                                     <m:ctrlPr>
                                       <a:rPr lang="en-US" i="1">
-                                        <a:latin typeface="Cambria Math"/>
+                                        <a:latin typeface="Cambria Math" panose="02040503050406030204" pitchFamily="18" charset="0"/>
                                       </a:rPr>
                                     </m:ctrlPr>
                                   </m:sSubPr>
@@ -12541,7 +12639,7 @@
                                   <m:sSubPr>
                                     <m:ctrlPr>
                                       <a:rPr lang="en-US" i="1">
-                                        <a:latin typeface="Cambria Math"/>
+                                        <a:latin typeface="Cambria Math" panose="02040503050406030204" pitchFamily="18" charset="0"/>
                                       </a:rPr>
                                     </m:ctrlPr>
                                   </m:sSubPr>
@@ -12576,7 +12674,7 @@
                                   <m:sSubPr>
                                     <m:ctrlPr>
                                       <a:rPr lang="en-US" i="1">
-                                        <a:latin typeface="Cambria Math"/>
+                                        <a:latin typeface="Cambria Math" panose="02040503050406030204" pitchFamily="18" charset="0"/>
                                       </a:rPr>
                                     </m:ctrlPr>
                                   </m:sSubPr>
@@ -12645,7 +12743,7 @@
                                   <m:sSubPr>
                                     <m:ctrlPr>
                                       <a:rPr lang="en-US" i="1">
-                                        <a:latin typeface="Cambria Math"/>
+                                        <a:latin typeface="Cambria Math" panose="02040503050406030204" pitchFamily="18" charset="0"/>
                                       </a:rPr>
                                     </m:ctrlPr>
                                   </m:sSubPr>
@@ -12678,7 +12776,7 @@
                                   <m:sSubPr>
                                     <m:ctrlPr>
                                       <a:rPr lang="en-US" i="1">
-                                        <a:latin typeface="Cambria Math"/>
+                                        <a:latin typeface="Cambria Math" panose="02040503050406030204" pitchFamily="18" charset="0"/>
                                       </a:rPr>
                                     </m:ctrlPr>
                                   </m:sSubPr>
@@ -12719,7 +12817,7 @@
                                   <m:sSubPr>
                                     <m:ctrlPr>
                                       <a:rPr lang="en-US" i="1">
-                                        <a:latin typeface="Cambria Math"/>
+                                        <a:latin typeface="Cambria Math" panose="02040503050406030204" pitchFamily="18" charset="0"/>
                                       </a:rPr>
                                     </m:ctrlPr>
                                   </m:sSubPr>
@@ -12803,7 +12901,7 @@
           <p:cNvPr id="11" name="TextBox 10">
             <a:extLst>
               <a:ext uri="{FF2B5EF4-FFF2-40B4-BE49-F238E27FC236}">
-                <a16:creationId xmlns:a16="http://schemas.microsoft.com/office/drawing/2014/main" xmlns="" id="{FA699D05-5C41-2252-9EA6-0BF50906B0B2}"/>
+                <a16:creationId xmlns="" xmlns:a16="http://schemas.microsoft.com/office/drawing/2014/main" id="{FA699D05-5C41-2252-9EA6-0BF50906B0B2}"/>
               </a:ext>
             </a:extLst>
           </p:cNvPr>
@@ -12845,7 +12943,7 @@
           <p:cNvPr id="12" name="Picture 11">
             <a:extLst>
               <a:ext uri="{FF2B5EF4-FFF2-40B4-BE49-F238E27FC236}">
-                <a16:creationId xmlns:a16="http://schemas.microsoft.com/office/drawing/2014/main" xmlns="" id="{A3477455-725F-6D68-9CE3-D63B52CF6AB9}"/>
+                <a16:creationId xmlns="" xmlns:a16="http://schemas.microsoft.com/office/drawing/2014/main" id="{A3477455-725F-6D68-9CE3-D63B52CF6AB9}"/>
               </a:ext>
             </a:extLst>
           </p:cNvPr>
@@ -12881,7 +12979,7 @@
           <p:cNvPr id="13" name="Straight Connector 12">
             <a:extLst>
               <a:ext uri="{FF2B5EF4-FFF2-40B4-BE49-F238E27FC236}">
-                <a16:creationId xmlns:a16="http://schemas.microsoft.com/office/drawing/2014/main" xmlns="" id="{9C5AA790-ABBE-851D-73D7-D4FF92E89363}"/>
+                <a16:creationId xmlns="" xmlns:a16="http://schemas.microsoft.com/office/drawing/2014/main" id="{9C5AA790-ABBE-851D-73D7-D4FF92E89363}"/>
               </a:ext>
             </a:extLst>
           </p:cNvPr>
@@ -12919,7 +13017,7 @@
           <p:cNvPr id="15" name="TextBox 14">
             <a:extLst>
               <a:ext uri="{FF2B5EF4-FFF2-40B4-BE49-F238E27FC236}">
-                <a16:creationId xmlns:a16="http://schemas.microsoft.com/office/drawing/2014/main" xmlns="" id="{7A3AA1F4-8204-1E70-CF03-67D86EE1A625}"/>
+                <a16:creationId xmlns="" xmlns:a16="http://schemas.microsoft.com/office/drawing/2014/main" id="{7A3AA1F4-8204-1E70-CF03-67D86EE1A625}"/>
               </a:ext>
             </a:extLst>
           </p:cNvPr>
@@ -12970,7 +13068,7 @@
               <p:cNvPr id="16" name="TextBox 15">
                 <a:extLst>
                   <a:ext uri="{FF2B5EF4-FFF2-40B4-BE49-F238E27FC236}">
-                    <a16:creationId xmlns:a16="http://schemas.microsoft.com/office/drawing/2014/main" xmlns="" id="{4C1EC216-4895-835E-BF67-ABD9F0D54D3C}"/>
+                    <a16:creationId xmlns="" xmlns:a16="http://schemas.microsoft.com/office/drawing/2014/main" id="{4C1EC216-4895-835E-BF67-ABD9F0D54D3C}"/>
                   </a:ext>
                 </a:extLst>
               </p:cNvPr>
@@ -13002,7 +13100,7 @@
                         <m:sepChr m:val="−"/>
                         <m:ctrlPr>
                           <a:rPr lang="en-US" i="1">
-                            <a:latin typeface="Cambria Math"/>
+                            <a:latin typeface="Cambria Math" panose="02040503050406030204" pitchFamily="18" charset="0"/>
                           </a:rPr>
                         </m:ctrlPr>
                       </m:dPr>
@@ -13011,7 +13109,7 @@
                           <m:sSubPr>
                             <m:ctrlPr>
                               <a:rPr lang="en-US" i="1">
-                                <a:latin typeface="Cambria Math"/>
+                                <a:latin typeface="Cambria Math" panose="02040503050406030204" pitchFamily="18" charset="0"/>
                               </a:rPr>
                             </m:ctrlPr>
                           </m:sSubPr>
@@ -13034,7 +13132,13 @@
                               <a:rPr lang="en-US" i="1">
                                 <a:latin typeface="Cambria Math" panose="02040503050406030204" pitchFamily="18" charset="0"/>
                               </a:rPr>
-                              <m:t>+1</m:t>
+                              <m:t>+</m:t>
+                            </m:r>
+                            <m:r>
+                              <a:rPr lang="en-US" i="1">
+                                <a:latin typeface="Cambria Math" panose="02040503050406030204" pitchFamily="18" charset="0"/>
+                              </a:rPr>
+                              <m:t>1</m:t>
                             </m:r>
                           </m:sub>
                         </m:sSub>
@@ -13044,7 +13148,7 @@
                           <m:sSubPr>
                             <m:ctrlPr>
                               <a:rPr lang="en-US" i="1">
-                                <a:latin typeface="Cambria Math"/>
+                                <a:latin typeface="Cambria Math" panose="02040503050406030204" pitchFamily="18" charset="0"/>
                               </a:rPr>
                             </m:ctrlPr>
                           </m:sSubPr>
@@ -13053,7 +13157,7 @@
                               <m:limUppPr>
                                 <m:ctrlPr>
                                   <a:rPr lang="en-US" i="1">
-                                    <a:latin typeface="Cambria Math"/>
+                                    <a:latin typeface="Cambria Math" panose="02040503050406030204" pitchFamily="18" charset="0"/>
                                   </a:rPr>
                                 </m:ctrlPr>
                               </m:limUppPr>
@@ -13086,7 +13190,13 @@
                               <a:rPr lang="en-US" i="1">
                                 <a:latin typeface="Cambria Math" panose="02040503050406030204" pitchFamily="18" charset="0"/>
                               </a:rPr>
-                              <m:t>+1</m:t>
+                              <m:t>+</m:t>
+                            </m:r>
+                            <m:r>
+                              <a:rPr lang="en-US" i="1">
+                                <a:latin typeface="Cambria Math" panose="02040503050406030204" pitchFamily="18" charset="0"/>
+                              </a:rPr>
+                              <m:t>1</m:t>
                             </m:r>
                           </m:sub>
                         </m:sSub>
@@ -13152,7 +13262,7 @@
           <p:cNvPr id="17" name="TextBox 16">
             <a:extLst>
               <a:ext uri="{FF2B5EF4-FFF2-40B4-BE49-F238E27FC236}">
-                <a16:creationId xmlns:a16="http://schemas.microsoft.com/office/drawing/2014/main" xmlns="" id="{11707134-B3BB-A2E7-C019-C40C95F0098B}"/>
+                <a16:creationId xmlns="" xmlns:a16="http://schemas.microsoft.com/office/drawing/2014/main" id="{11707134-B3BB-A2E7-C019-C40C95F0098B}"/>
               </a:ext>
             </a:extLst>
           </p:cNvPr>
@@ -13194,7 +13304,7 @@
           <p:cNvPr id="18" name="TextBox 17">
             <a:extLst>
               <a:ext uri="{FF2B5EF4-FFF2-40B4-BE49-F238E27FC236}">
-                <a16:creationId xmlns:a16="http://schemas.microsoft.com/office/drawing/2014/main" xmlns="" id="{C6D42A51-C137-1803-CDF3-22309595DC81}"/>
+                <a16:creationId xmlns="" xmlns:a16="http://schemas.microsoft.com/office/drawing/2014/main" id="{C6D42A51-C137-1803-CDF3-22309595DC81}"/>
               </a:ext>
             </a:extLst>
           </p:cNvPr>
@@ -13270,7 +13380,7 @@
           <p:cNvPr id="19" name="TextBox 18">
             <a:extLst>
               <a:ext uri="{FF2B5EF4-FFF2-40B4-BE49-F238E27FC236}">
-                <a16:creationId xmlns:a16="http://schemas.microsoft.com/office/drawing/2014/main" xmlns="" id="{5B0C1A31-E180-CF82-E59F-F18063BA80EB}"/>
+                <a16:creationId xmlns="" xmlns:a16="http://schemas.microsoft.com/office/drawing/2014/main" id="{5B0C1A31-E180-CF82-E59F-F18063BA80EB}"/>
               </a:ext>
             </a:extLst>
           </p:cNvPr>
@@ -13330,7 +13440,7 @@
           <p:cNvPr id="20" name="TextBox 19">
             <a:extLst>
               <a:ext uri="{FF2B5EF4-FFF2-40B4-BE49-F238E27FC236}">
-                <a16:creationId xmlns:a16="http://schemas.microsoft.com/office/drawing/2014/main" xmlns="" id="{562484C7-AA35-93F3-29F0-95E7620EAC82}"/>
+                <a16:creationId xmlns="" xmlns:a16="http://schemas.microsoft.com/office/drawing/2014/main" id="{562484C7-AA35-93F3-29F0-95E7620EAC82}"/>
               </a:ext>
             </a:extLst>
           </p:cNvPr>
@@ -13370,7 +13480,7 @@
           <p:cNvPr id="21" name="TextBox 20">
             <a:extLst>
               <a:ext uri="{FF2B5EF4-FFF2-40B4-BE49-F238E27FC236}">
-                <a16:creationId xmlns:a16="http://schemas.microsoft.com/office/drawing/2014/main" xmlns="" id="{B626A332-97A0-594D-91BF-B51439CACD83}"/>
+                <a16:creationId xmlns="" xmlns:a16="http://schemas.microsoft.com/office/drawing/2014/main" id="{B626A332-97A0-594D-91BF-B51439CACD83}"/>
               </a:ext>
             </a:extLst>
           </p:cNvPr>
@@ -13460,7 +13570,7 @@
           <p:cNvPr id="22" name="TextBox 21">
             <a:extLst>
               <a:ext uri="{FF2B5EF4-FFF2-40B4-BE49-F238E27FC236}">
-                <a16:creationId xmlns:a16="http://schemas.microsoft.com/office/drawing/2014/main" xmlns="" id="{E1ECFCE6-B538-2795-05C8-940921135F1A}"/>
+                <a16:creationId xmlns="" xmlns:a16="http://schemas.microsoft.com/office/drawing/2014/main" id="{E1ECFCE6-B538-2795-05C8-940921135F1A}"/>
               </a:ext>
             </a:extLst>
           </p:cNvPr>
@@ -13519,7 +13629,7 @@
           <p:cNvPr id="23" name="TextBox 22">
             <a:extLst>
               <a:ext uri="{FF2B5EF4-FFF2-40B4-BE49-F238E27FC236}">
-                <a16:creationId xmlns:a16="http://schemas.microsoft.com/office/drawing/2014/main" xmlns="" id="{5C6D2D94-D765-55B6-163F-95248684F6F0}"/>
+                <a16:creationId xmlns="" xmlns:a16="http://schemas.microsoft.com/office/drawing/2014/main" id="{5C6D2D94-D765-55B6-163F-95248684F6F0}"/>
               </a:ext>
             </a:extLst>
           </p:cNvPr>
@@ -13956,7 +14066,7 @@
           <p:cNvPr id="8" name="矩形 10">
             <a:extLst>
               <a:ext uri="{FF2B5EF4-FFF2-40B4-BE49-F238E27FC236}">
-                <a16:creationId xmlns:a16="http://schemas.microsoft.com/office/drawing/2014/main" xmlns="" id="{CD14F516-DC24-121F-5776-1EA2FEF8DC43}"/>
+                <a16:creationId xmlns="" xmlns:a16="http://schemas.microsoft.com/office/drawing/2014/main" id="{CD14F516-DC24-121F-5776-1EA2FEF8DC43}"/>
               </a:ext>
             </a:extLst>
           </p:cNvPr>
@@ -14002,7 +14112,7 @@
           <p:cNvPr id="9" name="矩形 11">
             <a:extLst>
               <a:ext uri="{FF2B5EF4-FFF2-40B4-BE49-F238E27FC236}">
-                <a16:creationId xmlns:a16="http://schemas.microsoft.com/office/drawing/2014/main" xmlns="" id="{54060D8E-BD7F-3E18-1393-B258AD65F8A2}"/>
+                <a16:creationId xmlns="" xmlns:a16="http://schemas.microsoft.com/office/drawing/2014/main" id="{54060D8E-BD7F-3E18-1393-B258AD65F8A2}"/>
               </a:ext>
             </a:extLst>
           </p:cNvPr>
@@ -14048,7 +14158,7 @@
           <p:cNvPr id="10" name="TextBox 7">
             <a:extLst>
               <a:ext uri="{FF2B5EF4-FFF2-40B4-BE49-F238E27FC236}">
-                <a16:creationId xmlns:a16="http://schemas.microsoft.com/office/drawing/2014/main" xmlns="" id="{61728BF3-B1DE-D21B-571C-36875A4EFCE1}"/>
+                <a16:creationId xmlns="" xmlns:a16="http://schemas.microsoft.com/office/drawing/2014/main" id="{61728BF3-B1DE-D21B-571C-36875A4EFCE1}"/>
               </a:ext>
             </a:extLst>
           </p:cNvPr>
@@ -14230,7 +14340,7 @@
           <p:cNvPr id="11" name="矩形 15">
             <a:extLst>
               <a:ext uri="{FF2B5EF4-FFF2-40B4-BE49-F238E27FC236}">
-                <a16:creationId xmlns:a16="http://schemas.microsoft.com/office/drawing/2014/main" xmlns="" id="{9AF2CB60-FDC3-57BB-3D8E-10290464949C}"/>
+                <a16:creationId xmlns="" xmlns:a16="http://schemas.microsoft.com/office/drawing/2014/main" id="{9AF2CB60-FDC3-57BB-3D8E-10290464949C}"/>
               </a:ext>
             </a:extLst>
           </p:cNvPr>
@@ -14399,7 +14509,7 @@
           <p:cNvPr id="12" name="矩形 16">
             <a:extLst>
               <a:ext uri="{FF2B5EF4-FFF2-40B4-BE49-F238E27FC236}">
-                <a16:creationId xmlns:a16="http://schemas.microsoft.com/office/drawing/2014/main" xmlns="" id="{7D8E61C7-E070-4F5F-0C16-6C40F2F84CF6}"/>
+                <a16:creationId xmlns="" xmlns:a16="http://schemas.microsoft.com/office/drawing/2014/main" id="{7D8E61C7-E070-4F5F-0C16-6C40F2F84CF6}"/>
               </a:ext>
             </a:extLst>
           </p:cNvPr>
@@ -14603,7 +14713,7 @@
           <p:cNvPr id="13" name="矩形 17">
             <a:extLst>
               <a:ext uri="{FF2B5EF4-FFF2-40B4-BE49-F238E27FC236}">
-                <a16:creationId xmlns:a16="http://schemas.microsoft.com/office/drawing/2014/main" xmlns="" id="{92D6EEFB-B2C3-DDCB-5F6D-063104343636}"/>
+                <a16:creationId xmlns="" xmlns:a16="http://schemas.microsoft.com/office/drawing/2014/main" id="{92D6EEFB-B2C3-DDCB-5F6D-063104343636}"/>
               </a:ext>
             </a:extLst>
           </p:cNvPr>
@@ -14700,7 +14810,7 @@
           <p:cNvPr id="14" name="右箭头 21">
             <a:extLst>
               <a:ext uri="{FF2B5EF4-FFF2-40B4-BE49-F238E27FC236}">
-                <a16:creationId xmlns:a16="http://schemas.microsoft.com/office/drawing/2014/main" xmlns="" id="{10A827CB-3698-A257-1B82-80FD005247E9}"/>
+                <a16:creationId xmlns="" xmlns:a16="http://schemas.microsoft.com/office/drawing/2014/main" id="{10A827CB-3698-A257-1B82-80FD005247E9}"/>
               </a:ext>
             </a:extLst>
           </p:cNvPr>
@@ -14746,7 +14856,7 @@
           <p:cNvPr id="15" name="右箭头 22">
             <a:extLst>
               <a:ext uri="{FF2B5EF4-FFF2-40B4-BE49-F238E27FC236}">
-                <a16:creationId xmlns:a16="http://schemas.microsoft.com/office/drawing/2014/main" xmlns="" id="{0E67C2BA-A576-BCE3-371C-054013CCA330}"/>
+                <a16:creationId xmlns="" xmlns:a16="http://schemas.microsoft.com/office/drawing/2014/main" id="{0E67C2BA-A576-BCE3-371C-054013CCA330}"/>
               </a:ext>
             </a:extLst>
           </p:cNvPr>
@@ -14803,7 +14913,7 @@
         <p:cNvPr id="1" name="">
           <a:extLst>
             <a:ext uri="{FF2B5EF4-FFF2-40B4-BE49-F238E27FC236}">
-              <a16:creationId xmlns:a16="http://schemas.microsoft.com/office/drawing/2014/main" xmlns="" id="{3CA52C77-070A-6F17-4145-2DC74BDFA18F}"/>
+              <a16:creationId xmlns="" xmlns:a16="http://schemas.microsoft.com/office/drawing/2014/main" id="{3CA52C77-070A-6F17-4145-2DC74BDFA18F}"/>
             </a:ext>
           </a:extLst>
         </p:cNvPr>
@@ -14823,7 +14933,7 @@
           <p:cNvPr id="2" name="矩形 1">
             <a:extLst>
               <a:ext uri="{FF2B5EF4-FFF2-40B4-BE49-F238E27FC236}">
-                <a16:creationId xmlns:a16="http://schemas.microsoft.com/office/drawing/2014/main" xmlns="" id="{E8AB4FE0-738B-D0C6-2A46-D60C00AB311E}"/>
+                <a16:creationId xmlns="" xmlns:a16="http://schemas.microsoft.com/office/drawing/2014/main" id="{E8AB4FE0-738B-D0C6-2A46-D60C00AB311E}"/>
               </a:ext>
             </a:extLst>
           </p:cNvPr>
@@ -14877,7 +14987,7 @@
           <p:cNvPr id="3" name="矩形 2">
             <a:extLst>
               <a:ext uri="{FF2B5EF4-FFF2-40B4-BE49-F238E27FC236}">
-                <a16:creationId xmlns:a16="http://schemas.microsoft.com/office/drawing/2014/main" xmlns="" id="{48067F7B-C960-1418-198E-476340416501}"/>
+                <a16:creationId xmlns="" xmlns:a16="http://schemas.microsoft.com/office/drawing/2014/main" id="{48067F7B-C960-1418-198E-476340416501}"/>
               </a:ext>
             </a:extLst>
           </p:cNvPr>
@@ -14931,7 +15041,7 @@
           <p:cNvPr id="4" name="文本框 20">
             <a:extLst>
               <a:ext uri="{FF2B5EF4-FFF2-40B4-BE49-F238E27FC236}">
-                <a16:creationId xmlns:a16="http://schemas.microsoft.com/office/drawing/2014/main" xmlns="" id="{95E7BEA2-B9A5-24B5-65AA-886AA9451476}"/>
+                <a16:creationId xmlns="" xmlns:a16="http://schemas.microsoft.com/office/drawing/2014/main" id="{95E7BEA2-B9A5-24B5-65AA-886AA9451476}"/>
               </a:ext>
             </a:extLst>
           </p:cNvPr>
@@ -15100,7 +15210,7 @@
           <p:cNvPr id="5" name="文本框 4">
             <a:extLst>
               <a:ext uri="{FF2B5EF4-FFF2-40B4-BE49-F238E27FC236}">
-                <a16:creationId xmlns:a16="http://schemas.microsoft.com/office/drawing/2014/main" xmlns="" id="{D3B45E24-3760-A457-05A0-BF3AF491B84D}"/>
+                <a16:creationId xmlns="" xmlns:a16="http://schemas.microsoft.com/office/drawing/2014/main" id="{D3B45E24-3760-A457-05A0-BF3AF491B84D}"/>
               </a:ext>
             </a:extLst>
           </p:cNvPr>
@@ -15153,7 +15263,7 @@
           <p:cNvPr id="6" name="Rectangle 2">
             <a:extLst>
               <a:ext uri="{FF2B5EF4-FFF2-40B4-BE49-F238E27FC236}">
-                <a16:creationId xmlns:a16="http://schemas.microsoft.com/office/drawing/2014/main" xmlns="" id="{4839A68B-1A2D-500F-F7C0-5A7E9CCDE7D9}"/>
+                <a16:creationId xmlns="" xmlns:a16="http://schemas.microsoft.com/office/drawing/2014/main" id="{4839A68B-1A2D-500F-F7C0-5A7E9CCDE7D9}"/>
               </a:ext>
             </a:extLst>
           </p:cNvPr>
@@ -15219,7 +15329,7 @@
           <p:cNvPr id="7" name="灯片编号占位符 6">
             <a:extLst>
               <a:ext uri="{FF2B5EF4-FFF2-40B4-BE49-F238E27FC236}">
-                <a16:creationId xmlns:a16="http://schemas.microsoft.com/office/drawing/2014/main" xmlns="" id="{CBDA5503-DA0B-047A-3659-181BCE6DA3DC}"/>
+                <a16:creationId xmlns="" xmlns:a16="http://schemas.microsoft.com/office/drawing/2014/main" id="{CBDA5503-DA0B-047A-3659-181BCE6DA3DC}"/>
               </a:ext>
             </a:extLst>
           </p:cNvPr>
@@ -15248,7 +15358,7 @@
           <p:cNvPr id="30" name="TextBox 29">
             <a:extLst>
               <a:ext uri="{FF2B5EF4-FFF2-40B4-BE49-F238E27FC236}">
-                <a16:creationId xmlns:a16="http://schemas.microsoft.com/office/drawing/2014/main" xmlns="" id="{033AFE8A-EC6D-3513-2091-740278E73B06}"/>
+                <a16:creationId xmlns="" xmlns:a16="http://schemas.microsoft.com/office/drawing/2014/main" id="{033AFE8A-EC6D-3513-2091-740278E73B06}"/>
               </a:ext>
             </a:extLst>
           </p:cNvPr>
@@ -15314,7 +15424,7 @@
           <p:cNvPr id="31" name="TextBox 30">
             <a:extLst>
               <a:ext uri="{FF2B5EF4-FFF2-40B4-BE49-F238E27FC236}">
-                <a16:creationId xmlns:a16="http://schemas.microsoft.com/office/drawing/2014/main" xmlns="" id="{6F6C2CC7-D1C5-ACB7-5E30-34079042377C}"/>
+                <a16:creationId xmlns="" xmlns:a16="http://schemas.microsoft.com/office/drawing/2014/main" id="{6F6C2CC7-D1C5-ACB7-5E30-34079042377C}"/>
               </a:ext>
             </a:extLst>
           </p:cNvPr>
@@ -15392,7 +15502,7 @@
           <p:cNvPr id="32" name="TextBox 31">
             <a:extLst>
               <a:ext uri="{FF2B5EF4-FFF2-40B4-BE49-F238E27FC236}">
-                <a16:creationId xmlns:a16="http://schemas.microsoft.com/office/drawing/2014/main" xmlns="" id="{B0DD2F3F-8E39-AD12-76B7-5082EE988AEF}"/>
+                <a16:creationId xmlns="" xmlns:a16="http://schemas.microsoft.com/office/drawing/2014/main" id="{B0DD2F3F-8E39-AD12-76B7-5082EE988AEF}"/>
               </a:ext>
             </a:extLst>
           </p:cNvPr>
@@ -15447,7 +15557,7 @@
               <p:cNvPr id="33" name="TextBox 32">
                 <a:extLst>
                   <a:ext uri="{FF2B5EF4-FFF2-40B4-BE49-F238E27FC236}">
-                    <a16:creationId xmlns:a16="http://schemas.microsoft.com/office/drawing/2014/main" xmlns="" id="{7EB60099-FCAC-7F1C-AF33-ED9E7E9227B6}"/>
+                    <a16:creationId xmlns="" xmlns:a16="http://schemas.microsoft.com/office/drawing/2014/main" id="{7EB60099-FCAC-7F1C-AF33-ED9E7E9227B6}"/>
                   </a:ext>
                 </a:extLst>
               </p:cNvPr>
@@ -15488,7 +15598,7 @@
                         <m:ctrlPr>
                           <a:rPr lang="en-US" sz="1400" i="1" kern="100">
                             <a:effectLst/>
-                            <a:latin typeface="Cambria Math"/>
+                            <a:latin typeface="Cambria Math" panose="02040503050406030204" pitchFamily="18" charset="0"/>
                             <a:ea typeface="SimSun" panose="02010600030101010101" pitchFamily="2" charset="-122"/>
                           </a:rPr>
                         </m:ctrlPr>
@@ -15531,7 +15641,7 @@
                         <m:ctrlPr>
                           <a:rPr lang="en-US" sz="1400" i="1" kern="100">
                             <a:effectLst/>
-                            <a:latin typeface="Cambria Math"/>
+                            <a:latin typeface="Cambria Math" panose="02040503050406030204" pitchFamily="18" charset="0"/>
                             <a:ea typeface="SimSun" panose="02010600030101010101" pitchFamily="2" charset="-122"/>
                           </a:rPr>
                         </m:ctrlPr>
@@ -15630,7 +15740,7 @@
                           <m:ctrlPr>
                             <a:rPr lang="en-US" sz="1400" i="1" kern="100">
                               <a:effectLst/>
-                              <a:latin typeface="Cambria Math"/>
+                              <a:latin typeface="Cambria Math" panose="02040503050406030204" pitchFamily="18" charset="0"/>
                               <a:ea typeface="SimSun" panose="02010600030101010101" pitchFamily="2" charset="-122"/>
                             </a:rPr>
                           </m:ctrlPr>
@@ -15662,7 +15772,7 @@
                               <m:ctrlPr>
                                 <a:rPr lang="en-US" sz="1400" i="1" kern="100">
                                   <a:effectLst/>
-                                  <a:latin typeface="Cambria Math"/>
+                                  <a:latin typeface="Cambria Math" panose="02040503050406030204" pitchFamily="18" charset="0"/>
                                   <a:ea typeface="SimSun" panose="02010600030101010101" pitchFamily="2" charset="-122"/>
                                 </a:rPr>
                               </m:ctrlPr>
@@ -15722,7 +15832,7 @@
                           <m:ctrlPr>
                             <a:rPr lang="en-US" sz="1400" i="1" kern="100">
                               <a:effectLst/>
-                              <a:latin typeface="Cambria Math"/>
+                              <a:latin typeface="Cambria Math" panose="02040503050406030204" pitchFamily="18" charset="0"/>
                               <a:ea typeface="SimSun" panose="02010600030101010101" pitchFamily="2" charset="-122"/>
                             </a:rPr>
                           </m:ctrlPr>
@@ -15772,7 +15882,7 @@
                           <m:ctrlPr>
                             <a:rPr lang="en-US" sz="1400" i="1" kern="100">
                               <a:effectLst/>
-                              <a:latin typeface="Cambria Math"/>
+                              <a:latin typeface="Cambria Math" panose="02040503050406030204" pitchFamily="18" charset="0"/>
                               <a:ea typeface="SimSun" panose="02010600030101010101" pitchFamily="2" charset="-122"/>
                             </a:rPr>
                           </m:ctrlPr>
@@ -15803,7 +15913,7 @@
                               <m:ctrlPr>
                                 <a:rPr lang="en-US" sz="1400" i="1" kern="100">
                                   <a:effectLst/>
-                                  <a:latin typeface="Cambria Math"/>
+                                  <a:latin typeface="Cambria Math" panose="02040503050406030204" pitchFamily="18" charset="0"/>
                                   <a:ea typeface="SimSun" panose="02010600030101010101" pitchFamily="2" charset="-122"/>
                                 </a:rPr>
                               </m:ctrlPr>
@@ -15943,7 +16053,7 @@
                         <m:ctrlPr>
                           <a:rPr lang="en-US" sz="1400" i="1" kern="100">
                             <a:effectLst/>
-                            <a:latin typeface="Cambria Math"/>
+                            <a:latin typeface="Cambria Math" panose="02040503050406030204" pitchFamily="18" charset="0"/>
                             <a:ea typeface="SimSun" panose="02010600030101010101" pitchFamily="2" charset="-122"/>
                           </a:rPr>
                         </m:ctrlPr>
@@ -16077,7 +16187,7 @@
                           <m:ctrlPr>
                             <a:rPr lang="en-US" sz="1400" i="1" kern="100">
                               <a:effectLst/>
-                              <a:latin typeface="Cambria Math"/>
+                              <a:latin typeface="Cambria Math" panose="02040503050406030204" pitchFamily="18" charset="0"/>
                               <a:ea typeface="SimSun" panose="02010600030101010101" pitchFamily="2" charset="-122"/>
                             </a:rPr>
                           </m:ctrlPr>
@@ -16109,7 +16219,7 @@
                               <m:ctrlPr>
                                 <a:rPr lang="en-US" sz="1400" i="1" kern="100">
                                   <a:effectLst/>
-                                  <a:latin typeface="Cambria Math"/>
+                                  <a:latin typeface="Cambria Math" panose="02040503050406030204" pitchFamily="18" charset="0"/>
                                   <a:ea typeface="SimSun" panose="02010600030101010101" pitchFamily="2" charset="-122"/>
                                 </a:rPr>
                               </m:ctrlPr>
@@ -16169,7 +16279,7 @@
                           <m:ctrlPr>
                             <a:rPr lang="en-US" sz="1400" i="1" kern="100">
                               <a:effectLst/>
-                              <a:latin typeface="Cambria Math"/>
+                              <a:latin typeface="Cambria Math" panose="02040503050406030204" pitchFamily="18" charset="0"/>
                               <a:ea typeface="SimSun" panose="02010600030101010101" pitchFamily="2" charset="-122"/>
                             </a:rPr>
                           </m:ctrlPr>
@@ -16200,7 +16310,7 @@
                               <m:ctrlPr>
                                 <a:rPr lang="en-US" sz="1400" i="1" kern="100">
                                   <a:effectLst/>
-                                  <a:latin typeface="Cambria Math"/>
+                                  <a:latin typeface="Cambria Math" panose="02040503050406030204" pitchFamily="18" charset="0"/>
                                   <a:ea typeface="SimSun" panose="02010600030101010101" pitchFamily="2" charset="-122"/>
                                 </a:rPr>
                               </m:ctrlPr>
@@ -16355,7 +16465,7 @@
           <p:cNvPr id="34" name="Picture 33">
             <a:extLst>
               <a:ext uri="{FF2B5EF4-FFF2-40B4-BE49-F238E27FC236}">
-                <a16:creationId xmlns:a16="http://schemas.microsoft.com/office/drawing/2014/main" xmlns="" id="{57FBAECA-D7C7-B471-2BCF-CE9B8F568F47}"/>
+                <a16:creationId xmlns="" xmlns:a16="http://schemas.microsoft.com/office/drawing/2014/main" id="{57FBAECA-D7C7-B471-2BCF-CE9B8F568F47}"/>
               </a:ext>
             </a:extLst>
           </p:cNvPr>
@@ -16407,7 +16517,7 @@
         <p:cNvPr id="1" name="">
           <a:extLst>
             <a:ext uri="{FF2B5EF4-FFF2-40B4-BE49-F238E27FC236}">
-              <a16:creationId xmlns:a16="http://schemas.microsoft.com/office/drawing/2014/main" xmlns="" id="{AA753A03-5B61-DD0C-F6BB-35DFE26F8595}"/>
+              <a16:creationId xmlns="" xmlns:a16="http://schemas.microsoft.com/office/drawing/2014/main" id="{AA753A03-5B61-DD0C-F6BB-35DFE26F8595}"/>
             </a:ext>
           </a:extLst>
         </p:cNvPr>
@@ -16427,7 +16537,7 @@
           <p:cNvPr id="2" name="矩形 1">
             <a:extLst>
               <a:ext uri="{FF2B5EF4-FFF2-40B4-BE49-F238E27FC236}">
-                <a16:creationId xmlns:a16="http://schemas.microsoft.com/office/drawing/2014/main" xmlns="" id="{3D1A601A-D164-A050-065B-886F974B28FA}"/>
+                <a16:creationId xmlns="" xmlns:a16="http://schemas.microsoft.com/office/drawing/2014/main" id="{3D1A601A-D164-A050-065B-886F974B28FA}"/>
               </a:ext>
             </a:extLst>
           </p:cNvPr>
@@ -16481,7 +16591,7 @@
           <p:cNvPr id="3" name="矩形 2">
             <a:extLst>
               <a:ext uri="{FF2B5EF4-FFF2-40B4-BE49-F238E27FC236}">
-                <a16:creationId xmlns:a16="http://schemas.microsoft.com/office/drawing/2014/main" xmlns="" id="{3DE846CB-C1C8-5771-C09E-1254FE92D85C}"/>
+                <a16:creationId xmlns="" xmlns:a16="http://schemas.microsoft.com/office/drawing/2014/main" id="{3DE846CB-C1C8-5771-C09E-1254FE92D85C}"/>
               </a:ext>
             </a:extLst>
           </p:cNvPr>
@@ -16535,7 +16645,7 @@
           <p:cNvPr id="5" name="文本框 4">
             <a:extLst>
               <a:ext uri="{FF2B5EF4-FFF2-40B4-BE49-F238E27FC236}">
-                <a16:creationId xmlns:a16="http://schemas.microsoft.com/office/drawing/2014/main" xmlns="" id="{6989706C-F9FD-AD70-BE99-324CB36B0F20}"/>
+                <a16:creationId xmlns="" xmlns:a16="http://schemas.microsoft.com/office/drawing/2014/main" id="{6989706C-F9FD-AD70-BE99-324CB36B0F20}"/>
               </a:ext>
             </a:extLst>
           </p:cNvPr>
@@ -16588,7 +16698,7 @@
           <p:cNvPr id="6" name="矩形 5">
             <a:extLst>
               <a:ext uri="{FF2B5EF4-FFF2-40B4-BE49-F238E27FC236}">
-                <a16:creationId xmlns:a16="http://schemas.microsoft.com/office/drawing/2014/main" xmlns="" id="{8495ACAA-E9B4-039B-F795-DC2AF795D36D}"/>
+                <a16:creationId xmlns="" xmlns:a16="http://schemas.microsoft.com/office/drawing/2014/main" id="{8495ACAA-E9B4-039B-F795-DC2AF795D36D}"/>
               </a:ext>
             </a:extLst>
           </p:cNvPr>
@@ -16625,7 +16735,7 @@
           <p:cNvPr id="17" name="文本框 20">
             <a:extLst>
               <a:ext uri="{FF2B5EF4-FFF2-40B4-BE49-F238E27FC236}">
-                <a16:creationId xmlns:a16="http://schemas.microsoft.com/office/drawing/2014/main" xmlns="" id="{8EAE8765-5746-F981-AA4E-2B53CC35BF8F}"/>
+                <a16:creationId xmlns="" xmlns:a16="http://schemas.microsoft.com/office/drawing/2014/main" id="{8EAE8765-5746-F981-AA4E-2B53CC35BF8F}"/>
               </a:ext>
             </a:extLst>
           </p:cNvPr>
@@ -16801,7 +16911,7 @@
           <p:cNvPr id="7" name="灯片编号占位符 6">
             <a:extLst>
               <a:ext uri="{FF2B5EF4-FFF2-40B4-BE49-F238E27FC236}">
-                <a16:creationId xmlns:a16="http://schemas.microsoft.com/office/drawing/2014/main" xmlns="" id="{56438B9E-84E6-19B9-4B46-C12A7B007968}"/>
+                <a16:creationId xmlns="" xmlns:a16="http://schemas.microsoft.com/office/drawing/2014/main" id="{56438B9E-84E6-19B9-4B46-C12A7B007968}"/>
               </a:ext>
             </a:extLst>
           </p:cNvPr>
@@ -16833,7 +16943,7 @@
           <p:cNvPr id="8" name="矩形 10">
             <a:extLst>
               <a:ext uri="{FF2B5EF4-FFF2-40B4-BE49-F238E27FC236}">
-                <a16:creationId xmlns:a16="http://schemas.microsoft.com/office/drawing/2014/main" xmlns="" id="{010E3DD2-4A6C-8AC4-6BFE-D024434A65C7}"/>
+                <a16:creationId xmlns="" xmlns:a16="http://schemas.microsoft.com/office/drawing/2014/main" id="{010E3DD2-4A6C-8AC4-6BFE-D024434A65C7}"/>
               </a:ext>
             </a:extLst>
           </p:cNvPr>
@@ -16879,7 +16989,7 @@
           <p:cNvPr id="9" name="矩形 11">
             <a:extLst>
               <a:ext uri="{FF2B5EF4-FFF2-40B4-BE49-F238E27FC236}">
-                <a16:creationId xmlns:a16="http://schemas.microsoft.com/office/drawing/2014/main" xmlns="" id="{4843DD3A-AF5F-D92C-E6C6-B88EED513AD0}"/>
+                <a16:creationId xmlns="" xmlns:a16="http://schemas.microsoft.com/office/drawing/2014/main" id="{4843DD3A-AF5F-D92C-E6C6-B88EED513AD0}"/>
               </a:ext>
             </a:extLst>
           </p:cNvPr>
@@ -16925,7 +17035,7 @@
           <p:cNvPr id="10" name="TextBox 7">
             <a:extLst>
               <a:ext uri="{FF2B5EF4-FFF2-40B4-BE49-F238E27FC236}">
-                <a16:creationId xmlns:a16="http://schemas.microsoft.com/office/drawing/2014/main" xmlns="" id="{79ADF53A-5530-F0C8-9A9A-B4F532F0B3CF}"/>
+                <a16:creationId xmlns="" xmlns:a16="http://schemas.microsoft.com/office/drawing/2014/main" id="{79ADF53A-5530-F0C8-9A9A-B4F532F0B3CF}"/>
               </a:ext>
             </a:extLst>
           </p:cNvPr>
@@ -17050,7 +17160,7 @@
           <p:cNvPr id="11" name="矩形 15">
             <a:extLst>
               <a:ext uri="{FF2B5EF4-FFF2-40B4-BE49-F238E27FC236}">
-                <a16:creationId xmlns:a16="http://schemas.microsoft.com/office/drawing/2014/main" xmlns="" id="{D1DA1CBD-3A3E-B1D2-2E8E-D2E778448E63}"/>
+                <a16:creationId xmlns="" xmlns:a16="http://schemas.microsoft.com/office/drawing/2014/main" id="{D1DA1CBD-3A3E-B1D2-2E8E-D2E778448E63}"/>
               </a:ext>
             </a:extLst>
           </p:cNvPr>
@@ -17264,7 +17374,7 @@
           <p:cNvPr id="12" name="矩形 16">
             <a:extLst>
               <a:ext uri="{FF2B5EF4-FFF2-40B4-BE49-F238E27FC236}">
-                <a16:creationId xmlns:a16="http://schemas.microsoft.com/office/drawing/2014/main" xmlns="" id="{2490D3E7-79A8-2F32-DC0E-D87FE9C24420}"/>
+                <a16:creationId xmlns="" xmlns:a16="http://schemas.microsoft.com/office/drawing/2014/main" id="{2490D3E7-79A8-2F32-DC0E-D87FE9C24420}"/>
               </a:ext>
             </a:extLst>
           </p:cNvPr>
@@ -17547,7 +17657,7 @@
           <p:cNvPr id="13" name="矩形 17">
             <a:extLst>
               <a:ext uri="{FF2B5EF4-FFF2-40B4-BE49-F238E27FC236}">
-                <a16:creationId xmlns:a16="http://schemas.microsoft.com/office/drawing/2014/main" xmlns="" id="{23EE7914-9968-82EC-24D1-DAA2EBD966DA}"/>
+                <a16:creationId xmlns="" xmlns:a16="http://schemas.microsoft.com/office/drawing/2014/main" id="{23EE7914-9968-82EC-24D1-DAA2EBD966DA}"/>
               </a:ext>
             </a:extLst>
           </p:cNvPr>
@@ -17642,7 +17752,7 @@
           <p:cNvPr id="14" name="右箭头 21">
             <a:extLst>
               <a:ext uri="{FF2B5EF4-FFF2-40B4-BE49-F238E27FC236}">
-                <a16:creationId xmlns:a16="http://schemas.microsoft.com/office/drawing/2014/main" xmlns="" id="{4A2D5ED0-34AC-3EA7-8B9C-9392002423B8}"/>
+                <a16:creationId xmlns="" xmlns:a16="http://schemas.microsoft.com/office/drawing/2014/main" id="{4A2D5ED0-34AC-3EA7-8B9C-9392002423B8}"/>
               </a:ext>
             </a:extLst>
           </p:cNvPr>
@@ -17688,7 +17798,7 @@
           <p:cNvPr id="15" name="右箭头 22">
             <a:extLst>
               <a:ext uri="{FF2B5EF4-FFF2-40B4-BE49-F238E27FC236}">
-                <a16:creationId xmlns:a16="http://schemas.microsoft.com/office/drawing/2014/main" xmlns="" id="{74B83F07-EF9C-749E-29C6-1C7EBBB9D2CD}"/>
+                <a16:creationId xmlns="" xmlns:a16="http://schemas.microsoft.com/office/drawing/2014/main" id="{74B83F07-EF9C-749E-29C6-1C7EBBB9D2CD}"/>
               </a:ext>
             </a:extLst>
           </p:cNvPr>
@@ -21673,7 +21783,7 @@
         <p:cNvPr id="1" name="">
           <a:extLst>
             <a:ext uri="{FF2B5EF4-FFF2-40B4-BE49-F238E27FC236}">
-              <a16:creationId xmlns:a16="http://schemas.microsoft.com/office/drawing/2014/main" xmlns="" id="{12A379AC-F599-34BC-3C72-BF330E2D65BA}"/>
+              <a16:creationId xmlns="" xmlns:a16="http://schemas.microsoft.com/office/drawing/2014/main" id="{12A379AC-F599-34BC-3C72-BF330E2D65BA}"/>
             </a:ext>
           </a:extLst>
         </p:cNvPr>
@@ -21693,7 +21803,7 @@
           <p:cNvPr id="2" name="矩形 1">
             <a:extLst>
               <a:ext uri="{FF2B5EF4-FFF2-40B4-BE49-F238E27FC236}">
-                <a16:creationId xmlns:a16="http://schemas.microsoft.com/office/drawing/2014/main" xmlns="" id="{3F28AF05-A1F3-6DDE-D4C8-C4B4A8C45128}"/>
+                <a16:creationId xmlns="" xmlns:a16="http://schemas.microsoft.com/office/drawing/2014/main" id="{3F28AF05-A1F3-6DDE-D4C8-C4B4A8C45128}"/>
               </a:ext>
             </a:extLst>
           </p:cNvPr>
@@ -21747,7 +21857,7 @@
           <p:cNvPr id="3" name="矩形 2">
             <a:extLst>
               <a:ext uri="{FF2B5EF4-FFF2-40B4-BE49-F238E27FC236}">
-                <a16:creationId xmlns:a16="http://schemas.microsoft.com/office/drawing/2014/main" xmlns="" id="{C2245C81-B45F-80FD-5182-911E52BC650C}"/>
+                <a16:creationId xmlns="" xmlns:a16="http://schemas.microsoft.com/office/drawing/2014/main" id="{C2245C81-B45F-80FD-5182-911E52BC650C}"/>
               </a:ext>
             </a:extLst>
           </p:cNvPr>
@@ -21801,7 +21911,7 @@
           <p:cNvPr id="4" name="文本框 20">
             <a:extLst>
               <a:ext uri="{FF2B5EF4-FFF2-40B4-BE49-F238E27FC236}">
-                <a16:creationId xmlns:a16="http://schemas.microsoft.com/office/drawing/2014/main" xmlns="" id="{349E7F22-287E-F1FF-DB0E-D31077A38EB3}"/>
+                <a16:creationId xmlns="" xmlns:a16="http://schemas.microsoft.com/office/drawing/2014/main" id="{349E7F22-287E-F1FF-DB0E-D31077A38EB3}"/>
               </a:ext>
             </a:extLst>
           </p:cNvPr>
@@ -21970,7 +22080,7 @@
           <p:cNvPr id="5" name="文本框 4">
             <a:extLst>
               <a:ext uri="{FF2B5EF4-FFF2-40B4-BE49-F238E27FC236}">
-                <a16:creationId xmlns:a16="http://schemas.microsoft.com/office/drawing/2014/main" xmlns="" id="{0B83CA43-7DC4-1580-8BA1-9D6DB68EB1F8}"/>
+                <a16:creationId xmlns="" xmlns:a16="http://schemas.microsoft.com/office/drawing/2014/main" id="{0B83CA43-7DC4-1580-8BA1-9D6DB68EB1F8}"/>
               </a:ext>
             </a:extLst>
           </p:cNvPr>
@@ -22023,7 +22133,7 @@
           <p:cNvPr id="6" name="Rectangle 2">
             <a:extLst>
               <a:ext uri="{FF2B5EF4-FFF2-40B4-BE49-F238E27FC236}">
-                <a16:creationId xmlns:a16="http://schemas.microsoft.com/office/drawing/2014/main" xmlns="" id="{8333C154-0ABF-DFE6-C39E-D95F0A677387}"/>
+                <a16:creationId xmlns="" xmlns:a16="http://schemas.microsoft.com/office/drawing/2014/main" id="{8333C154-0ABF-DFE6-C39E-D95F0A677387}"/>
               </a:ext>
             </a:extLst>
           </p:cNvPr>
@@ -22089,7 +22199,7 @@
           <p:cNvPr id="7" name="灯片编号占位符 6">
             <a:extLst>
               <a:ext uri="{FF2B5EF4-FFF2-40B4-BE49-F238E27FC236}">
-                <a16:creationId xmlns:a16="http://schemas.microsoft.com/office/drawing/2014/main" xmlns="" id="{5283F55D-848A-9224-B129-E73B6370CDE7}"/>
+                <a16:creationId xmlns="" xmlns:a16="http://schemas.microsoft.com/office/drawing/2014/main" id="{5283F55D-848A-9224-B129-E73B6370CDE7}"/>
               </a:ext>
             </a:extLst>
           </p:cNvPr>
@@ -22118,7 +22228,7 @@
           <p:cNvPr id="10" name="Picture 9">
             <a:extLst>
               <a:ext uri="{FF2B5EF4-FFF2-40B4-BE49-F238E27FC236}">
-                <a16:creationId xmlns:a16="http://schemas.microsoft.com/office/drawing/2014/main" xmlns="" id="{35A38E24-A960-C9D0-8914-09D8E7B06C94}"/>
+                <a16:creationId xmlns="" xmlns:a16="http://schemas.microsoft.com/office/drawing/2014/main" id="{35A38E24-A960-C9D0-8914-09D8E7B06C94}"/>
               </a:ext>
             </a:extLst>
           </p:cNvPr>
@@ -22148,7 +22258,7 @@
           <p:cNvPr id="11" name="TextBox 10">
             <a:extLst>
               <a:ext uri="{FF2B5EF4-FFF2-40B4-BE49-F238E27FC236}">
-                <a16:creationId xmlns:a16="http://schemas.microsoft.com/office/drawing/2014/main" xmlns="" id="{E7852AFE-4393-0171-C5E7-373AAFC273F0}"/>
+                <a16:creationId xmlns="" xmlns:a16="http://schemas.microsoft.com/office/drawing/2014/main" id="{E7852AFE-4393-0171-C5E7-373AAFC273F0}"/>
               </a:ext>
             </a:extLst>
           </p:cNvPr>
@@ -22193,7 +22303,7 @@
           <p:cNvPr id="12" name="TextBox 11">
             <a:extLst>
               <a:ext uri="{FF2B5EF4-FFF2-40B4-BE49-F238E27FC236}">
-                <a16:creationId xmlns:a16="http://schemas.microsoft.com/office/drawing/2014/main" xmlns="" id="{04F33E76-3EFF-3446-7976-C1764F5F62F8}"/>
+                <a16:creationId xmlns="" xmlns:a16="http://schemas.microsoft.com/office/drawing/2014/main" id="{04F33E76-3EFF-3446-7976-C1764F5F62F8}"/>
               </a:ext>
             </a:extLst>
           </p:cNvPr>
@@ -22245,7 +22355,7 @@
           <p:cNvPr id="13" name="TextBox 12">
             <a:extLst>
               <a:ext uri="{FF2B5EF4-FFF2-40B4-BE49-F238E27FC236}">
-                <a16:creationId xmlns:a16="http://schemas.microsoft.com/office/drawing/2014/main" xmlns="" id="{943A507A-9C0D-1208-C6EE-6647372A6406}"/>
+                <a16:creationId xmlns="" xmlns:a16="http://schemas.microsoft.com/office/drawing/2014/main" id="{943A507A-9C0D-1208-C6EE-6647372A6406}"/>
               </a:ext>
             </a:extLst>
           </p:cNvPr>
@@ -22297,7 +22407,7 @@
           <p:cNvPr id="14" name="TextBox 13">
             <a:extLst>
               <a:ext uri="{FF2B5EF4-FFF2-40B4-BE49-F238E27FC236}">
-                <a16:creationId xmlns:a16="http://schemas.microsoft.com/office/drawing/2014/main" xmlns="" id="{B48EBDA7-8D0D-4A95-9DA6-C615EBD5949F}"/>
+                <a16:creationId xmlns="" xmlns:a16="http://schemas.microsoft.com/office/drawing/2014/main" id="{B48EBDA7-8D0D-4A95-9DA6-C615EBD5949F}"/>
               </a:ext>
             </a:extLst>
           </p:cNvPr>
@@ -22347,7 +22457,7 @@
           <p:cNvPr id="15" name="TextBox 14">
             <a:extLst>
               <a:ext uri="{FF2B5EF4-FFF2-40B4-BE49-F238E27FC236}">
-                <a16:creationId xmlns:a16="http://schemas.microsoft.com/office/drawing/2014/main" xmlns="" id="{D5BD9C48-06F9-AFCA-CB7F-B6B901CFA6FF}"/>
+                <a16:creationId xmlns="" xmlns:a16="http://schemas.microsoft.com/office/drawing/2014/main" id="{D5BD9C48-06F9-AFCA-CB7F-B6B901CFA6FF}"/>
               </a:ext>
             </a:extLst>
           </p:cNvPr>
@@ -22401,7 +22511,7 @@
               <p:cNvPr id="18" name="TextBox 17">
                 <a:extLst>
                   <a:ext uri="{FF2B5EF4-FFF2-40B4-BE49-F238E27FC236}">
-                    <a16:creationId xmlns:a16="http://schemas.microsoft.com/office/drawing/2014/main" xmlns="" id="{5628D532-8699-52FE-6B7E-21299837961C}"/>
+                    <a16:creationId xmlns="" xmlns:a16="http://schemas.microsoft.com/office/drawing/2014/main" id="{5628D532-8699-52FE-6B7E-21299837961C}"/>
                   </a:ext>
                 </a:extLst>
               </p:cNvPr>
@@ -22437,7 +22547,7 @@
                           <m:endChr m:val="|"/>
                           <m:ctrlPr>
                             <a:rPr lang="en-US" sz="1200" i="1" smtClean="0">
-                              <a:latin typeface="Cambria Math"/>
+                              <a:latin typeface="Cambria Math" panose="02040503050406030204" pitchFamily="18" charset="0"/>
                             </a:rPr>
                           </m:ctrlPr>
                         </m:dPr>
@@ -22446,7 +22556,7 @@
                             <m:sSubPr>
                               <m:ctrlPr>
                                 <a:rPr lang="en-US" sz="1200" i="1">
-                                  <a:latin typeface="Cambria Math"/>
+                                  <a:latin typeface="Cambria Math" panose="02040503050406030204" pitchFamily="18" charset="0"/>
                                 </a:rPr>
                               </m:ctrlPr>
                             </m:sSubPr>
@@ -22484,7 +22594,7 @@
                           <m:endChr m:val="|"/>
                           <m:ctrlPr>
                             <a:rPr lang="en-US" sz="1200" b="0" i="1">
-                              <a:latin typeface="Cambria Math"/>
+                              <a:latin typeface="Cambria Math" panose="02040503050406030204" pitchFamily="18" charset="0"/>
                             </a:rPr>
                           </m:ctrlPr>
                         </m:dPr>
@@ -22493,7 +22603,7 @@
                             <m:sSubPr>
                               <m:ctrlPr>
                                 <a:rPr lang="en-US" sz="1200" b="0" i="1">
-                                  <a:latin typeface="Cambria Math"/>
+                                  <a:latin typeface="Cambria Math" panose="02040503050406030204" pitchFamily="18" charset="0"/>
                                 </a:rPr>
                               </m:ctrlPr>
                             </m:sSubPr>
@@ -22529,7 +22639,7 @@
                         <m:sSupPr>
                           <m:ctrlPr>
                             <a:rPr lang="en-US" sz="1200" b="0" i="1">
-                              <a:latin typeface="Cambria Math"/>
+                              <a:latin typeface="Cambria Math" panose="02040503050406030204" pitchFamily="18" charset="0"/>
                             </a:rPr>
                           </m:ctrlPr>
                         </m:sSupPr>
@@ -22538,7 +22648,7 @@
                             <m:dPr>
                               <m:ctrlPr>
                                 <a:rPr lang="en-US" sz="1200" b="0" i="1">
-                                  <a:latin typeface="Cambria Math"/>
+                                  <a:latin typeface="Cambria Math" panose="02040503050406030204" pitchFamily="18" charset="0"/>
                                 </a:rPr>
                               </m:ctrlPr>
                             </m:dPr>
@@ -22565,7 +22675,7 @@
                                 <m:limUppPr>
                                   <m:ctrlPr>
                                     <a:rPr lang="en-US" sz="1200" b="0" i="1">
-                                      <a:latin typeface="Cambria Math"/>
+                                      <a:latin typeface="Cambria Math" panose="02040503050406030204" pitchFamily="18" charset="0"/>
                                     </a:rPr>
                                   </m:ctrlPr>
                                 </m:limUppPr>
@@ -22674,7 +22784,7 @@
           <p:cNvPr id="21" name="Table 20">
             <a:extLst>
               <a:ext uri="{FF2B5EF4-FFF2-40B4-BE49-F238E27FC236}">
-                <a16:creationId xmlns:a16="http://schemas.microsoft.com/office/drawing/2014/main" xmlns="" id="{EB0C4404-6955-5061-5D7A-6A626AE7A519}"/>
+                <a16:creationId xmlns="" xmlns:a16="http://schemas.microsoft.com/office/drawing/2014/main" id="{EB0C4404-6955-5061-5D7A-6A626AE7A519}"/>
               </a:ext>
             </a:extLst>
           </p:cNvPr>
@@ -22703,14 +22813,14 @@
                 <a:gridCol w="393700">
                   <a:extLst>
                     <a:ext uri="{9D8B030D-6E8A-4147-A177-3AD203B41FA5}">
-                      <a16:colId xmlns:a16="http://schemas.microsoft.com/office/drawing/2014/main" xmlns="" val="1149794813"/>
+                      <a16:colId xmlns="" xmlns:a16="http://schemas.microsoft.com/office/drawing/2014/main" val="1149794813"/>
                     </a:ext>
                   </a:extLst>
                 </a:gridCol>
                 <a:gridCol w="1968500">
                   <a:extLst>
                     <a:ext uri="{9D8B030D-6E8A-4147-A177-3AD203B41FA5}">
-                      <a16:colId xmlns:a16="http://schemas.microsoft.com/office/drawing/2014/main" xmlns="" val="1878770959"/>
+                      <a16:colId xmlns="" xmlns:a16="http://schemas.microsoft.com/office/drawing/2014/main" val="1878770959"/>
                     </a:ext>
                   </a:extLst>
                 </a:gridCol>
@@ -22782,7 +22892,7 @@
                 </a:tc>
                 <a:extLst>
                   <a:ext uri="{0D108BD9-81ED-4DB2-BD59-A6C34878D82A}">
-                    <a16:rowId xmlns:a16="http://schemas.microsoft.com/office/drawing/2014/main" xmlns="" val="3186652247"/>
+                    <a16:rowId xmlns="" xmlns:a16="http://schemas.microsoft.com/office/drawing/2014/main" val="3186652247"/>
                   </a:ext>
                 </a:extLst>
               </a:tr>
@@ -22839,7 +22949,7 @@
                 </a:tc>
                 <a:extLst>
                   <a:ext uri="{0D108BD9-81ED-4DB2-BD59-A6C34878D82A}">
-                    <a16:rowId xmlns:a16="http://schemas.microsoft.com/office/drawing/2014/main" xmlns="" val="963817381"/>
+                    <a16:rowId xmlns="" xmlns:a16="http://schemas.microsoft.com/office/drawing/2014/main" val="963817381"/>
                   </a:ext>
                 </a:extLst>
               </a:tr>
@@ -22896,7 +23006,7 @@
                 </a:tc>
                 <a:extLst>
                   <a:ext uri="{0D108BD9-81ED-4DB2-BD59-A6C34878D82A}">
-                    <a16:rowId xmlns:a16="http://schemas.microsoft.com/office/drawing/2014/main" xmlns="" val="2807267596"/>
+                    <a16:rowId xmlns="" xmlns:a16="http://schemas.microsoft.com/office/drawing/2014/main" val="2807267596"/>
                   </a:ext>
                 </a:extLst>
               </a:tr>
@@ -22953,7 +23063,7 @@
                 </a:tc>
                 <a:extLst>
                   <a:ext uri="{0D108BD9-81ED-4DB2-BD59-A6C34878D82A}">
-                    <a16:rowId xmlns:a16="http://schemas.microsoft.com/office/drawing/2014/main" xmlns="" val="3590090535"/>
+                    <a16:rowId xmlns="" xmlns:a16="http://schemas.microsoft.com/office/drawing/2014/main" val="3590090535"/>
                   </a:ext>
                 </a:extLst>
               </a:tr>
@@ -22966,7 +23076,7 @@
           <p:cNvPr id="23" name="TextBox 22">
             <a:extLst>
               <a:ext uri="{FF2B5EF4-FFF2-40B4-BE49-F238E27FC236}">
-                <a16:creationId xmlns:a16="http://schemas.microsoft.com/office/drawing/2014/main" xmlns="" id="{02BF0563-0D47-5C2F-106F-D733E3B31009}"/>
+                <a16:creationId xmlns="" xmlns:a16="http://schemas.microsoft.com/office/drawing/2014/main" id="{02BF0563-0D47-5C2F-106F-D733E3B31009}"/>
               </a:ext>
             </a:extLst>
           </p:cNvPr>
@@ -23287,7 +23397,7 @@
               <p:cNvPr id="25" name="TextBox 24">
                 <a:extLst>
                   <a:ext uri="{FF2B5EF4-FFF2-40B4-BE49-F238E27FC236}">
-                    <a16:creationId xmlns:a16="http://schemas.microsoft.com/office/drawing/2014/main" xmlns="" id="{C23E53BD-883F-87CA-82CA-B7BE113BF242}"/>
+                    <a16:creationId xmlns="" xmlns:a16="http://schemas.microsoft.com/office/drawing/2014/main" id="{C23E53BD-883F-87CA-82CA-B7BE113BF242}"/>
                   </a:ext>
                 </a:extLst>
               </p:cNvPr>
@@ -23446,7 +23556,7 @@
               <p:cNvPr id="27" name="TextBox 26">
                 <a:extLst>
                   <a:ext uri="{FF2B5EF4-FFF2-40B4-BE49-F238E27FC236}">
-                    <a16:creationId xmlns:a16="http://schemas.microsoft.com/office/drawing/2014/main" xmlns="" id="{152E66B6-29FA-D6FA-198E-F548332073D2}"/>
+                    <a16:creationId xmlns="" xmlns:a16="http://schemas.microsoft.com/office/drawing/2014/main" id="{152E66B6-29FA-D6FA-198E-F548332073D2}"/>
                   </a:ext>
                 </a:extLst>
               </p:cNvPr>
@@ -23487,7 +23597,7 @@
                         <m:dPr>
                           <m:ctrlPr>
                             <a:rPr lang="en-US" sz="1200" b="0" i="1">
-                              <a:latin typeface="Cambria Math"/>
+                              <a:latin typeface="Cambria Math" panose="02040503050406030204" pitchFamily="18" charset="0"/>
                             </a:rPr>
                           </m:ctrlPr>
                         </m:dPr>
@@ -23496,7 +23606,7 @@
                             <m:sSubPr>
                               <m:ctrlPr>
                                 <a:rPr lang="en-US" sz="1200" b="0" i="1">
-                                  <a:latin typeface="Cambria Math"/>
+                                  <a:latin typeface="Cambria Math" panose="02040503050406030204" pitchFamily="18" charset="0"/>
                                 </a:rPr>
                               </m:ctrlPr>
                             </m:sSubPr>
@@ -23531,7 +23641,7 @@
                           <m:endChr m:val=""/>
                           <m:ctrlPr>
                             <a:rPr lang="en-US" sz="1200" b="0" i="1">
-                              <a:latin typeface="Cambria Math"/>
+                              <a:latin typeface="Cambria Math" panose="02040503050406030204" pitchFamily="18" charset="0"/>
                             </a:rPr>
                           </m:ctrlPr>
                         </m:dPr>
@@ -23549,7 +23659,7 @@
                               </m:mcs>
                               <m:ctrlPr>
                                 <a:rPr lang="en-US" sz="1200" b="0" i="1">
-                                  <a:latin typeface="Cambria Math"/>
+                                  <a:latin typeface="Cambria Math" panose="02040503050406030204" pitchFamily="18" charset="0"/>
                                 </a:rPr>
                               </m:ctrlPr>
                             </m:mPr>
@@ -23585,7 +23695,7 @@
                                   <m:sSubPr>
                                     <m:ctrlPr>
                                       <a:rPr lang="en-US" sz="1200" b="0" i="1">
-                                        <a:latin typeface="Cambria Math"/>
+                                        <a:latin typeface="Cambria Math" panose="02040503050406030204" pitchFamily="18" charset="0"/>
                                       </a:rPr>
                                     </m:ctrlPr>
                                   </m:sSubPr>
@@ -23612,7 +23722,7 @@
                                     <m:endChr m:val=""/>
                                     <m:ctrlPr>
                                       <a:rPr lang="en-US" sz="1200" b="0" i="1">
-                                        <a:latin typeface="Cambria Math"/>
+                                        <a:latin typeface="Cambria Math" panose="02040503050406030204" pitchFamily="18" charset="0"/>
                                       </a:rPr>
                                     </m:ctrlPr>
                                   </m:dPr>
@@ -23670,7 +23780,7 @@
                                     <m:endChr m:val="|"/>
                                     <m:ctrlPr>
                                       <a:rPr lang="en-US" sz="1200" b="0" i="1">
-                                        <a:latin typeface="Cambria Math"/>
+                                        <a:latin typeface="Cambria Math" panose="02040503050406030204" pitchFamily="18" charset="0"/>
                                       </a:rPr>
                                     </m:ctrlPr>
                                   </m:dPr>
@@ -23679,7 +23789,7 @@
                                       <m:sSubPr>
                                         <m:ctrlPr>
                                           <a:rPr lang="en-US" sz="1200" b="0" i="1">
-                                            <a:latin typeface="Cambria Math"/>
+                                            <a:latin typeface="Cambria Math" panose="02040503050406030204" pitchFamily="18" charset="0"/>
                                           </a:rPr>
                                         </m:ctrlPr>
                                       </m:sSubPr>
@@ -23787,7 +23897,7 @@
                                   <m:sSubPr>
                                     <m:ctrlPr>
                                       <a:rPr lang="en-US" sz="1200" b="0" i="1">
-                                        <a:latin typeface="Cambria Math"/>
+                                        <a:latin typeface="Cambria Math" panose="02040503050406030204" pitchFamily="18" charset="0"/>
                                       </a:rPr>
                                     </m:ctrlPr>
                                   </m:sSubPr>
@@ -23814,7 +23924,7 @@
                                     <m:endChr m:val=""/>
                                     <m:ctrlPr>
                                       <a:rPr lang="en-US" sz="1200" b="0" i="1">
-                                        <a:latin typeface="Cambria Math"/>
+                                        <a:latin typeface="Cambria Math" panose="02040503050406030204" pitchFamily="18" charset="0"/>
                                       </a:rPr>
                                     </m:ctrlPr>
                                   </m:dPr>
@@ -24414,7 +24524,7 @@
           <p:cNvPr id="8" name="矩形 5">
             <a:extLst>
               <a:ext uri="{FF2B5EF4-FFF2-40B4-BE49-F238E27FC236}">
-                <a16:creationId xmlns:a16="http://schemas.microsoft.com/office/drawing/2014/main" xmlns="" id="{8FCC5F10-880F-82B8-5F59-9B5B229C8447}"/>
+                <a16:creationId xmlns="" xmlns:a16="http://schemas.microsoft.com/office/drawing/2014/main" id="{8FCC5F10-880F-82B8-5F59-9B5B229C8447}"/>
               </a:ext>
             </a:extLst>
           </p:cNvPr>
@@ -24454,7 +24564,7 @@
           <p:cNvPr id="9" name="Table 8">
             <a:extLst>
               <a:ext uri="{FF2B5EF4-FFF2-40B4-BE49-F238E27FC236}">
-                <a16:creationId xmlns:a16="http://schemas.microsoft.com/office/drawing/2014/main" xmlns="" id="{296A28BD-0DAB-93F0-2FFC-74BB108491A1}"/>
+                <a16:creationId xmlns="" xmlns:a16="http://schemas.microsoft.com/office/drawing/2014/main" id="{296A28BD-0DAB-93F0-2FFC-74BB108491A1}"/>
               </a:ext>
             </a:extLst>
           </p:cNvPr>
@@ -24483,21 +24593,21 @@
                 <a:gridCol w="2743200">
                   <a:extLst>
                     <a:ext uri="{9D8B030D-6E8A-4147-A177-3AD203B41FA5}">
-                      <a16:colId xmlns:a16="http://schemas.microsoft.com/office/drawing/2014/main" xmlns="" val="3947607742"/>
+                      <a16:colId xmlns="" xmlns:a16="http://schemas.microsoft.com/office/drawing/2014/main" val="3947607742"/>
                     </a:ext>
                   </a:extLst>
                 </a:gridCol>
                 <a:gridCol w="2743200">
                   <a:extLst>
                     <a:ext uri="{9D8B030D-6E8A-4147-A177-3AD203B41FA5}">
-                      <a16:colId xmlns:a16="http://schemas.microsoft.com/office/drawing/2014/main" xmlns="" val="3615661026"/>
+                      <a16:colId xmlns="" xmlns:a16="http://schemas.microsoft.com/office/drawing/2014/main" val="3615661026"/>
                     </a:ext>
                   </a:extLst>
                 </a:gridCol>
                 <a:gridCol w="2743200">
                   <a:extLst>
                     <a:ext uri="{9D8B030D-6E8A-4147-A177-3AD203B41FA5}">
-                      <a16:colId xmlns:a16="http://schemas.microsoft.com/office/drawing/2014/main" xmlns="" val="2503039646"/>
+                      <a16:colId xmlns="" xmlns:a16="http://schemas.microsoft.com/office/drawing/2014/main" val="2503039646"/>
                     </a:ext>
                   </a:extLst>
                 </a:gridCol>
@@ -24595,7 +24705,7 @@
                 </a:tc>
                 <a:extLst>
                   <a:ext uri="{0D108BD9-81ED-4DB2-BD59-A6C34878D82A}">
-                    <a16:rowId xmlns:a16="http://schemas.microsoft.com/office/drawing/2014/main" xmlns="" val="3975436362"/>
+                    <a16:rowId xmlns="" xmlns:a16="http://schemas.microsoft.com/office/drawing/2014/main" val="3975436362"/>
                   </a:ext>
                 </a:extLst>
               </a:tr>
@@ -24692,7 +24802,7 @@
                 </a:tc>
                 <a:extLst>
                   <a:ext uri="{0D108BD9-81ED-4DB2-BD59-A6C34878D82A}">
-                    <a16:rowId xmlns:a16="http://schemas.microsoft.com/office/drawing/2014/main" xmlns="" val="2548892994"/>
+                    <a16:rowId xmlns="" xmlns:a16="http://schemas.microsoft.com/office/drawing/2014/main" val="2548892994"/>
                   </a:ext>
                 </a:extLst>
               </a:tr>
@@ -24789,7 +24899,7 @@
                 </a:tc>
                 <a:extLst>
                   <a:ext uri="{0D108BD9-81ED-4DB2-BD59-A6C34878D82A}">
-                    <a16:rowId xmlns:a16="http://schemas.microsoft.com/office/drawing/2014/main" xmlns="" val="1711493502"/>
+                    <a16:rowId xmlns="" xmlns:a16="http://schemas.microsoft.com/office/drawing/2014/main" val="1711493502"/>
                   </a:ext>
                 </a:extLst>
               </a:tr>
@@ -24886,7 +24996,7 @@
                 </a:tc>
                 <a:extLst>
                   <a:ext uri="{0D108BD9-81ED-4DB2-BD59-A6C34878D82A}">
-                    <a16:rowId xmlns:a16="http://schemas.microsoft.com/office/drawing/2014/main" xmlns="" val="1876154005"/>
+                    <a16:rowId xmlns="" xmlns:a16="http://schemas.microsoft.com/office/drawing/2014/main" val="1876154005"/>
                   </a:ext>
                 </a:extLst>
               </a:tr>
@@ -24995,7 +25105,7 @@
                 </a:tc>
                 <a:extLst>
                   <a:ext uri="{0D108BD9-81ED-4DB2-BD59-A6C34878D82A}">
-                    <a16:rowId xmlns:a16="http://schemas.microsoft.com/office/drawing/2014/main" xmlns="" val="1041126226"/>
+                    <a16:rowId xmlns="" xmlns:a16="http://schemas.microsoft.com/office/drawing/2014/main" val="1041126226"/>
                   </a:ext>
                 </a:extLst>
               </a:tr>
@@ -25008,7 +25118,7 @@
           <p:cNvPr id="13" name="矩形 5">
             <a:extLst>
               <a:ext uri="{FF2B5EF4-FFF2-40B4-BE49-F238E27FC236}">
-                <a16:creationId xmlns:a16="http://schemas.microsoft.com/office/drawing/2014/main" xmlns="" id="{B50BA6DF-AEFF-A4FE-FD00-1B7AC15E1593}"/>
+                <a16:creationId xmlns="" xmlns:a16="http://schemas.microsoft.com/office/drawing/2014/main" id="{B50BA6DF-AEFF-A4FE-FD00-1B7AC15E1593}"/>
               </a:ext>
             </a:extLst>
           </p:cNvPr>
@@ -25048,7 +25158,7 @@
           <p:cNvPr id="15" name="矩形 18">
             <a:extLst>
               <a:ext uri="{FF2B5EF4-FFF2-40B4-BE49-F238E27FC236}">
-                <a16:creationId xmlns:a16="http://schemas.microsoft.com/office/drawing/2014/main" xmlns="" id="{61210C41-6F9F-A3F8-8C0D-484B82E0B73D}"/>
+                <a16:creationId xmlns="" xmlns:a16="http://schemas.microsoft.com/office/drawing/2014/main" id="{61210C41-6F9F-A3F8-8C0D-484B82E0B73D}"/>
               </a:ext>
             </a:extLst>
           </p:cNvPr>
@@ -25170,7 +25280,7 @@
           <p:cNvPr id="16" name="矩形 5">
             <a:extLst>
               <a:ext uri="{FF2B5EF4-FFF2-40B4-BE49-F238E27FC236}">
-                <a16:creationId xmlns:a16="http://schemas.microsoft.com/office/drawing/2014/main" xmlns="" id="{F8C068C4-AF09-55A0-5274-2433C79985AB}"/>
+                <a16:creationId xmlns="" xmlns:a16="http://schemas.microsoft.com/office/drawing/2014/main" id="{F8C068C4-AF09-55A0-5274-2433C79985AB}"/>
               </a:ext>
             </a:extLst>
           </p:cNvPr>
@@ -25205,7 +25315,7 @@
           <p:cNvPr id="17" name="Table 16">
             <a:extLst>
               <a:ext uri="{FF2B5EF4-FFF2-40B4-BE49-F238E27FC236}">
-                <a16:creationId xmlns:a16="http://schemas.microsoft.com/office/drawing/2014/main" xmlns="" id="{FA8218A1-C82C-8BAF-AFA3-C759C5EE074C}"/>
+                <a16:creationId xmlns="" xmlns:a16="http://schemas.microsoft.com/office/drawing/2014/main" id="{FA8218A1-C82C-8BAF-AFA3-C759C5EE074C}"/>
               </a:ext>
             </a:extLst>
           </p:cNvPr>
@@ -25234,14 +25344,14 @@
                 <a:gridCol w="3466728">
                   <a:extLst>
                     <a:ext uri="{9D8B030D-6E8A-4147-A177-3AD203B41FA5}">
-                      <a16:colId xmlns:a16="http://schemas.microsoft.com/office/drawing/2014/main" xmlns="" val="3589910080"/>
+                      <a16:colId xmlns="" xmlns:a16="http://schemas.microsoft.com/office/drawing/2014/main" val="3589910080"/>
                     </a:ext>
                   </a:extLst>
                 </a:gridCol>
                 <a:gridCol w="4762872">
                   <a:extLst>
                     <a:ext uri="{9D8B030D-6E8A-4147-A177-3AD203B41FA5}">
-                      <a16:colId xmlns:a16="http://schemas.microsoft.com/office/drawing/2014/main" xmlns="" val="3599827227"/>
+                      <a16:colId xmlns="" xmlns:a16="http://schemas.microsoft.com/office/drawing/2014/main" val="3599827227"/>
                     </a:ext>
                   </a:extLst>
                 </a:gridCol>
@@ -25309,7 +25419,7 @@
                 </a:tc>
                 <a:extLst>
                   <a:ext uri="{0D108BD9-81ED-4DB2-BD59-A6C34878D82A}">
-                    <a16:rowId xmlns:a16="http://schemas.microsoft.com/office/drawing/2014/main" xmlns="" val="794717099"/>
+                    <a16:rowId xmlns="" xmlns:a16="http://schemas.microsoft.com/office/drawing/2014/main" val="794717099"/>
                   </a:ext>
                 </a:extLst>
               </a:tr>
@@ -25394,7 +25504,7 @@
                 </a:tc>
                 <a:extLst>
                   <a:ext uri="{0D108BD9-81ED-4DB2-BD59-A6C34878D82A}">
-                    <a16:rowId xmlns:a16="http://schemas.microsoft.com/office/drawing/2014/main" xmlns="" val="540079774"/>
+                    <a16:rowId xmlns="" xmlns:a16="http://schemas.microsoft.com/office/drawing/2014/main" val="540079774"/>
                   </a:ext>
                 </a:extLst>
               </a:tr>
@@ -25461,7 +25571,7 @@
                 </a:tc>
                 <a:extLst>
                   <a:ext uri="{0D108BD9-81ED-4DB2-BD59-A6C34878D82A}">
-                    <a16:rowId xmlns:a16="http://schemas.microsoft.com/office/drawing/2014/main" xmlns="" val="1929275050"/>
+                    <a16:rowId xmlns="" xmlns:a16="http://schemas.microsoft.com/office/drawing/2014/main" val="1929275050"/>
                   </a:ext>
                 </a:extLst>
               </a:tr>
@@ -25546,7 +25656,7 @@
                 </a:tc>
                 <a:extLst>
                   <a:ext uri="{0D108BD9-81ED-4DB2-BD59-A6C34878D82A}">
-                    <a16:rowId xmlns:a16="http://schemas.microsoft.com/office/drawing/2014/main" xmlns="" val="298069410"/>
+                    <a16:rowId xmlns="" xmlns:a16="http://schemas.microsoft.com/office/drawing/2014/main" val="298069410"/>
                   </a:ext>
                 </a:extLst>
               </a:tr>
@@ -25613,7 +25723,7 @@
                 </a:tc>
                 <a:extLst>
                   <a:ext uri="{0D108BD9-81ED-4DB2-BD59-A6C34878D82A}">
-                    <a16:rowId xmlns:a16="http://schemas.microsoft.com/office/drawing/2014/main" xmlns="" val="2511290769"/>
+                    <a16:rowId xmlns="" xmlns:a16="http://schemas.microsoft.com/office/drawing/2014/main" val="2511290769"/>
                   </a:ext>
                 </a:extLst>
               </a:tr>
@@ -25637,7 +25747,7 @@
         <p:cNvPr id="1" name="">
           <a:extLst>
             <a:ext uri="{FF2B5EF4-FFF2-40B4-BE49-F238E27FC236}">
-              <a16:creationId xmlns:a16="http://schemas.microsoft.com/office/drawing/2014/main" xmlns="" id="{305521E8-A442-3D61-8EF5-176441E2AD74}"/>
+              <a16:creationId xmlns="" xmlns:a16="http://schemas.microsoft.com/office/drawing/2014/main" id="{305521E8-A442-3D61-8EF5-176441E2AD74}"/>
             </a:ext>
           </a:extLst>
         </p:cNvPr>
@@ -25657,7 +25767,7 @@
           <p:cNvPr id="2" name="矩形 1">
             <a:extLst>
               <a:ext uri="{FF2B5EF4-FFF2-40B4-BE49-F238E27FC236}">
-                <a16:creationId xmlns:a16="http://schemas.microsoft.com/office/drawing/2014/main" xmlns="" id="{B8778255-4A43-845B-4B2F-5F2761E56C4D}"/>
+                <a16:creationId xmlns="" xmlns:a16="http://schemas.microsoft.com/office/drawing/2014/main" id="{B8778255-4A43-845B-4B2F-5F2761E56C4D}"/>
               </a:ext>
             </a:extLst>
           </p:cNvPr>
@@ -25711,7 +25821,7 @@
           <p:cNvPr id="3" name="矩形 2">
             <a:extLst>
               <a:ext uri="{FF2B5EF4-FFF2-40B4-BE49-F238E27FC236}">
-                <a16:creationId xmlns:a16="http://schemas.microsoft.com/office/drawing/2014/main" xmlns="" id="{B30D6071-3B0E-9FD8-3B64-92D7A7EC25DE}"/>
+                <a16:creationId xmlns="" xmlns:a16="http://schemas.microsoft.com/office/drawing/2014/main" id="{B30D6071-3B0E-9FD8-3B64-92D7A7EC25DE}"/>
               </a:ext>
             </a:extLst>
           </p:cNvPr>
@@ -25765,7 +25875,7 @@
           <p:cNvPr id="4" name="文本框 20">
             <a:extLst>
               <a:ext uri="{FF2B5EF4-FFF2-40B4-BE49-F238E27FC236}">
-                <a16:creationId xmlns:a16="http://schemas.microsoft.com/office/drawing/2014/main" xmlns="" id="{4A09A54B-FE9B-FEC8-7E9A-5D6019A41AAC}"/>
+                <a16:creationId xmlns="" xmlns:a16="http://schemas.microsoft.com/office/drawing/2014/main" id="{4A09A54B-FE9B-FEC8-7E9A-5D6019A41AAC}"/>
               </a:ext>
             </a:extLst>
           </p:cNvPr>
@@ -25941,7 +26051,7 @@
           <p:cNvPr id="5" name="文本框 4">
             <a:extLst>
               <a:ext uri="{FF2B5EF4-FFF2-40B4-BE49-F238E27FC236}">
-                <a16:creationId xmlns:a16="http://schemas.microsoft.com/office/drawing/2014/main" xmlns="" id="{6FAC473E-EE9C-C4F0-A841-BB3FF00BF7F2}"/>
+                <a16:creationId xmlns="" xmlns:a16="http://schemas.microsoft.com/office/drawing/2014/main" id="{6FAC473E-EE9C-C4F0-A841-BB3FF00BF7F2}"/>
               </a:ext>
             </a:extLst>
           </p:cNvPr>
@@ -25994,7 +26104,7 @@
           <p:cNvPr id="10" name="Rectangle 2">
             <a:extLst>
               <a:ext uri="{FF2B5EF4-FFF2-40B4-BE49-F238E27FC236}">
-                <a16:creationId xmlns:a16="http://schemas.microsoft.com/office/drawing/2014/main" xmlns="" id="{C7053283-EDC8-AEF8-1695-C2DCDC1218A2}"/>
+                <a16:creationId xmlns="" xmlns:a16="http://schemas.microsoft.com/office/drawing/2014/main" id="{C7053283-EDC8-AEF8-1695-C2DCDC1218A2}"/>
               </a:ext>
             </a:extLst>
           </p:cNvPr>
@@ -26060,7 +26170,7 @@
           <p:cNvPr id="12" name="Rectangle 4">
             <a:extLst>
               <a:ext uri="{FF2B5EF4-FFF2-40B4-BE49-F238E27FC236}">
-                <a16:creationId xmlns:a16="http://schemas.microsoft.com/office/drawing/2014/main" xmlns="" id="{9F208F86-D03D-68C6-D39A-0142D8205106}"/>
+                <a16:creationId xmlns="" xmlns:a16="http://schemas.microsoft.com/office/drawing/2014/main" id="{9F208F86-D03D-68C6-D39A-0142D8205106}"/>
               </a:ext>
             </a:extLst>
           </p:cNvPr>
@@ -26126,7 +26236,7 @@
           <p:cNvPr id="14" name="矩形 13">
             <a:extLst>
               <a:ext uri="{FF2B5EF4-FFF2-40B4-BE49-F238E27FC236}">
-                <a16:creationId xmlns:a16="http://schemas.microsoft.com/office/drawing/2014/main" xmlns="" id="{69443ECD-3C64-126C-BD15-0AE94000C8CB}"/>
+                <a16:creationId xmlns="" xmlns:a16="http://schemas.microsoft.com/office/drawing/2014/main" id="{69443ECD-3C64-126C-BD15-0AE94000C8CB}"/>
               </a:ext>
             </a:extLst>
           </p:cNvPr>
@@ -26168,7 +26278,7 @@
           <p:cNvPr id="8" name="矩形 5">
             <a:extLst>
               <a:ext uri="{FF2B5EF4-FFF2-40B4-BE49-F238E27FC236}">
-                <a16:creationId xmlns:a16="http://schemas.microsoft.com/office/drawing/2014/main" xmlns="" id="{8734D1F7-38BE-FB37-9E5A-D33A4E0F841F}"/>
+                <a16:creationId xmlns="" xmlns:a16="http://schemas.microsoft.com/office/drawing/2014/main" id="{8734D1F7-38BE-FB37-9E5A-D33A4E0F841F}"/>
               </a:ext>
             </a:extLst>
           </p:cNvPr>
@@ -26208,7 +26318,7 @@
           <p:cNvPr id="13" name="矩形 5">
             <a:extLst>
               <a:ext uri="{FF2B5EF4-FFF2-40B4-BE49-F238E27FC236}">
-                <a16:creationId xmlns:a16="http://schemas.microsoft.com/office/drawing/2014/main" xmlns="" id="{768B8860-C5D2-9C04-5F3B-ACC9AC6EEBCC}"/>
+                <a16:creationId xmlns="" xmlns:a16="http://schemas.microsoft.com/office/drawing/2014/main" id="{768B8860-C5D2-9C04-5F3B-ACC9AC6EEBCC}"/>
               </a:ext>
             </a:extLst>
           </p:cNvPr>
@@ -26248,7 +26358,7 @@
           <p:cNvPr id="15" name="矩形 18">
             <a:extLst>
               <a:ext uri="{FF2B5EF4-FFF2-40B4-BE49-F238E27FC236}">
-                <a16:creationId xmlns:a16="http://schemas.microsoft.com/office/drawing/2014/main" xmlns="" id="{93FFD7C5-4990-91E3-7049-3A91DD638DE6}"/>
+                <a16:creationId xmlns="" xmlns:a16="http://schemas.microsoft.com/office/drawing/2014/main" id="{93FFD7C5-4990-91E3-7049-3A91DD638DE6}"/>
               </a:ext>
             </a:extLst>
           </p:cNvPr>
@@ -26409,7 +26519,7 @@
           <p:cNvPr id="16" name="矩形 5">
             <a:extLst>
               <a:ext uri="{FF2B5EF4-FFF2-40B4-BE49-F238E27FC236}">
-                <a16:creationId xmlns:a16="http://schemas.microsoft.com/office/drawing/2014/main" xmlns="" id="{F6AAEFBE-B2AD-C2DE-2393-B9F3B37ABFF1}"/>
+                <a16:creationId xmlns="" xmlns:a16="http://schemas.microsoft.com/office/drawing/2014/main" id="{F6AAEFBE-B2AD-C2DE-2393-B9F3B37ABFF1}"/>
               </a:ext>
             </a:extLst>
           </p:cNvPr>
@@ -26444,7 +26554,7 @@
           <p:cNvPr id="6" name="Table 5">
             <a:extLst>
               <a:ext uri="{FF2B5EF4-FFF2-40B4-BE49-F238E27FC236}">
-                <a16:creationId xmlns:a16="http://schemas.microsoft.com/office/drawing/2014/main" xmlns="" id="{6E801FA0-CA10-A5C9-D00C-63EAE2E43C72}"/>
+                <a16:creationId xmlns="" xmlns:a16="http://schemas.microsoft.com/office/drawing/2014/main" id="{6E801FA0-CA10-A5C9-D00C-63EAE2E43C72}"/>
               </a:ext>
             </a:extLst>
           </p:cNvPr>
@@ -26473,21 +26583,21 @@
                 <a:gridCol w="2743200">
                   <a:extLst>
                     <a:ext uri="{9D8B030D-6E8A-4147-A177-3AD203B41FA5}">
-                      <a16:colId xmlns:a16="http://schemas.microsoft.com/office/drawing/2014/main" xmlns="" val="920468471"/>
+                      <a16:colId xmlns="" xmlns:a16="http://schemas.microsoft.com/office/drawing/2014/main" val="920468471"/>
                     </a:ext>
                   </a:extLst>
                 </a:gridCol>
                 <a:gridCol w="2743200">
                   <a:extLst>
                     <a:ext uri="{9D8B030D-6E8A-4147-A177-3AD203B41FA5}">
-                      <a16:colId xmlns:a16="http://schemas.microsoft.com/office/drawing/2014/main" xmlns="" val="2834399574"/>
+                      <a16:colId xmlns="" xmlns:a16="http://schemas.microsoft.com/office/drawing/2014/main" val="2834399574"/>
                     </a:ext>
                   </a:extLst>
                 </a:gridCol>
                 <a:gridCol w="2743200">
                   <a:extLst>
                     <a:ext uri="{9D8B030D-6E8A-4147-A177-3AD203B41FA5}">
-                      <a16:colId xmlns:a16="http://schemas.microsoft.com/office/drawing/2014/main" xmlns="" val="880512579"/>
+                      <a16:colId xmlns="" xmlns:a16="http://schemas.microsoft.com/office/drawing/2014/main" val="880512579"/>
                     </a:ext>
                   </a:extLst>
                 </a:gridCol>
@@ -26585,7 +26695,7 @@
                 </a:tc>
                 <a:extLst>
                   <a:ext uri="{0D108BD9-81ED-4DB2-BD59-A6C34878D82A}">
-                    <a16:rowId xmlns:a16="http://schemas.microsoft.com/office/drawing/2014/main" xmlns="" val="2604969681"/>
+                    <a16:rowId xmlns="" xmlns:a16="http://schemas.microsoft.com/office/drawing/2014/main" val="2604969681"/>
                   </a:ext>
                 </a:extLst>
               </a:tr>
@@ -26682,7 +26792,7 @@
                 </a:tc>
                 <a:extLst>
                   <a:ext uri="{0D108BD9-81ED-4DB2-BD59-A6C34878D82A}">
-                    <a16:rowId xmlns:a16="http://schemas.microsoft.com/office/drawing/2014/main" xmlns="" val="4186584081"/>
+                    <a16:rowId xmlns="" xmlns:a16="http://schemas.microsoft.com/office/drawing/2014/main" val="4186584081"/>
                   </a:ext>
                 </a:extLst>
               </a:tr>
@@ -26779,7 +26889,7 @@
                 </a:tc>
                 <a:extLst>
                   <a:ext uri="{0D108BD9-81ED-4DB2-BD59-A6C34878D82A}">
-                    <a16:rowId xmlns:a16="http://schemas.microsoft.com/office/drawing/2014/main" xmlns="" val="3215563507"/>
+                    <a16:rowId xmlns="" xmlns:a16="http://schemas.microsoft.com/office/drawing/2014/main" val="3215563507"/>
                   </a:ext>
                 </a:extLst>
               </a:tr>
@@ -26876,7 +26986,7 @@
                 </a:tc>
                 <a:extLst>
                   <a:ext uri="{0D108BD9-81ED-4DB2-BD59-A6C34878D82A}">
-                    <a16:rowId xmlns:a16="http://schemas.microsoft.com/office/drawing/2014/main" xmlns="" val="2954295033"/>
+                    <a16:rowId xmlns="" xmlns:a16="http://schemas.microsoft.com/office/drawing/2014/main" val="2954295033"/>
                   </a:ext>
                 </a:extLst>
               </a:tr>
@@ -26889,7 +26999,7 @@
           <p:cNvPr id="7" name="Table 6">
             <a:extLst>
               <a:ext uri="{FF2B5EF4-FFF2-40B4-BE49-F238E27FC236}">
-                <a16:creationId xmlns:a16="http://schemas.microsoft.com/office/drawing/2014/main" xmlns="" id="{4C648A8E-84A2-6C4B-DD3E-3C155E1678A3}"/>
+                <a16:creationId xmlns="" xmlns:a16="http://schemas.microsoft.com/office/drawing/2014/main" id="{4C648A8E-84A2-6C4B-DD3E-3C155E1678A3}"/>
               </a:ext>
             </a:extLst>
           </p:cNvPr>
@@ -26918,14 +27028,14 @@
                 <a:gridCol w="3106688">
                   <a:extLst>
                     <a:ext uri="{9D8B030D-6E8A-4147-A177-3AD203B41FA5}">
-                      <a16:colId xmlns:a16="http://schemas.microsoft.com/office/drawing/2014/main" xmlns="" val="585911591"/>
+                      <a16:colId xmlns="" xmlns:a16="http://schemas.microsoft.com/office/drawing/2014/main" val="585911591"/>
                     </a:ext>
                   </a:extLst>
                 </a:gridCol>
                 <a:gridCol w="5122912">
                   <a:extLst>
                     <a:ext uri="{9D8B030D-6E8A-4147-A177-3AD203B41FA5}">
-                      <a16:colId xmlns:a16="http://schemas.microsoft.com/office/drawing/2014/main" xmlns="" val="1511630177"/>
+                      <a16:colId xmlns="" xmlns:a16="http://schemas.microsoft.com/office/drawing/2014/main" val="1511630177"/>
                     </a:ext>
                   </a:extLst>
                 </a:gridCol>
@@ -26993,7 +27103,7 @@
                 </a:tc>
                 <a:extLst>
                   <a:ext uri="{0D108BD9-81ED-4DB2-BD59-A6C34878D82A}">
-                    <a16:rowId xmlns:a16="http://schemas.microsoft.com/office/drawing/2014/main" xmlns="" val="113543796"/>
+                    <a16:rowId xmlns="" xmlns:a16="http://schemas.microsoft.com/office/drawing/2014/main" val="113543796"/>
                   </a:ext>
                 </a:extLst>
               </a:tr>
@@ -27096,7 +27206,7 @@
                 </a:tc>
                 <a:extLst>
                   <a:ext uri="{0D108BD9-81ED-4DB2-BD59-A6C34878D82A}">
-                    <a16:rowId xmlns:a16="http://schemas.microsoft.com/office/drawing/2014/main" xmlns="" val="3727246573"/>
+                    <a16:rowId xmlns="" xmlns:a16="http://schemas.microsoft.com/office/drawing/2014/main" val="3727246573"/>
                   </a:ext>
                 </a:extLst>
               </a:tr>
@@ -27175,7 +27285,7 @@
                 </a:tc>
                 <a:extLst>
                   <a:ext uri="{0D108BD9-81ED-4DB2-BD59-A6C34878D82A}">
-                    <a16:rowId xmlns:a16="http://schemas.microsoft.com/office/drawing/2014/main" xmlns="" val="2215830129"/>
+                    <a16:rowId xmlns="" xmlns:a16="http://schemas.microsoft.com/office/drawing/2014/main" val="2215830129"/>
                   </a:ext>
                 </a:extLst>
               </a:tr>
@@ -27242,7 +27352,7 @@
                 </a:tc>
                 <a:extLst>
                   <a:ext uri="{0D108BD9-81ED-4DB2-BD59-A6C34878D82A}">
-                    <a16:rowId xmlns:a16="http://schemas.microsoft.com/office/drawing/2014/main" xmlns="" val="1555022269"/>
+                    <a16:rowId xmlns="" xmlns:a16="http://schemas.microsoft.com/office/drawing/2014/main" val="1555022269"/>
                   </a:ext>
                 </a:extLst>
               </a:tr>
@@ -27309,7 +27419,7 @@
                 </a:tc>
                 <a:extLst>
                   <a:ext uri="{0D108BD9-81ED-4DB2-BD59-A6C34878D82A}">
-                    <a16:rowId xmlns:a16="http://schemas.microsoft.com/office/drawing/2014/main" xmlns="" val="1805579201"/>
+                    <a16:rowId xmlns="" xmlns:a16="http://schemas.microsoft.com/office/drawing/2014/main" val="1805579201"/>
                   </a:ext>
                 </a:extLst>
               </a:tr>
@@ -27338,7 +27448,7 @@
         <p:cNvPr id="1" name="">
           <a:extLst>
             <a:ext uri="{FF2B5EF4-FFF2-40B4-BE49-F238E27FC236}">
-              <a16:creationId xmlns:a16="http://schemas.microsoft.com/office/drawing/2014/main" xmlns="" id="{7C84A215-C9FC-D0CE-C533-303CC1F59FD7}"/>
+              <a16:creationId xmlns="" xmlns:a16="http://schemas.microsoft.com/office/drawing/2014/main" id="{7C84A215-C9FC-D0CE-C533-303CC1F59FD7}"/>
             </a:ext>
           </a:extLst>
         </p:cNvPr>
@@ -27358,7 +27468,7 @@
           <p:cNvPr id="2" name="矩形 1">
             <a:extLst>
               <a:ext uri="{FF2B5EF4-FFF2-40B4-BE49-F238E27FC236}">
-                <a16:creationId xmlns:a16="http://schemas.microsoft.com/office/drawing/2014/main" xmlns="" id="{2A3D686A-BE8F-1487-718D-3A183E723561}"/>
+                <a16:creationId xmlns="" xmlns:a16="http://schemas.microsoft.com/office/drawing/2014/main" id="{2A3D686A-BE8F-1487-718D-3A183E723561}"/>
               </a:ext>
             </a:extLst>
           </p:cNvPr>
@@ -27412,7 +27522,7 @@
           <p:cNvPr id="3" name="矩形 2">
             <a:extLst>
               <a:ext uri="{FF2B5EF4-FFF2-40B4-BE49-F238E27FC236}">
-                <a16:creationId xmlns:a16="http://schemas.microsoft.com/office/drawing/2014/main" xmlns="" id="{FB2929A9-BC34-CD5B-B09E-2872E50E948B}"/>
+                <a16:creationId xmlns="" xmlns:a16="http://schemas.microsoft.com/office/drawing/2014/main" id="{FB2929A9-BC34-CD5B-B09E-2872E50E948B}"/>
               </a:ext>
             </a:extLst>
           </p:cNvPr>
@@ -27466,7 +27576,7 @@
           <p:cNvPr id="4" name="文本框 20">
             <a:extLst>
               <a:ext uri="{FF2B5EF4-FFF2-40B4-BE49-F238E27FC236}">
-                <a16:creationId xmlns:a16="http://schemas.microsoft.com/office/drawing/2014/main" xmlns="" id="{FD0AB72D-D4DB-5CDC-B33A-C0BB16475330}"/>
+                <a16:creationId xmlns="" xmlns:a16="http://schemas.microsoft.com/office/drawing/2014/main" id="{FD0AB72D-D4DB-5CDC-B33A-C0BB16475330}"/>
               </a:ext>
             </a:extLst>
           </p:cNvPr>
@@ -27642,7 +27752,7 @@
           <p:cNvPr id="5" name="文本框 4">
             <a:extLst>
               <a:ext uri="{FF2B5EF4-FFF2-40B4-BE49-F238E27FC236}">
-                <a16:creationId xmlns:a16="http://schemas.microsoft.com/office/drawing/2014/main" xmlns="" id="{0B77BD6A-738E-3F06-464D-9174A76500D1}"/>
+                <a16:creationId xmlns="" xmlns:a16="http://schemas.microsoft.com/office/drawing/2014/main" id="{0B77BD6A-738E-3F06-464D-9174A76500D1}"/>
               </a:ext>
             </a:extLst>
           </p:cNvPr>
@@ -27695,7 +27805,7 @@
           <p:cNvPr id="10" name="Rectangle 2">
             <a:extLst>
               <a:ext uri="{FF2B5EF4-FFF2-40B4-BE49-F238E27FC236}">
-                <a16:creationId xmlns:a16="http://schemas.microsoft.com/office/drawing/2014/main" xmlns="" id="{D69056FF-E19F-9FA1-CC84-DBB3471AE4F4}"/>
+                <a16:creationId xmlns="" xmlns:a16="http://schemas.microsoft.com/office/drawing/2014/main" id="{D69056FF-E19F-9FA1-CC84-DBB3471AE4F4}"/>
               </a:ext>
             </a:extLst>
           </p:cNvPr>
@@ -27761,7 +27871,7 @@
           <p:cNvPr id="12" name="Rectangle 4">
             <a:extLst>
               <a:ext uri="{FF2B5EF4-FFF2-40B4-BE49-F238E27FC236}">
-                <a16:creationId xmlns:a16="http://schemas.microsoft.com/office/drawing/2014/main" xmlns="" id="{7F0745DA-9E9A-3D3E-A972-D27CCADF43C9}"/>
+                <a16:creationId xmlns="" xmlns:a16="http://schemas.microsoft.com/office/drawing/2014/main" id="{7F0745DA-9E9A-3D3E-A972-D27CCADF43C9}"/>
               </a:ext>
             </a:extLst>
           </p:cNvPr>
@@ -27827,7 +27937,7 @@
           <p:cNvPr id="14" name="矩形 13">
             <a:extLst>
               <a:ext uri="{FF2B5EF4-FFF2-40B4-BE49-F238E27FC236}">
-                <a16:creationId xmlns:a16="http://schemas.microsoft.com/office/drawing/2014/main" xmlns="" id="{D5476CDB-A051-74B4-A9CA-B1DE681468AB}"/>
+                <a16:creationId xmlns="" xmlns:a16="http://schemas.microsoft.com/office/drawing/2014/main" id="{D5476CDB-A051-74B4-A9CA-B1DE681468AB}"/>
               </a:ext>
             </a:extLst>
           </p:cNvPr>
@@ -27869,7 +27979,7 @@
           <p:cNvPr id="8" name="矩形 5">
             <a:extLst>
               <a:ext uri="{FF2B5EF4-FFF2-40B4-BE49-F238E27FC236}">
-                <a16:creationId xmlns:a16="http://schemas.microsoft.com/office/drawing/2014/main" xmlns="" id="{34C38CC7-8C7C-56CC-B8CF-996A6504353B}"/>
+                <a16:creationId xmlns="" xmlns:a16="http://schemas.microsoft.com/office/drawing/2014/main" id="{34C38CC7-8C7C-56CC-B8CF-996A6504353B}"/>
               </a:ext>
             </a:extLst>
           </p:cNvPr>
@@ -27909,7 +28019,7 @@
           <p:cNvPr id="13" name="矩形 5">
             <a:extLst>
               <a:ext uri="{FF2B5EF4-FFF2-40B4-BE49-F238E27FC236}">
-                <a16:creationId xmlns:a16="http://schemas.microsoft.com/office/drawing/2014/main" xmlns="" id="{4DF2ADA6-499F-9DF5-9631-26C6AA51AA04}"/>
+                <a16:creationId xmlns="" xmlns:a16="http://schemas.microsoft.com/office/drawing/2014/main" id="{4DF2ADA6-499F-9DF5-9631-26C6AA51AA04}"/>
               </a:ext>
             </a:extLst>
           </p:cNvPr>
@@ -27949,7 +28059,7 @@
           <p:cNvPr id="15" name="矩形 18">
             <a:extLst>
               <a:ext uri="{FF2B5EF4-FFF2-40B4-BE49-F238E27FC236}">
-                <a16:creationId xmlns:a16="http://schemas.microsoft.com/office/drawing/2014/main" xmlns="" id="{369DB825-FED6-7940-73F2-A5424497391C}"/>
+                <a16:creationId xmlns="" xmlns:a16="http://schemas.microsoft.com/office/drawing/2014/main" id="{369DB825-FED6-7940-73F2-A5424497391C}"/>
               </a:ext>
             </a:extLst>
           </p:cNvPr>
@@ -28055,7 +28165,7 @@
           <p:cNvPr id="16" name="矩形 5">
             <a:extLst>
               <a:ext uri="{FF2B5EF4-FFF2-40B4-BE49-F238E27FC236}">
-                <a16:creationId xmlns:a16="http://schemas.microsoft.com/office/drawing/2014/main" xmlns="" id="{8F6EC15B-85D1-9A8C-DDC5-5AB07FD5EE88}"/>
+                <a16:creationId xmlns="" xmlns:a16="http://schemas.microsoft.com/office/drawing/2014/main" id="{8F6EC15B-85D1-9A8C-DDC5-5AB07FD5EE88}"/>
               </a:ext>
             </a:extLst>
           </p:cNvPr>
@@ -28090,7 +28200,7 @@
           <p:cNvPr id="9" name="Table 8">
             <a:extLst>
               <a:ext uri="{FF2B5EF4-FFF2-40B4-BE49-F238E27FC236}">
-                <a16:creationId xmlns:a16="http://schemas.microsoft.com/office/drawing/2014/main" xmlns="" id="{A39BB993-FE40-2E09-8B93-1AA3CB371754}"/>
+                <a16:creationId xmlns="" xmlns:a16="http://schemas.microsoft.com/office/drawing/2014/main" id="{A39BB993-FE40-2E09-8B93-1AA3CB371754}"/>
               </a:ext>
             </a:extLst>
           </p:cNvPr>
@@ -28119,21 +28229,21 @@
                 <a:gridCol w="2743200">
                   <a:extLst>
                     <a:ext uri="{9D8B030D-6E8A-4147-A177-3AD203B41FA5}">
-                      <a16:colId xmlns:a16="http://schemas.microsoft.com/office/drawing/2014/main" xmlns="" val="849589930"/>
+                      <a16:colId xmlns="" xmlns:a16="http://schemas.microsoft.com/office/drawing/2014/main" val="849589930"/>
                     </a:ext>
                   </a:extLst>
                 </a:gridCol>
                 <a:gridCol w="2743200">
                   <a:extLst>
                     <a:ext uri="{9D8B030D-6E8A-4147-A177-3AD203B41FA5}">
-                      <a16:colId xmlns:a16="http://schemas.microsoft.com/office/drawing/2014/main" xmlns="" val="766940267"/>
+                      <a16:colId xmlns="" xmlns:a16="http://schemas.microsoft.com/office/drawing/2014/main" val="766940267"/>
                     </a:ext>
                   </a:extLst>
                 </a:gridCol>
                 <a:gridCol w="2743200">
                   <a:extLst>
                     <a:ext uri="{9D8B030D-6E8A-4147-A177-3AD203B41FA5}">
-                      <a16:colId xmlns:a16="http://schemas.microsoft.com/office/drawing/2014/main" xmlns="" val="2166129193"/>
+                      <a16:colId xmlns="" xmlns:a16="http://schemas.microsoft.com/office/drawing/2014/main" val="2166129193"/>
                     </a:ext>
                   </a:extLst>
                 </a:gridCol>
@@ -28231,7 +28341,7 @@
                 </a:tc>
                 <a:extLst>
                   <a:ext uri="{0D108BD9-81ED-4DB2-BD59-A6C34878D82A}">
-                    <a16:rowId xmlns:a16="http://schemas.microsoft.com/office/drawing/2014/main" xmlns="" val="2919004642"/>
+                    <a16:rowId xmlns="" xmlns:a16="http://schemas.microsoft.com/office/drawing/2014/main" val="2919004642"/>
                   </a:ext>
                 </a:extLst>
               </a:tr>
@@ -28352,7 +28462,7 @@
                 </a:tc>
                 <a:extLst>
                   <a:ext uri="{0D108BD9-81ED-4DB2-BD59-A6C34878D82A}">
-                    <a16:rowId xmlns:a16="http://schemas.microsoft.com/office/drawing/2014/main" xmlns="" val="1120636769"/>
+                    <a16:rowId xmlns="" xmlns:a16="http://schemas.microsoft.com/office/drawing/2014/main" val="1120636769"/>
                   </a:ext>
                 </a:extLst>
               </a:tr>
@@ -28455,7 +28565,7 @@
                 </a:tc>
                 <a:extLst>
                   <a:ext uri="{0D108BD9-81ED-4DB2-BD59-A6C34878D82A}">
-                    <a16:rowId xmlns:a16="http://schemas.microsoft.com/office/drawing/2014/main" xmlns="" val="2715815234"/>
+                    <a16:rowId xmlns="" xmlns:a16="http://schemas.microsoft.com/office/drawing/2014/main" val="2715815234"/>
                   </a:ext>
                 </a:extLst>
               </a:tr>
@@ -28576,7 +28686,7 @@
                 </a:tc>
                 <a:extLst>
                   <a:ext uri="{0D108BD9-81ED-4DB2-BD59-A6C34878D82A}">
-                    <a16:rowId xmlns:a16="http://schemas.microsoft.com/office/drawing/2014/main" xmlns="" val="1029610919"/>
+                    <a16:rowId xmlns="" xmlns:a16="http://schemas.microsoft.com/office/drawing/2014/main" val="1029610919"/>
                   </a:ext>
                 </a:extLst>
               </a:tr>
@@ -28589,7 +28699,7 @@
           <p:cNvPr id="11" name="Table 10">
             <a:extLst>
               <a:ext uri="{FF2B5EF4-FFF2-40B4-BE49-F238E27FC236}">
-                <a16:creationId xmlns:a16="http://schemas.microsoft.com/office/drawing/2014/main" xmlns="" id="{7994B48E-91D4-6AD1-ACBC-169D5DC00337}"/>
+                <a16:creationId xmlns="" xmlns:a16="http://schemas.microsoft.com/office/drawing/2014/main" id="{7994B48E-91D4-6AD1-ACBC-169D5DC00337}"/>
               </a:ext>
             </a:extLst>
           </p:cNvPr>
@@ -28618,14 +28728,14 @@
                 <a:gridCol w="3466728">
                   <a:extLst>
                     <a:ext uri="{9D8B030D-6E8A-4147-A177-3AD203B41FA5}">
-                      <a16:colId xmlns:a16="http://schemas.microsoft.com/office/drawing/2014/main" xmlns="" val="3086872855"/>
+                      <a16:colId xmlns="" xmlns:a16="http://schemas.microsoft.com/office/drawing/2014/main" val="3086872855"/>
                     </a:ext>
                   </a:extLst>
                 </a:gridCol>
                 <a:gridCol w="4762872">
                   <a:extLst>
                     <a:ext uri="{9D8B030D-6E8A-4147-A177-3AD203B41FA5}">
-                      <a16:colId xmlns:a16="http://schemas.microsoft.com/office/drawing/2014/main" xmlns="" val="4253305198"/>
+                      <a16:colId xmlns="" xmlns:a16="http://schemas.microsoft.com/office/drawing/2014/main" val="4253305198"/>
                     </a:ext>
                   </a:extLst>
                 </a:gridCol>
@@ -28693,7 +28803,7 @@
                 </a:tc>
                 <a:extLst>
                   <a:ext uri="{0D108BD9-81ED-4DB2-BD59-A6C34878D82A}">
-                    <a16:rowId xmlns:a16="http://schemas.microsoft.com/office/drawing/2014/main" xmlns="" val="3906177576"/>
+                    <a16:rowId xmlns="" xmlns:a16="http://schemas.microsoft.com/office/drawing/2014/main" val="3906177576"/>
                   </a:ext>
                 </a:extLst>
               </a:tr>
@@ -28778,7 +28888,7 @@
                 </a:tc>
                 <a:extLst>
                   <a:ext uri="{0D108BD9-81ED-4DB2-BD59-A6C34878D82A}">
-                    <a16:rowId xmlns:a16="http://schemas.microsoft.com/office/drawing/2014/main" xmlns="" val="2580816523"/>
+                    <a16:rowId xmlns="" xmlns:a16="http://schemas.microsoft.com/office/drawing/2014/main" val="2580816523"/>
                   </a:ext>
                 </a:extLst>
               </a:tr>
@@ -28857,7 +28967,7 @@
                 </a:tc>
                 <a:extLst>
                   <a:ext uri="{0D108BD9-81ED-4DB2-BD59-A6C34878D82A}">
-                    <a16:rowId xmlns:a16="http://schemas.microsoft.com/office/drawing/2014/main" xmlns="" val="3605183178"/>
+                    <a16:rowId xmlns="" xmlns:a16="http://schemas.microsoft.com/office/drawing/2014/main" val="3605183178"/>
                   </a:ext>
                 </a:extLst>
               </a:tr>
@@ -28936,7 +29046,7 @@
                 </a:tc>
                 <a:extLst>
                   <a:ext uri="{0D108BD9-81ED-4DB2-BD59-A6C34878D82A}">
-                    <a16:rowId xmlns:a16="http://schemas.microsoft.com/office/drawing/2014/main" xmlns="" val="3284815571"/>
+                    <a16:rowId xmlns="" xmlns:a16="http://schemas.microsoft.com/office/drawing/2014/main" val="3284815571"/>
                   </a:ext>
                 </a:extLst>
               </a:tr>
@@ -29009,7 +29119,7 @@
                 </a:tc>
                 <a:extLst>
                   <a:ext uri="{0D108BD9-81ED-4DB2-BD59-A6C34878D82A}">
-                    <a16:rowId xmlns:a16="http://schemas.microsoft.com/office/drawing/2014/main" xmlns="" val="19195785"/>
+                    <a16:rowId xmlns="" xmlns:a16="http://schemas.microsoft.com/office/drawing/2014/main" val="19195785"/>
                   </a:ext>
                 </a:extLst>
               </a:tr>
@@ -29038,7 +29148,7 @@
         <p:cNvPr id="1" name="">
           <a:extLst>
             <a:ext uri="{FF2B5EF4-FFF2-40B4-BE49-F238E27FC236}">
-              <a16:creationId xmlns:a16="http://schemas.microsoft.com/office/drawing/2014/main" xmlns="" id="{E66235B8-8EA8-C977-A193-852C5B0972B1}"/>
+              <a16:creationId xmlns="" xmlns:a16="http://schemas.microsoft.com/office/drawing/2014/main" id="{E66235B8-8EA8-C977-A193-852C5B0972B1}"/>
             </a:ext>
           </a:extLst>
         </p:cNvPr>
@@ -29058,7 +29168,7 @@
           <p:cNvPr id="2" name="矩形 1">
             <a:extLst>
               <a:ext uri="{FF2B5EF4-FFF2-40B4-BE49-F238E27FC236}">
-                <a16:creationId xmlns:a16="http://schemas.microsoft.com/office/drawing/2014/main" xmlns="" id="{729F11D1-DF8E-2478-7640-19D5681E120E}"/>
+                <a16:creationId xmlns="" xmlns:a16="http://schemas.microsoft.com/office/drawing/2014/main" id="{729F11D1-DF8E-2478-7640-19D5681E120E}"/>
               </a:ext>
             </a:extLst>
           </p:cNvPr>
@@ -29112,7 +29222,7 @@
           <p:cNvPr id="3" name="矩形 2">
             <a:extLst>
               <a:ext uri="{FF2B5EF4-FFF2-40B4-BE49-F238E27FC236}">
-                <a16:creationId xmlns:a16="http://schemas.microsoft.com/office/drawing/2014/main" xmlns="" id="{39E1912A-7359-17DD-B799-42CE9C3214FF}"/>
+                <a16:creationId xmlns="" xmlns:a16="http://schemas.microsoft.com/office/drawing/2014/main" id="{39E1912A-7359-17DD-B799-42CE9C3214FF}"/>
               </a:ext>
             </a:extLst>
           </p:cNvPr>
@@ -29166,7 +29276,7 @@
           <p:cNvPr id="4" name="文本框 20">
             <a:extLst>
               <a:ext uri="{FF2B5EF4-FFF2-40B4-BE49-F238E27FC236}">
-                <a16:creationId xmlns:a16="http://schemas.microsoft.com/office/drawing/2014/main" xmlns="" id="{59F3B6AC-673C-6F35-4D30-10C13AFDD988}"/>
+                <a16:creationId xmlns="" xmlns:a16="http://schemas.microsoft.com/office/drawing/2014/main" id="{59F3B6AC-673C-6F35-4D30-10C13AFDD988}"/>
               </a:ext>
             </a:extLst>
           </p:cNvPr>
@@ -29342,7 +29452,7 @@
           <p:cNvPr id="5" name="文本框 4">
             <a:extLst>
               <a:ext uri="{FF2B5EF4-FFF2-40B4-BE49-F238E27FC236}">
-                <a16:creationId xmlns:a16="http://schemas.microsoft.com/office/drawing/2014/main" xmlns="" id="{B4FD4497-F24B-5A05-8435-D9A415EE5D08}"/>
+                <a16:creationId xmlns="" xmlns:a16="http://schemas.microsoft.com/office/drawing/2014/main" id="{B4FD4497-F24B-5A05-8435-D9A415EE5D08}"/>
               </a:ext>
             </a:extLst>
           </p:cNvPr>
@@ -29395,7 +29505,7 @@
           <p:cNvPr id="10" name="Rectangle 2">
             <a:extLst>
               <a:ext uri="{FF2B5EF4-FFF2-40B4-BE49-F238E27FC236}">
-                <a16:creationId xmlns:a16="http://schemas.microsoft.com/office/drawing/2014/main" xmlns="" id="{A59359BE-1CD9-55E3-546F-71C86F483B2E}"/>
+                <a16:creationId xmlns="" xmlns:a16="http://schemas.microsoft.com/office/drawing/2014/main" id="{A59359BE-1CD9-55E3-546F-71C86F483B2E}"/>
               </a:ext>
             </a:extLst>
           </p:cNvPr>
@@ -29461,7 +29571,7 @@
           <p:cNvPr id="12" name="Rectangle 4">
             <a:extLst>
               <a:ext uri="{FF2B5EF4-FFF2-40B4-BE49-F238E27FC236}">
-                <a16:creationId xmlns:a16="http://schemas.microsoft.com/office/drawing/2014/main" xmlns="" id="{1D1F6740-9873-4EE2-CEB0-C90FBAB4E9BD}"/>
+                <a16:creationId xmlns="" xmlns:a16="http://schemas.microsoft.com/office/drawing/2014/main" id="{1D1F6740-9873-4EE2-CEB0-C90FBAB4E9BD}"/>
               </a:ext>
             </a:extLst>
           </p:cNvPr>
@@ -29527,7 +29637,7 @@
           <p:cNvPr id="14" name="矩形 13">
             <a:extLst>
               <a:ext uri="{FF2B5EF4-FFF2-40B4-BE49-F238E27FC236}">
-                <a16:creationId xmlns:a16="http://schemas.microsoft.com/office/drawing/2014/main" xmlns="" id="{CBCA88C8-DABE-DA7E-BAED-37CFBF3DD582}"/>
+                <a16:creationId xmlns="" xmlns:a16="http://schemas.microsoft.com/office/drawing/2014/main" id="{CBCA88C8-DABE-DA7E-BAED-37CFBF3DD582}"/>
               </a:ext>
             </a:extLst>
           </p:cNvPr>
@@ -29569,7 +29679,7 @@
           <p:cNvPr id="8" name="矩形 5">
             <a:extLst>
               <a:ext uri="{FF2B5EF4-FFF2-40B4-BE49-F238E27FC236}">
-                <a16:creationId xmlns:a16="http://schemas.microsoft.com/office/drawing/2014/main" xmlns="" id="{5FA5DA11-5B46-CEB1-CE17-661A969CB88B}"/>
+                <a16:creationId xmlns="" xmlns:a16="http://schemas.microsoft.com/office/drawing/2014/main" id="{5FA5DA11-5B46-CEB1-CE17-661A969CB88B}"/>
               </a:ext>
             </a:extLst>
           </p:cNvPr>
@@ -29609,7 +29719,7 @@
           <p:cNvPr id="13" name="矩形 5">
             <a:extLst>
               <a:ext uri="{FF2B5EF4-FFF2-40B4-BE49-F238E27FC236}">
-                <a16:creationId xmlns:a16="http://schemas.microsoft.com/office/drawing/2014/main" xmlns="" id="{C48066F6-A6F3-AF05-26ED-709EB86EB8C2}"/>
+                <a16:creationId xmlns="" xmlns:a16="http://schemas.microsoft.com/office/drawing/2014/main" id="{C48066F6-A6F3-AF05-26ED-709EB86EB8C2}"/>
               </a:ext>
             </a:extLst>
           </p:cNvPr>
@@ -29649,7 +29759,7 @@
           <p:cNvPr id="15" name="矩形 18">
             <a:extLst>
               <a:ext uri="{FF2B5EF4-FFF2-40B4-BE49-F238E27FC236}">
-                <a16:creationId xmlns:a16="http://schemas.microsoft.com/office/drawing/2014/main" xmlns="" id="{1E4391C8-DBB5-9418-A4E3-ECC1933AAB84}"/>
+                <a16:creationId xmlns="" xmlns:a16="http://schemas.microsoft.com/office/drawing/2014/main" id="{1E4391C8-DBB5-9418-A4E3-ECC1933AAB84}"/>
               </a:ext>
             </a:extLst>
           </p:cNvPr>
@@ -29755,7 +29865,7 @@
           <p:cNvPr id="16" name="矩形 5">
             <a:extLst>
               <a:ext uri="{FF2B5EF4-FFF2-40B4-BE49-F238E27FC236}">
-                <a16:creationId xmlns:a16="http://schemas.microsoft.com/office/drawing/2014/main" xmlns="" id="{81ED8ABA-418F-6F9D-5E2C-76F2DD60B1A5}"/>
+                <a16:creationId xmlns="" xmlns:a16="http://schemas.microsoft.com/office/drawing/2014/main" id="{81ED8ABA-418F-6F9D-5E2C-76F2DD60B1A5}"/>
               </a:ext>
             </a:extLst>
           </p:cNvPr>
@@ -29790,7 +29900,7 @@
           <p:cNvPr id="6" name="Table 5">
             <a:extLst>
               <a:ext uri="{FF2B5EF4-FFF2-40B4-BE49-F238E27FC236}">
-                <a16:creationId xmlns:a16="http://schemas.microsoft.com/office/drawing/2014/main" xmlns="" id="{9C95CE2A-0DE8-086C-9F25-5D6E49008529}"/>
+                <a16:creationId xmlns="" xmlns:a16="http://schemas.microsoft.com/office/drawing/2014/main" id="{9C95CE2A-0DE8-086C-9F25-5D6E49008529}"/>
               </a:ext>
             </a:extLst>
           </p:cNvPr>
@@ -29819,21 +29929,21 @@
                 <a:gridCol w="2743200">
                   <a:extLst>
                     <a:ext uri="{9D8B030D-6E8A-4147-A177-3AD203B41FA5}">
-                      <a16:colId xmlns:a16="http://schemas.microsoft.com/office/drawing/2014/main" xmlns="" val="2224572617"/>
+                      <a16:colId xmlns="" xmlns:a16="http://schemas.microsoft.com/office/drawing/2014/main" val="2224572617"/>
                     </a:ext>
                   </a:extLst>
                 </a:gridCol>
                 <a:gridCol w="2743200">
                   <a:extLst>
                     <a:ext uri="{9D8B030D-6E8A-4147-A177-3AD203B41FA5}">
-                      <a16:colId xmlns:a16="http://schemas.microsoft.com/office/drawing/2014/main" xmlns="" val="2945581860"/>
+                      <a16:colId xmlns="" xmlns:a16="http://schemas.microsoft.com/office/drawing/2014/main" val="2945581860"/>
                     </a:ext>
                   </a:extLst>
                 </a:gridCol>
                 <a:gridCol w="2743200">
                   <a:extLst>
                     <a:ext uri="{9D8B030D-6E8A-4147-A177-3AD203B41FA5}">
-                      <a16:colId xmlns:a16="http://schemas.microsoft.com/office/drawing/2014/main" xmlns="" val="2653819318"/>
+                      <a16:colId xmlns="" xmlns:a16="http://schemas.microsoft.com/office/drawing/2014/main" val="2653819318"/>
                     </a:ext>
                   </a:extLst>
                 </a:gridCol>
@@ -29931,7 +30041,7 @@
                 </a:tc>
                 <a:extLst>
                   <a:ext uri="{0D108BD9-81ED-4DB2-BD59-A6C34878D82A}">
-                    <a16:rowId xmlns:a16="http://schemas.microsoft.com/office/drawing/2014/main" xmlns="" val="563878104"/>
+                    <a16:rowId xmlns="" xmlns:a16="http://schemas.microsoft.com/office/drawing/2014/main" val="563878104"/>
                   </a:ext>
                 </a:extLst>
               </a:tr>
@@ -30040,7 +30150,7 @@
                 </a:tc>
                 <a:extLst>
                   <a:ext uri="{0D108BD9-81ED-4DB2-BD59-A6C34878D82A}">
-                    <a16:rowId xmlns:a16="http://schemas.microsoft.com/office/drawing/2014/main" xmlns="" val="4057094531"/>
+                    <a16:rowId xmlns="" xmlns:a16="http://schemas.microsoft.com/office/drawing/2014/main" val="4057094531"/>
                   </a:ext>
                 </a:extLst>
               </a:tr>
@@ -30137,7 +30247,7 @@
                 </a:tc>
                 <a:extLst>
                   <a:ext uri="{0D108BD9-81ED-4DB2-BD59-A6C34878D82A}">
-                    <a16:rowId xmlns:a16="http://schemas.microsoft.com/office/drawing/2014/main" xmlns="" val="3927381404"/>
+                    <a16:rowId xmlns="" xmlns:a16="http://schemas.microsoft.com/office/drawing/2014/main" val="3927381404"/>
                   </a:ext>
                 </a:extLst>
               </a:tr>
@@ -30246,7 +30356,7 @@
                 </a:tc>
                 <a:extLst>
                   <a:ext uri="{0D108BD9-81ED-4DB2-BD59-A6C34878D82A}">
-                    <a16:rowId xmlns:a16="http://schemas.microsoft.com/office/drawing/2014/main" xmlns="" val="3206988646"/>
+                    <a16:rowId xmlns="" xmlns:a16="http://schemas.microsoft.com/office/drawing/2014/main" val="3206988646"/>
                   </a:ext>
                 </a:extLst>
               </a:tr>
@@ -30259,7 +30369,7 @@
           <p:cNvPr id="7" name="Table 6">
             <a:extLst>
               <a:ext uri="{FF2B5EF4-FFF2-40B4-BE49-F238E27FC236}">
-                <a16:creationId xmlns:a16="http://schemas.microsoft.com/office/drawing/2014/main" xmlns="" id="{DE28F4BB-9466-87B1-0B69-3FACE35BFF57}"/>
+                <a16:creationId xmlns="" xmlns:a16="http://schemas.microsoft.com/office/drawing/2014/main" id="{DE28F4BB-9466-87B1-0B69-3FACE35BFF57}"/>
               </a:ext>
             </a:extLst>
           </p:cNvPr>
@@ -30288,14 +30398,14 @@
                 <a:gridCol w="3106688">
                   <a:extLst>
                     <a:ext uri="{9D8B030D-6E8A-4147-A177-3AD203B41FA5}">
-                      <a16:colId xmlns:a16="http://schemas.microsoft.com/office/drawing/2014/main" xmlns="" val="365646870"/>
+                      <a16:colId xmlns="" xmlns:a16="http://schemas.microsoft.com/office/drawing/2014/main" val="365646870"/>
                     </a:ext>
                   </a:extLst>
                 </a:gridCol>
                 <a:gridCol w="5122912">
                   <a:extLst>
                     <a:ext uri="{9D8B030D-6E8A-4147-A177-3AD203B41FA5}">
-                      <a16:colId xmlns:a16="http://schemas.microsoft.com/office/drawing/2014/main" xmlns="" val="3857886227"/>
+                      <a16:colId xmlns="" xmlns:a16="http://schemas.microsoft.com/office/drawing/2014/main" val="3857886227"/>
                     </a:ext>
                   </a:extLst>
                 </a:gridCol>
@@ -30363,7 +30473,7 @@
                 </a:tc>
                 <a:extLst>
                   <a:ext uri="{0D108BD9-81ED-4DB2-BD59-A6C34878D82A}">
-                    <a16:rowId xmlns:a16="http://schemas.microsoft.com/office/drawing/2014/main" xmlns="" val="3192856029"/>
+                    <a16:rowId xmlns="" xmlns:a16="http://schemas.microsoft.com/office/drawing/2014/main" val="3192856029"/>
                   </a:ext>
                 </a:extLst>
               </a:tr>
@@ -30492,7 +30602,7 @@
                 </a:tc>
                 <a:extLst>
                   <a:ext uri="{0D108BD9-81ED-4DB2-BD59-A6C34878D82A}">
-                    <a16:rowId xmlns:a16="http://schemas.microsoft.com/office/drawing/2014/main" xmlns="" val="137276311"/>
+                    <a16:rowId xmlns="" xmlns:a16="http://schemas.microsoft.com/office/drawing/2014/main" val="137276311"/>
                   </a:ext>
                 </a:extLst>
               </a:tr>
@@ -30571,7 +30681,7 @@
                 </a:tc>
                 <a:extLst>
                   <a:ext uri="{0D108BD9-81ED-4DB2-BD59-A6C34878D82A}">
-                    <a16:rowId xmlns:a16="http://schemas.microsoft.com/office/drawing/2014/main" xmlns="" val="3609926784"/>
+                    <a16:rowId xmlns="" xmlns:a16="http://schemas.microsoft.com/office/drawing/2014/main" val="3609926784"/>
                   </a:ext>
                 </a:extLst>
               </a:tr>
@@ -30662,7 +30772,7 @@
                 </a:tc>
                 <a:extLst>
                   <a:ext uri="{0D108BD9-81ED-4DB2-BD59-A6C34878D82A}">
-                    <a16:rowId xmlns:a16="http://schemas.microsoft.com/office/drawing/2014/main" xmlns="" val="2440922786"/>
+                    <a16:rowId xmlns="" xmlns:a16="http://schemas.microsoft.com/office/drawing/2014/main" val="2440922786"/>
                   </a:ext>
                 </a:extLst>
               </a:tr>
@@ -30765,7 +30875,7 @@
                 </a:tc>
                 <a:extLst>
                   <a:ext uri="{0D108BD9-81ED-4DB2-BD59-A6C34878D82A}">
-                    <a16:rowId xmlns:a16="http://schemas.microsoft.com/office/drawing/2014/main" xmlns="" val="3269900895"/>
+                    <a16:rowId xmlns="" xmlns:a16="http://schemas.microsoft.com/office/drawing/2014/main" val="3269900895"/>
                   </a:ext>
                 </a:extLst>
               </a:tr>
@@ -32372,7 +32482,7 @@
           <p:cNvPr id="6" name="TextBox 5">
             <a:extLst>
               <a:ext uri="{FF2B5EF4-FFF2-40B4-BE49-F238E27FC236}">
-                <a16:creationId xmlns:a16="http://schemas.microsoft.com/office/drawing/2014/main" xmlns="" id="{B2DF8BFE-5A66-764F-C93E-41CC7FA6C09E}"/>
+                <a16:creationId xmlns="" xmlns:a16="http://schemas.microsoft.com/office/drawing/2014/main" id="{B2DF8BFE-5A66-764F-C93E-41CC7FA6C09E}"/>
               </a:ext>
             </a:extLst>
           </p:cNvPr>
@@ -32490,7 +32600,7 @@
           <p:cNvPr id="8" name="矩形 9">
             <a:extLst>
               <a:ext uri="{FF2B5EF4-FFF2-40B4-BE49-F238E27FC236}">
-                <a16:creationId xmlns:a16="http://schemas.microsoft.com/office/drawing/2014/main" xmlns="" id="{31739824-4A63-C3A9-200D-86C57182EFCB}"/>
+                <a16:creationId xmlns="" xmlns:a16="http://schemas.microsoft.com/office/drawing/2014/main" id="{31739824-4A63-C3A9-200D-86C57182EFCB}"/>
               </a:ext>
             </a:extLst>
           </p:cNvPr>
@@ -32538,7 +32648,7 @@
           <p:cNvPr id="16" name="矩形 9">
             <a:extLst>
               <a:ext uri="{FF2B5EF4-FFF2-40B4-BE49-F238E27FC236}">
-                <a16:creationId xmlns:a16="http://schemas.microsoft.com/office/drawing/2014/main" xmlns="" id="{3D15BA58-FA51-34FD-B479-966AD73D4B36}"/>
+                <a16:creationId xmlns="" xmlns:a16="http://schemas.microsoft.com/office/drawing/2014/main" id="{3D15BA58-FA51-34FD-B479-966AD73D4B36}"/>
               </a:ext>
             </a:extLst>
           </p:cNvPr>
@@ -32593,7 +32703,7 @@
           <p:cNvPr id="17" name="矩形 9">
             <a:extLst>
               <a:ext uri="{FF2B5EF4-FFF2-40B4-BE49-F238E27FC236}">
-                <a16:creationId xmlns:a16="http://schemas.microsoft.com/office/drawing/2014/main" xmlns="" id="{A562FB36-5900-0319-5592-7F5BF47337A0}"/>
+                <a16:creationId xmlns="" xmlns:a16="http://schemas.microsoft.com/office/drawing/2014/main" id="{A562FB36-5900-0319-5592-7F5BF47337A0}"/>
               </a:ext>
             </a:extLst>
           </p:cNvPr>
@@ -32648,7 +32758,7 @@
           <p:cNvPr id="19" name="TextBox 18">
             <a:extLst>
               <a:ext uri="{FF2B5EF4-FFF2-40B4-BE49-F238E27FC236}">
-                <a16:creationId xmlns:a16="http://schemas.microsoft.com/office/drawing/2014/main" xmlns="" id="{0CBFF678-1812-FD1A-2E18-67230977CA93}"/>
+                <a16:creationId xmlns="" xmlns:a16="http://schemas.microsoft.com/office/drawing/2014/main" id="{0CBFF678-1812-FD1A-2E18-67230977CA93}"/>
               </a:ext>
             </a:extLst>
           </p:cNvPr>
@@ -32780,7 +32890,7 @@
           <p:cNvPr id="20" name="TextBox 19">
             <a:extLst>
               <a:ext uri="{FF2B5EF4-FFF2-40B4-BE49-F238E27FC236}">
-                <a16:creationId xmlns:a16="http://schemas.microsoft.com/office/drawing/2014/main" xmlns="" id="{7F2D41AF-9AA8-9607-44CE-ED53A78570DE}"/>
+                <a16:creationId xmlns="" xmlns:a16="http://schemas.microsoft.com/office/drawing/2014/main" id="{7F2D41AF-9AA8-9607-44CE-ED53A78570DE}"/>
               </a:ext>
             </a:extLst>
           </p:cNvPr>
@@ -32858,7 +32968,7 @@
           <p:cNvPr id="21" name="TextBox 20">
             <a:extLst>
               <a:ext uri="{FF2B5EF4-FFF2-40B4-BE49-F238E27FC236}">
-                <a16:creationId xmlns:a16="http://schemas.microsoft.com/office/drawing/2014/main" xmlns="" id="{BE290288-5077-0D95-82E6-BAC2D0A4F743}"/>
+                <a16:creationId xmlns="" xmlns:a16="http://schemas.microsoft.com/office/drawing/2014/main" id="{BE290288-5077-0D95-82E6-BAC2D0A4F743}"/>
               </a:ext>
             </a:extLst>
           </p:cNvPr>
@@ -36192,7 +36302,7 @@
           <p:cNvPr id="3" name="淘宝-想搞设计PPT(倒卖必究)-3">
             <a:extLst>
               <a:ext uri="{FF2B5EF4-FFF2-40B4-BE49-F238E27FC236}">
-                <a16:creationId xmlns:a16="http://schemas.microsoft.com/office/drawing/2014/main" xmlns="" id="{90ECB1AC-F476-8EDF-F839-33E155C70E82}"/>
+                <a16:creationId xmlns="" xmlns:a16="http://schemas.microsoft.com/office/drawing/2014/main" id="{90ECB1AC-F476-8EDF-F839-33E155C70E82}"/>
               </a:ext>
             </a:extLst>
           </p:cNvPr>
@@ -36237,7 +36347,7 @@
           <p:cNvPr id="4" name="淘宝-想搞设计PPT(倒卖必究)-3">
             <a:extLst>
               <a:ext uri="{FF2B5EF4-FFF2-40B4-BE49-F238E27FC236}">
-                <a16:creationId xmlns:a16="http://schemas.microsoft.com/office/drawing/2014/main" xmlns="" id="{20779FF0-93DC-089F-FC58-F01448FA6CB4}"/>
+                <a16:creationId xmlns="" xmlns:a16="http://schemas.microsoft.com/office/drawing/2014/main" id="{20779FF0-93DC-089F-FC58-F01448FA6CB4}"/>
               </a:ext>
             </a:extLst>
           </p:cNvPr>
@@ -36247,7 +36357,7 @@
         <p:spPr>
           <a:xfrm>
             <a:off x="179513" y="989158"/>
-            <a:ext cx="8784975" cy="984885"/>
+            <a:ext cx="8784975" cy="1231106"/>
           </a:xfrm>
           <a:prstGeom prst="rect">
             <a:avLst/>
@@ -36302,37 +36412,51 @@
                 <a:latin typeface="微软雅黑" panose="020B0503020204020204" pitchFamily="34" charset="-122"/>
                 <a:ea typeface="微软雅黑" panose="020B0503020204020204" pitchFamily="34" charset="-122"/>
               </a:rPr>
-              <a:t>、智能制造 等战略推进，</a:t>
+              <a:t>、智能制造 等战略推进</a:t>
+            </a:r>
+            <a:r>
+              <a:rPr lang="zh-CN" altLang="en-US" sz="1600" dirty="0">
+                <a:latin typeface="微软雅黑" panose="020B0503020204020204" pitchFamily="34" charset="-122"/>
+                <a:ea typeface="微软雅黑" panose="020B0503020204020204" pitchFamily="34" charset="-122"/>
+              </a:rPr>
+              <a:t>，柔性作业车间（</a:t>
             </a:r>
             <a:r>
               <a:rPr lang="en-US" sz="1600" dirty="0">
                 <a:latin typeface="微软雅黑" panose="020B0503020204020204" pitchFamily="34" charset="-122"/>
                 <a:ea typeface="微软雅黑" panose="020B0503020204020204" pitchFamily="34" charset="-122"/>
               </a:rPr>
-              <a:t>AGV</a:t>
+              <a:t>Flexible Job Shop）</a:t>
             </a:r>
             <a:r>
               <a:rPr lang="zh-CN" altLang="en-US" sz="1600" dirty="0">
                 <a:latin typeface="微软雅黑" panose="020B0503020204020204" pitchFamily="34" charset="-122"/>
                 <a:ea typeface="微软雅黑" panose="020B0503020204020204" pitchFamily="34" charset="-122"/>
               </a:rPr>
-              <a:t>（移动智能体）与</a:t>
-            </a:r>
-            <a:r>
-              <a:rPr lang="en-US" sz="1600" dirty="0">
+              <a:t>中「异构加工资源 </a:t>
+            </a:r>
+            <a:r>
+              <a:rPr lang="en-US" altLang="zh-CN" sz="1600" dirty="0">
                 <a:latin typeface="微软雅黑" panose="020B0503020204020204" pitchFamily="34" charset="-122"/>
                 <a:ea typeface="微软雅黑" panose="020B0503020204020204" pitchFamily="34" charset="-122"/>
               </a:rPr>
-              <a:t> Robot Arm</a:t>
+              <a:t>+ </a:t>
             </a:r>
             <a:r>
               <a:rPr lang="zh-CN" altLang="en-US" sz="1600" dirty="0">
                 <a:latin typeface="微软雅黑" panose="020B0503020204020204" pitchFamily="34" charset="-122"/>
                 <a:ea typeface="微软雅黑" panose="020B0503020204020204" pitchFamily="34" charset="-122"/>
               </a:rPr>
-              <a:t>（固定智能体）大规模部署</a:t>
-            </a:r>
-            <a:endParaRPr lang="en-US" sz="1600" dirty="0">
+              <a:t>自主搬运」已成为智能制造的典型</a:t>
+            </a:r>
+            <a:r>
+              <a:rPr lang="zh-CN" altLang="en-US" sz="1600" dirty="0" smtClean="0">
+                <a:latin typeface="微软雅黑" panose="020B0503020204020204" pitchFamily="34" charset="-122"/>
+                <a:ea typeface="微软雅黑" panose="020B0503020204020204" pitchFamily="34" charset="-122"/>
+              </a:rPr>
+              <a:t>形态</a:t>
+            </a:r>
+            <a:endParaRPr lang="en-US" altLang="zh-CN" sz="1600" dirty="0" smtClean="0">
               <a:latin typeface="微软雅黑" panose="020B0503020204020204" pitchFamily="34" charset="-122"/>
               <a:ea typeface="微软雅黑" panose="020B0503020204020204" pitchFamily="34" charset="-122"/>
             </a:endParaRPr>
@@ -36349,11 +36473,39 @@
               <a:buChar char="•"/>
             </a:pPr>
             <a:r>
+              <a:rPr lang="zh-CN" altLang="en-US" sz="1600" dirty="0" smtClean="0">
+                <a:latin typeface="微软雅黑" panose="020B0503020204020204" pitchFamily="34" charset="-122"/>
+                <a:ea typeface="微软雅黑" panose="020B0503020204020204" pitchFamily="34" charset="-122"/>
+              </a:rPr>
+              <a:t>机械臂与</a:t>
+            </a:r>
+            <a:r>
+              <a:rPr lang="en-US" altLang="zh-CN" sz="1600" dirty="0" smtClean="0">
+                <a:latin typeface="微软雅黑" panose="020B0503020204020204" pitchFamily="34" charset="-122"/>
+                <a:ea typeface="微软雅黑" panose="020B0503020204020204" pitchFamily="34" charset="-122"/>
+              </a:rPr>
+              <a:t>AGV</a:t>
+            </a:r>
+            <a:r>
+              <a:rPr lang="zh-CN" altLang="en-US" sz="1600" dirty="0" smtClean="0">
+                <a:latin typeface="微软雅黑" panose="020B0503020204020204" pitchFamily="34" charset="-122"/>
+                <a:ea typeface="微软雅黑" panose="020B0503020204020204" pitchFamily="34" charset="-122"/>
+              </a:rPr>
+              <a:t>二者</a:t>
+            </a:r>
+            <a:r>
               <a:rPr lang="zh-CN" altLang="en-US" sz="1600" dirty="0">
                 <a:latin typeface="微软雅黑" panose="020B0503020204020204" pitchFamily="34" charset="-122"/>
                 <a:ea typeface="微软雅黑" panose="020B0503020204020204" pitchFamily="34" charset="-122"/>
               </a:rPr>
-              <a:t>二者分工协作：移动智能体负责物料动态搬运，固定智能体负责固定工位精密操作</a:t>
+              <a:t>分工协作</a:t>
+            </a:r>
+            <a:r>
+              <a:rPr lang="zh-CN" altLang="en-US" sz="1600" dirty="0">
+                <a:latin typeface="微软雅黑" panose="020B0503020204020204" pitchFamily="34" charset="-122"/>
+                <a:ea typeface="微软雅黑" panose="020B0503020204020204" pitchFamily="34" charset="-122"/>
+              </a:rPr>
+              <a:t>：并非彼此独立的两个优化问题，而是通过到达时刻、开工窗口与路径占用紧密耦合，共同决定系统完工时间等全局指标</a:t>
             </a:r>
             <a:endParaRPr lang="en-US" sz="1600" dirty="0">
               <a:latin typeface="微软雅黑" panose="020B0503020204020204" pitchFamily="34" charset="-122"/>
@@ -36367,7 +36519,7 @@
           <p:cNvPr id="9" name="淘宝-想搞设计PPT(倒卖必究)-3">
             <a:extLst>
               <a:ext uri="{FF2B5EF4-FFF2-40B4-BE49-F238E27FC236}">
-                <a16:creationId xmlns:a16="http://schemas.microsoft.com/office/drawing/2014/main" xmlns="" id="{9B1B81C8-7C21-5760-32A9-1359543A6B44}"/>
+                <a16:creationId xmlns="" xmlns:a16="http://schemas.microsoft.com/office/drawing/2014/main" id="{9B1B81C8-7C21-5760-32A9-1359543A6B44}"/>
               </a:ext>
             </a:extLst>
           </p:cNvPr>
@@ -36376,7 +36528,7 @@
         </p:nvSpPr>
         <p:spPr>
           <a:xfrm>
-            <a:off x="179512" y="2096830"/>
+            <a:off x="179512" y="2247060"/>
             <a:ext cx="5380719" cy="369332"/>
           </a:xfrm>
           <a:prstGeom prst="rect">
@@ -36396,7 +36548,34 @@
                 <a:ea typeface="微软雅黑" panose="020B0503020204020204" pitchFamily="34" charset="-122"/>
                 <a:cs typeface="Times New Roman" panose="02020603050405020304" pitchFamily="18" charset="0"/>
               </a:rPr>
-              <a:t>系统架构（混合式）</a:t>
+              <a:t>系统架构</a:t>
+            </a:r>
+            <a:r>
+              <a:rPr lang="zh-CN" altLang="en-US" b="1" dirty="0" smtClean="0">
+                <a:ln w="0"/>
+                <a:latin typeface="微软雅黑" panose="020B0503020204020204" pitchFamily="34" charset="-122"/>
+                <a:ea typeface="微软雅黑" panose="020B0503020204020204" pitchFamily="34" charset="-122"/>
+                <a:cs typeface="Times New Roman" panose="02020603050405020304" pitchFamily="18" charset="0"/>
+              </a:rPr>
+              <a:t>（</a:t>
+            </a:r>
+            <a:r>
+              <a:rPr lang="zh-CN" altLang="en-US" b="1" dirty="0" smtClean="0">
+                <a:ln w="0"/>
+                <a:latin typeface="微软雅黑" panose="020B0503020204020204" pitchFamily="34" charset="-122"/>
+                <a:ea typeface="微软雅黑" panose="020B0503020204020204" pitchFamily="34" charset="-122"/>
+                <a:cs typeface="Times New Roman" panose="02020603050405020304" pitchFamily="18" charset="0"/>
+              </a:rPr>
+              <a:t>双层</a:t>
+            </a:r>
+            <a:r>
+              <a:rPr lang="zh-CN" altLang="en-US" b="1" dirty="0" smtClean="0">
+                <a:ln w="0"/>
+                <a:latin typeface="微软雅黑" panose="020B0503020204020204" pitchFamily="34" charset="-122"/>
+                <a:ea typeface="微软雅黑" panose="020B0503020204020204" pitchFamily="34" charset="-122"/>
+                <a:cs typeface="Times New Roman" panose="02020603050405020304" pitchFamily="18" charset="0"/>
+              </a:rPr>
+              <a:t>）</a:t>
             </a:r>
             <a:endParaRPr lang="en-US" altLang="zh-CN" b="1" dirty="0">
               <a:ln w="0"/>
@@ -36412,7 +36591,7 @@
           <p:cNvPr id="10" name="Table 9">
             <a:extLst>
               <a:ext uri="{FF2B5EF4-FFF2-40B4-BE49-F238E27FC236}">
-                <a16:creationId xmlns:a16="http://schemas.microsoft.com/office/drawing/2014/main" xmlns="" id="{BC8D8633-87CE-F2CC-A1F2-D46F5429BCE8}"/>
+                <a16:creationId xmlns="" xmlns:a16="http://schemas.microsoft.com/office/drawing/2014/main" id="{BC8D8633-87CE-F2CC-A1F2-D46F5429BCE8}"/>
               </a:ext>
             </a:extLst>
           </p:cNvPr>
@@ -36422,14 +36601,14 @@
           <p:nvPr>
             <p:extLst>
               <p:ext uri="{D42A27DB-BD31-4B8C-83A1-F6EECF244321}">
-                <p14:modId xmlns:p14="http://schemas.microsoft.com/office/powerpoint/2010/main" val="3419160567"/>
+                <p14:modId xmlns:p14="http://schemas.microsoft.com/office/powerpoint/2010/main" val="4008938171"/>
               </p:ext>
             </p:extLst>
           </p:nvPr>
         </p:nvGraphicFramePr>
         <p:xfrm>
-          <a:off x="179511" y="2588949"/>
-          <a:ext cx="4608513" cy="1692402"/>
+          <a:off x="179511" y="2584054"/>
+          <a:ext cx="4608513" cy="2213864"/>
         </p:xfrm>
         <a:graphic>
           <a:graphicData uri="http://schemas.openxmlformats.org/drawingml/2006/table">
@@ -36441,14 +36620,14 @@
                 <a:gridCol w="1737636">
                   <a:extLst>
                     <a:ext uri="{9D8B030D-6E8A-4147-A177-3AD203B41FA5}">
-                      <a16:colId xmlns:a16="http://schemas.microsoft.com/office/drawing/2014/main" xmlns="" val="1142861759"/>
+                      <a16:colId xmlns="" xmlns:a16="http://schemas.microsoft.com/office/drawing/2014/main" val="1142861759"/>
                     </a:ext>
                   </a:extLst>
                 </a:gridCol>
                 <a:gridCol w="2870877">
                   <a:extLst>
                     <a:ext uri="{9D8B030D-6E8A-4147-A177-3AD203B41FA5}">
-                      <a16:colId xmlns:a16="http://schemas.microsoft.com/office/drawing/2014/main" xmlns="" val="473110948"/>
+                      <a16:colId xmlns="" xmlns:a16="http://schemas.microsoft.com/office/drawing/2014/main" val="473110948"/>
                     </a:ext>
                   </a:extLst>
                 </a:gridCol>
@@ -36530,7 +36709,7 @@
                 </a:tc>
                 <a:extLst>
                   <a:ext uri="{0D108BD9-81ED-4DB2-BD59-A6C34878D82A}">
-                    <a16:rowId xmlns:a16="http://schemas.microsoft.com/office/drawing/2014/main" xmlns="" val="4263651850"/>
+                    <a16:rowId xmlns="" xmlns:a16="http://schemas.microsoft.com/office/drawing/2014/main" val="4263651850"/>
                   </a:ext>
                 </a:extLst>
               </a:tr>
@@ -36550,7 +36729,7 @@
                         <a:buNone/>
                       </a:pPr>
                       <a:r>
-                        <a:rPr lang="zh-CN" altLang="en-US" sz="1600" kern="1200" dirty="0">
+                        <a:rPr lang="zh-CN" altLang="en-US" sz="1400" kern="1200" dirty="0">
                           <a:solidFill>
                             <a:schemeClr val="tx1"/>
                           </a:solidFill>
@@ -36560,7 +36739,7 @@
                         </a:rPr>
                         <a:t>集中式任务分配层</a:t>
                       </a:r>
-                      <a:endParaRPr lang="en-US" sz="1600" kern="1200" dirty="0">
+                      <a:endParaRPr lang="en-US" sz="1400" kern="1200" dirty="0">
                         <a:solidFill>
                           <a:schemeClr val="tx1"/>
                         </a:solidFill>
@@ -36587,7 +36766,7 @@
                         <a:buNone/>
                       </a:pPr>
                       <a:r>
-                        <a:rPr lang="zh-CN" altLang="en-US" sz="1600" kern="1200" dirty="0">
+                        <a:rPr lang="zh-CN" altLang="en-US" sz="1400" kern="1200" dirty="0">
                           <a:solidFill>
                             <a:schemeClr val="tx1"/>
                           </a:solidFill>
@@ -36597,7 +36776,7 @@
                         </a:rPr>
                         <a:t>全局最优任务规划、指令下发</a:t>
                       </a:r>
-                      <a:endParaRPr lang="en-US" sz="1600" kern="1200" dirty="0">
+                      <a:endParaRPr lang="en-US" sz="1400" kern="1200" dirty="0">
                         <a:solidFill>
                           <a:schemeClr val="tx1"/>
                         </a:solidFill>
@@ -36611,7 +36790,7 @@
                 </a:tc>
                 <a:extLst>
                   <a:ext uri="{0D108BD9-81ED-4DB2-BD59-A6C34878D82A}">
-                    <a16:rowId xmlns:a16="http://schemas.microsoft.com/office/drawing/2014/main" xmlns="" val="3090417641"/>
+                    <a16:rowId xmlns="" xmlns:a16="http://schemas.microsoft.com/office/drawing/2014/main" val="3090417641"/>
                   </a:ext>
                 </a:extLst>
               </a:tr>
@@ -36631,7 +36810,7 @@
                         <a:buNone/>
                       </a:pPr>
                       <a:r>
-                        <a:rPr lang="zh-CN" altLang="en-US" sz="1600" kern="1200" dirty="0">
+                        <a:rPr lang="zh-CN" altLang="en-US" sz="1400" kern="1200" dirty="0" smtClean="0">
                           <a:solidFill>
                             <a:schemeClr val="tx1"/>
                           </a:solidFill>
@@ -36639,9 +36818,9 @@
                           <a:ea typeface="微软雅黑" panose="020B0503020204020204" pitchFamily="34" charset="-122"/>
                           <a:cs typeface="+mn-cs"/>
                         </a:rPr>
-                        <a:t>分布式自主执行层</a:t>
+                        <a:t>现场执行与无冲突通行层</a:t>
                       </a:r>
-                      <a:endParaRPr lang="en-US" sz="1600" kern="1200" dirty="0">
+                      <a:endParaRPr lang="en-US" sz="1400" kern="1200" dirty="0">
                         <a:solidFill>
                           <a:schemeClr val="tx1"/>
                         </a:solidFill>
@@ -36668,7 +36847,7 @@
                         <a:buNone/>
                       </a:pPr>
                       <a:r>
-                        <a:rPr lang="zh-CN" altLang="en-US" sz="1600" kern="1200" dirty="0">
+                        <a:rPr lang="zh-CN" altLang="en-US" sz="1400" kern="1200" dirty="0" smtClean="0">
                           <a:solidFill>
                             <a:schemeClr val="tx1"/>
                           </a:solidFill>
@@ -36676,9 +36855,31 @@
                           <a:ea typeface="微软雅黑" panose="020B0503020204020204" pitchFamily="34" charset="-122"/>
                           <a:cs typeface="+mn-cs"/>
                         </a:rPr>
-                        <a:t>智能体自主路径规划与动作执行</a:t>
+                        <a:t>现场执行层由异构机械臂与 </a:t>
                       </a:r>
-                      <a:endParaRPr lang="en-US" sz="1600" kern="1200" dirty="0">
+                      <a:r>
+                        <a:rPr lang="en-US" altLang="zh-CN" sz="1400" kern="1200" dirty="0" smtClean="0">
+                          <a:solidFill>
+                            <a:schemeClr val="tx1"/>
+                          </a:solidFill>
+                          <a:latin typeface="微软雅黑" panose="020B0503020204020204" pitchFamily="34" charset="-122"/>
+                          <a:ea typeface="微软雅黑" panose="020B0503020204020204" pitchFamily="34" charset="-122"/>
+                          <a:cs typeface="+mn-cs"/>
+                        </a:rPr>
+                        <a:t>AGV </a:t>
+                      </a:r>
+                      <a:r>
+                        <a:rPr lang="zh-CN" altLang="en-US" sz="1400" kern="1200" dirty="0" smtClean="0">
+                          <a:solidFill>
+                            <a:schemeClr val="tx1"/>
+                          </a:solidFill>
+                          <a:latin typeface="微软雅黑" panose="020B0503020204020204" pitchFamily="34" charset="-122"/>
+                          <a:ea typeface="微软雅黑" panose="020B0503020204020204" pitchFamily="34" charset="-122"/>
+                          <a:cs typeface="+mn-cs"/>
+                        </a:rPr>
+                        <a:t>等资源构成，是调度方案的具体落实单元。</a:t>
+                      </a:r>
+                      <a:endParaRPr lang="en-US" sz="1400" kern="1200" dirty="0">
                         <a:solidFill>
                           <a:schemeClr val="tx1"/>
                         </a:solidFill>
@@ -36692,7 +36893,7 @@
                 </a:tc>
                 <a:extLst>
                   <a:ext uri="{0D108BD9-81ED-4DB2-BD59-A6C34878D82A}">
-                    <a16:rowId xmlns:a16="http://schemas.microsoft.com/office/drawing/2014/main" xmlns="" val="1756568696"/>
+                    <a16:rowId xmlns="" xmlns:a16="http://schemas.microsoft.com/office/drawing/2014/main" val="1756568696"/>
                   </a:ext>
                 </a:extLst>
               </a:tr>
@@ -36712,7 +36913,7 @@
                         <a:buNone/>
                       </a:pPr>
                       <a:r>
-                        <a:rPr lang="zh-CN" altLang="en-US" sz="1600" kern="1200" dirty="0">
+                        <a:rPr lang="zh-CN" altLang="en-US" sz="1400" kern="1200" dirty="0" smtClean="0">
                           <a:solidFill>
                             <a:schemeClr val="tx1"/>
                           </a:solidFill>
@@ -36720,9 +36921,9 @@
                           <a:ea typeface="微软雅黑" panose="020B0503020204020204" pitchFamily="34" charset="-122"/>
                           <a:cs typeface="+mn-cs"/>
                         </a:rPr>
-                        <a:t>双向强耦合交互</a:t>
+                        <a:t>规划与执行之间的双向强耦合</a:t>
                       </a:r>
-                      <a:endParaRPr lang="en-US" sz="1600" kern="1200" dirty="0">
+                      <a:endParaRPr lang="en-US" sz="1400" kern="1200" dirty="0">
                         <a:solidFill>
                           <a:schemeClr val="tx1"/>
                         </a:solidFill>
@@ -36749,7 +36950,7 @@
                         <a:buNone/>
                       </a:pPr>
                       <a:r>
-                        <a:rPr lang="zh-CN" altLang="en-US" sz="1600" kern="1200" dirty="0">
+                        <a:rPr lang="zh-CN" altLang="en-US" sz="1400" kern="1200" dirty="0" smtClean="0">
                           <a:solidFill>
                             <a:schemeClr val="tx1"/>
                           </a:solidFill>
@@ -36757,9 +36958,9 @@
                           <a:ea typeface="微软雅黑" panose="020B0503020204020204" pitchFamily="34" charset="-122"/>
                           <a:cs typeface="+mn-cs"/>
                         </a:rPr>
-                        <a:t>任务分配决策依赖于智能体状态；智能体状态也约束下一轮决策</a:t>
+                        <a:t>规划层依据全局优化目标持续下发指派与时序；各执行单元自身状态等些信息直接约束规划层的下一轮决策。</a:t>
                       </a:r>
-                      <a:endParaRPr lang="en-US" sz="1600" kern="1200" dirty="0">
+                      <a:endParaRPr lang="en-US" sz="1400" kern="1200" dirty="0">
                         <a:solidFill>
                           <a:schemeClr val="tx1"/>
                         </a:solidFill>
@@ -36773,7 +36974,7 @@
                 </a:tc>
                 <a:extLst>
                   <a:ext uri="{0D108BD9-81ED-4DB2-BD59-A6C34878D82A}">
-                    <a16:rowId xmlns:a16="http://schemas.microsoft.com/office/drawing/2014/main" xmlns="" val="2886293465"/>
+                    <a16:rowId xmlns="" xmlns:a16="http://schemas.microsoft.com/office/drawing/2014/main" val="2886293465"/>
                   </a:ext>
                 </a:extLst>
               </a:tr>
@@ -36786,7 +36987,7 @@
           <p:cNvPr id="11" name="Picture 10">
             <a:extLst>
               <a:ext uri="{FF2B5EF4-FFF2-40B4-BE49-F238E27FC236}">
-                <a16:creationId xmlns:a16="http://schemas.microsoft.com/office/drawing/2014/main" xmlns="" id="{54850EF1-9048-6213-D39F-871439A8FDB7}"/>
+                <a16:creationId xmlns="" xmlns:a16="http://schemas.microsoft.com/office/drawing/2014/main" id="{54850EF1-9048-6213-D39F-871439A8FDB7}"/>
               </a:ext>
             </a:extLst>
           </p:cNvPr>
@@ -36809,7 +37010,7 @@
         </p:blipFill>
         <p:spPr>
           <a:xfrm>
-            <a:off x="4788024" y="2217741"/>
+            <a:off x="4860032" y="2217741"/>
             <a:ext cx="4293259" cy="2413100"/>
           </a:xfrm>
           <a:prstGeom prst="rect">
@@ -37172,7 +37373,7 @@
           <p:cNvPr id="3" name="淘宝-想搞设计PPT(倒卖必究)-3">
             <a:extLst>
               <a:ext uri="{FF2B5EF4-FFF2-40B4-BE49-F238E27FC236}">
-                <a16:creationId xmlns:a16="http://schemas.microsoft.com/office/drawing/2014/main" xmlns="" id="{7D1CD056-93FF-51CB-8E05-FB8BF32FB3AD}"/>
+                <a16:creationId xmlns="" xmlns:a16="http://schemas.microsoft.com/office/drawing/2014/main" id="{7D1CD056-93FF-51CB-8E05-FB8BF32FB3AD}"/>
               </a:ext>
             </a:extLst>
           </p:cNvPr>
@@ -37235,7 +37436,7 @@
           <p:cNvPr id="12" name="淘宝-想搞设计PPT(倒卖必究)-3">
             <a:extLst>
               <a:ext uri="{FF2B5EF4-FFF2-40B4-BE49-F238E27FC236}">
-                <a16:creationId xmlns:a16="http://schemas.microsoft.com/office/drawing/2014/main" xmlns="" id="{90BB3829-D5F4-1122-6E91-DD9AB86E3E3A}"/>
+                <a16:creationId xmlns="" xmlns:a16="http://schemas.microsoft.com/office/drawing/2014/main" id="{90BB3829-D5F4-1122-6E91-DD9AB86E3E3A}"/>
               </a:ext>
             </a:extLst>
           </p:cNvPr>
@@ -37351,7 +37552,7 @@
           <p:cNvPr id="13" name="淘宝-想搞设计PPT(倒卖必究)-3">
             <a:extLst>
               <a:ext uri="{FF2B5EF4-FFF2-40B4-BE49-F238E27FC236}">
-                <a16:creationId xmlns:a16="http://schemas.microsoft.com/office/drawing/2014/main" xmlns="" id="{B2D0C359-00F3-DA56-8405-84481FC580EC}"/>
+                <a16:creationId xmlns="" xmlns:a16="http://schemas.microsoft.com/office/drawing/2014/main" id="{B2D0C359-00F3-DA56-8405-84481FC580EC}"/>
               </a:ext>
             </a:extLst>
           </p:cNvPr>
@@ -37396,7 +37597,7 @@
           <p:cNvPr id="15" name="淘宝-想搞设计PPT(倒卖必究)-3">
             <a:extLst>
               <a:ext uri="{FF2B5EF4-FFF2-40B4-BE49-F238E27FC236}">
-                <a16:creationId xmlns:a16="http://schemas.microsoft.com/office/drawing/2014/main" xmlns="" id="{46777E22-7D61-EB33-5B7B-3791FE5F4180}"/>
+                <a16:creationId xmlns="" xmlns:a16="http://schemas.microsoft.com/office/drawing/2014/main" id="{46777E22-7D61-EB33-5B7B-3791FE5F4180}"/>
               </a:ext>
             </a:extLst>
           </p:cNvPr>
@@ -37468,7 +37669,7 @@
           <p:cNvPr id="17" name="淘宝-想搞设计PPT(倒卖必究)-3">
             <a:extLst>
               <a:ext uri="{FF2B5EF4-FFF2-40B4-BE49-F238E27FC236}">
-                <a16:creationId xmlns:a16="http://schemas.microsoft.com/office/drawing/2014/main" xmlns="" id="{5883D2BE-3027-3EC4-E701-BDFEA86B7C1B}"/>
+                <a16:creationId xmlns="" xmlns:a16="http://schemas.microsoft.com/office/drawing/2014/main" id="{5883D2BE-3027-3EC4-E701-BDFEA86B7C1B}"/>
               </a:ext>
             </a:extLst>
           </p:cNvPr>
@@ -37513,7 +37714,7 @@
           <p:cNvPr id="18" name="淘宝-想搞设计PPT(倒卖必究)-3">
             <a:extLst>
               <a:ext uri="{FF2B5EF4-FFF2-40B4-BE49-F238E27FC236}">
-                <a16:creationId xmlns:a16="http://schemas.microsoft.com/office/drawing/2014/main" xmlns="" id="{27462B26-93BF-CC67-E89E-019A77F80C25}"/>
+                <a16:creationId xmlns="" xmlns:a16="http://schemas.microsoft.com/office/drawing/2014/main" id="{27462B26-93BF-CC67-E89E-019A77F80C25}"/>
               </a:ext>
             </a:extLst>
           </p:cNvPr>
@@ -37654,7 +37855,7 @@
           <p:cNvPr id="19" name="Arrow: Right 18">
             <a:extLst>
               <a:ext uri="{FF2B5EF4-FFF2-40B4-BE49-F238E27FC236}">
-                <a16:creationId xmlns:a16="http://schemas.microsoft.com/office/drawing/2014/main" xmlns="" id="{40163572-9C23-997C-294C-C07E0BB6756B}"/>
+                <a16:creationId xmlns="" xmlns:a16="http://schemas.microsoft.com/office/drawing/2014/main" id="{40163572-9C23-997C-294C-C07E0BB6756B}"/>
               </a:ext>
             </a:extLst>
           </p:cNvPr>
@@ -37706,7 +37907,7 @@
           <p:cNvPr id="20" name="淘宝-想搞设计PPT(倒卖必究)-3">
             <a:extLst>
               <a:ext uri="{FF2B5EF4-FFF2-40B4-BE49-F238E27FC236}">
-                <a16:creationId xmlns:a16="http://schemas.microsoft.com/office/drawing/2014/main" xmlns="" id="{19456DA4-6F78-5D13-C689-E4B6C1F2CF06}"/>
+                <a16:creationId xmlns="" xmlns:a16="http://schemas.microsoft.com/office/drawing/2014/main" id="{19456DA4-6F78-5D13-C689-E4B6C1F2CF06}"/>
               </a:ext>
             </a:extLst>
           </p:cNvPr>
@@ -37763,7 +37964,7 @@
           <p:cNvPr id="21" name="Arrow: Right 20">
             <a:extLst>
               <a:ext uri="{FF2B5EF4-FFF2-40B4-BE49-F238E27FC236}">
-                <a16:creationId xmlns:a16="http://schemas.microsoft.com/office/drawing/2014/main" xmlns="" id="{631BF064-C578-5B5D-6888-07343E124AC3}"/>
+                <a16:creationId xmlns="" xmlns:a16="http://schemas.microsoft.com/office/drawing/2014/main" id="{631BF064-C578-5B5D-6888-07343E124AC3}"/>
               </a:ext>
             </a:extLst>
           </p:cNvPr>
@@ -37815,7 +38016,7 @@
           <p:cNvPr id="22" name="淘宝-想搞设计PPT(倒卖必究)-3">
             <a:extLst>
               <a:ext uri="{FF2B5EF4-FFF2-40B4-BE49-F238E27FC236}">
-                <a16:creationId xmlns:a16="http://schemas.microsoft.com/office/drawing/2014/main" xmlns="" id="{08549643-C0C5-3826-2697-384C0C5690FB}"/>
+                <a16:creationId xmlns="" xmlns:a16="http://schemas.microsoft.com/office/drawing/2014/main" id="{08549643-C0C5-3826-2697-384C0C5690FB}"/>
               </a:ext>
             </a:extLst>
           </p:cNvPr>
@@ -37865,47 +38066,87 @@
                   </a:schemeClr>
                 </a:solidFill>
               </a:rPr>
-              <a:t>注入报文，</a:t>
-            </a:r>
-            <a:r>
-              <a:rPr lang="en-US" sz="1600" spc="100" dirty="0">
+              <a:t>注入报文</a:t>
+            </a:r>
+            <a:r>
+              <a:rPr lang="zh-CN" altLang="en-US" sz="1600" spc="100" dirty="0" smtClean="0">
                 <a:solidFill>
                   <a:schemeClr val="bg1">
                     <a:lumMod val="50000"/>
                   </a:schemeClr>
                 </a:solidFill>
               </a:rPr>
-              <a:t>"</a:t>
-            </a:r>
-            <a:r>
-              <a:rPr lang="zh-CN" altLang="en-US" sz="1600" spc="100" dirty="0">
+              <a:t>，</a:t>
+            </a:r>
+            <a:r>
+              <a:rPr lang="en-US" sz="1600" spc="100" dirty="0" smtClean="0">
                 <a:solidFill>
                   <a:schemeClr val="bg1">
                     <a:lumMod val="50000"/>
                   </a:schemeClr>
                 </a:solidFill>
               </a:rPr>
-              <a:t>伪造</a:t>
-            </a:r>
-            <a:r>
-              <a:rPr lang="en-US" sz="1600" spc="100" dirty="0">
+              <a:t>“</a:t>
+            </a:r>
+            <a:r>
+              <a:rPr lang="zh-CN" altLang="en-US" sz="1600" spc="100" dirty="0" smtClean="0">
                 <a:solidFill>
                   <a:schemeClr val="bg1">
                     <a:lumMod val="50000"/>
                   </a:schemeClr>
                 </a:solidFill>
               </a:rPr>
-              <a:t>"</a:t>
-            </a:r>
-            <a:r>
-              <a:rPr lang="zh-CN" altLang="en-US" sz="1600" spc="100" dirty="0">
+              <a:t>伪造</a:t>
+            </a:r>
+            <a:r>
+              <a:rPr lang="en-US" sz="1600" spc="100" dirty="0" smtClean="0">
                 <a:solidFill>
                   <a:schemeClr val="bg1">
                     <a:lumMod val="50000"/>
                   </a:schemeClr>
                 </a:solidFill>
               </a:rPr>
-              <a:t>出一个或多个虚假智能体的身份与状态</a:t>
+              <a:t>”</a:t>
+            </a:r>
+            <a:r>
+              <a:rPr lang="zh-CN" altLang="en-US" sz="1600" spc="100" dirty="0" smtClean="0">
+                <a:solidFill>
+                  <a:schemeClr val="bg1">
+                    <a:lumMod val="50000"/>
+                  </a:schemeClr>
+                </a:solidFill>
+              </a:rPr>
+              <a:t>出</a:t>
+            </a:r>
+            <a:r>
+              <a:rPr lang="zh-CN" altLang="en-US" sz="1600" spc="100" dirty="0">
+                <a:solidFill>
+                  <a:schemeClr val="bg1">
+                    <a:lumMod val="50000"/>
+                  </a:schemeClr>
+                </a:solidFill>
+              </a:rPr>
+              <a:t>一个或多个</a:t>
+            </a:r>
+            <a:r>
+              <a:rPr lang="zh-CN" altLang="en-US" sz="1600" spc="100" dirty="0" smtClean="0">
+                <a:solidFill>
+                  <a:schemeClr val="bg1">
+                    <a:lumMod val="50000"/>
+                  </a:schemeClr>
+                </a:solidFill>
+              </a:rPr>
+              <a:t>虚假设备的</a:t>
+            </a:r>
+            <a:r>
+              <a:rPr lang="zh-CN" altLang="en-US" sz="1600" spc="100" dirty="0">
+                <a:solidFill>
+                  <a:schemeClr val="bg1">
+                    <a:lumMod val="50000"/>
+                  </a:schemeClr>
+                </a:solidFill>
+              </a:rPr>
+              <a:t>身份与状态</a:t>
             </a:r>
             <a:endParaRPr lang="en-US" altLang="zh-CN" sz="1600" spc="100" dirty="0">
               <a:solidFill>
@@ -37922,7 +38163,7 @@
           <p:cNvPr id="24" name="淘宝-想搞设计PPT(倒卖必究)-3">
             <a:extLst>
               <a:ext uri="{FF2B5EF4-FFF2-40B4-BE49-F238E27FC236}">
-                <a16:creationId xmlns:a16="http://schemas.microsoft.com/office/drawing/2014/main" xmlns="" id="{4BF9E72F-8193-EF1F-E828-F441CD1A0109}"/>
+                <a16:creationId xmlns="" xmlns:a16="http://schemas.microsoft.com/office/drawing/2014/main" id="{4BF9E72F-8193-EF1F-E828-F441CD1A0109}"/>
               </a:ext>
             </a:extLst>
           </p:cNvPr>
@@ -37952,17 +38193,77 @@
                   </a:schemeClr>
                 </a:solidFill>
               </a:rPr>
-              <a:t>存在（劫持了）物理实体，位置等智能体</a:t>
-            </a:r>
-            <a:r>
-              <a:rPr lang="zh-CN" altLang="en-US" sz="1600" dirty="0">
+              <a:t>存在（劫持了）物理实体，位置</a:t>
+            </a:r>
+            <a:r>
+              <a:rPr lang="zh-CN" altLang="en-US" sz="1600" spc="100" dirty="0">
                 <a:solidFill>
                   <a:schemeClr val="bg1">
                     <a:lumMod val="50000"/>
                   </a:schemeClr>
                 </a:solidFill>
               </a:rPr>
-              <a:t>状态数据往往具有真实性，但是智能体的可用信息、任务状态等信息可能进行了“造假”</a:t>
+              <a:t>等设备</a:t>
+            </a:r>
+            <a:r>
+              <a:rPr lang="zh-CN" altLang="en-US" sz="1600" dirty="0" smtClean="0">
+                <a:solidFill>
+                  <a:schemeClr val="bg1">
+                    <a:lumMod val="50000"/>
+                  </a:schemeClr>
+                </a:solidFill>
+              </a:rPr>
+              <a:t>状态</a:t>
+            </a:r>
+            <a:r>
+              <a:rPr lang="zh-CN" altLang="en-US" sz="1600" dirty="0">
+                <a:solidFill>
+                  <a:schemeClr val="bg1">
+                    <a:lumMod val="50000"/>
+                  </a:schemeClr>
+                </a:solidFill>
+              </a:rPr>
+              <a:t>数据往往具有真实性，</a:t>
+            </a:r>
+            <a:r>
+              <a:rPr lang="zh-CN" altLang="en-US" sz="1600" dirty="0" smtClean="0">
+                <a:solidFill>
+                  <a:schemeClr val="bg1">
+                    <a:lumMod val="50000"/>
+                  </a:schemeClr>
+                </a:solidFill>
+              </a:rPr>
+              <a:t>但是</a:t>
+            </a:r>
+            <a:r>
+              <a:rPr lang="zh-CN" altLang="en-US" sz="1600" spc="100" dirty="0">
+                <a:solidFill>
+                  <a:schemeClr val="bg1">
+                    <a:lumMod val="50000"/>
+                  </a:schemeClr>
+                </a:solidFill>
+              </a:rPr>
+              <a:t>设备</a:t>
+            </a:r>
+            <a:r>
+              <a:rPr lang="zh-CN" altLang="en-US" sz="1600" dirty="0" smtClean="0">
+                <a:solidFill>
+                  <a:schemeClr val="bg1">
+                    <a:lumMod val="50000"/>
+                  </a:schemeClr>
+                </a:solidFill>
+              </a:rPr>
+              <a:t>的</a:t>
+            </a:r>
+            <a:r>
+              <a:rPr lang="zh-CN" altLang="en-US" sz="1600" dirty="0">
+                <a:solidFill>
+                  <a:schemeClr val="bg1">
+                    <a:lumMod val="50000"/>
+                  </a:schemeClr>
+                </a:solidFill>
+              </a:rPr>
+              <a:t>可用信息、任务状态等信息可能进行了“造假”</a:t>
             </a:r>
             <a:endParaRPr lang="en-US" altLang="zh-CN" sz="1600" spc="100" dirty="0">
               <a:solidFill>
@@ -37979,7 +38280,7 @@
           <p:cNvPr id="27" name="Arrow: Right 26">
             <a:extLst>
               <a:ext uri="{FF2B5EF4-FFF2-40B4-BE49-F238E27FC236}">
-                <a16:creationId xmlns:a16="http://schemas.microsoft.com/office/drawing/2014/main" xmlns="" id="{F36F1E49-4C34-A3C9-0896-7C7F4D569C5A}"/>
+                <a16:creationId xmlns="" xmlns:a16="http://schemas.microsoft.com/office/drawing/2014/main" id="{F36F1E49-4C34-A3C9-0896-7C7F4D569C5A}"/>
               </a:ext>
             </a:extLst>
           </p:cNvPr>
@@ -38369,7 +38670,7 @@
           <p:cNvPr id="21" name="淘宝-想搞设计PPT(倒卖必究)-3">
             <a:extLst>
               <a:ext uri="{FF2B5EF4-FFF2-40B4-BE49-F238E27FC236}">
-                <a16:creationId xmlns:a16="http://schemas.microsoft.com/office/drawing/2014/main" xmlns="" id="{202259F8-7A74-60B6-88F1-AD3990BCA53F}"/>
+                <a16:creationId xmlns="" xmlns:a16="http://schemas.microsoft.com/office/drawing/2014/main" id="{202259F8-7A74-60B6-88F1-AD3990BCA53F}"/>
               </a:ext>
             </a:extLst>
           </p:cNvPr>
@@ -38414,7 +38715,7 @@
           <p:cNvPr id="22" name="Table 21">
             <a:extLst>
               <a:ext uri="{FF2B5EF4-FFF2-40B4-BE49-F238E27FC236}">
-                <a16:creationId xmlns:a16="http://schemas.microsoft.com/office/drawing/2014/main" xmlns="" id="{1108729A-F6B7-DA36-904F-65B9D30EDC91}"/>
+                <a16:creationId xmlns="" xmlns:a16="http://schemas.microsoft.com/office/drawing/2014/main" id="{1108729A-F6B7-DA36-904F-65B9D30EDC91}"/>
               </a:ext>
             </a:extLst>
           </p:cNvPr>
@@ -38443,14 +38744,14 @@
                 <a:gridCol w="2160240">
                   <a:extLst>
                     <a:ext uri="{9D8B030D-6E8A-4147-A177-3AD203B41FA5}">
-                      <a16:colId xmlns:a16="http://schemas.microsoft.com/office/drawing/2014/main" xmlns="" val="1142861759"/>
+                      <a16:colId xmlns="" xmlns:a16="http://schemas.microsoft.com/office/drawing/2014/main" val="1142861759"/>
                     </a:ext>
                   </a:extLst>
                 </a:gridCol>
                 <a:gridCol w="6624736">
                   <a:extLst>
                     <a:ext uri="{9D8B030D-6E8A-4147-A177-3AD203B41FA5}">
-                      <a16:colId xmlns:a16="http://schemas.microsoft.com/office/drawing/2014/main" xmlns="" val="473110948"/>
+                      <a16:colId xmlns="" xmlns:a16="http://schemas.microsoft.com/office/drawing/2014/main" val="473110948"/>
                     </a:ext>
                   </a:extLst>
                 </a:gridCol>
@@ -38524,7 +38825,7 @@
                 </a:tc>
                 <a:extLst>
                   <a:ext uri="{0D108BD9-81ED-4DB2-BD59-A6C34878D82A}">
-                    <a16:rowId xmlns:a16="http://schemas.microsoft.com/office/drawing/2014/main" xmlns="" val="4263651850"/>
+                    <a16:rowId xmlns="" xmlns:a16="http://schemas.microsoft.com/office/drawing/2014/main" val="4263651850"/>
                   </a:ext>
                 </a:extLst>
               </a:tr>
@@ -38649,7 +38950,7 @@
                 </a:tc>
                 <a:extLst>
                   <a:ext uri="{0D108BD9-81ED-4DB2-BD59-A6C34878D82A}">
-                    <a16:rowId xmlns:a16="http://schemas.microsoft.com/office/drawing/2014/main" xmlns="" val="3090417641"/>
+                    <a16:rowId xmlns="" xmlns:a16="http://schemas.microsoft.com/office/drawing/2014/main" val="3090417641"/>
                   </a:ext>
                 </a:extLst>
               </a:tr>
@@ -38741,7 +39042,7 @@
                 </a:tc>
                 <a:extLst>
                   <a:ext uri="{0D108BD9-81ED-4DB2-BD59-A6C34878D82A}">
-                    <a16:rowId xmlns:a16="http://schemas.microsoft.com/office/drawing/2014/main" xmlns="" val="1756568696"/>
+                    <a16:rowId xmlns="" xmlns:a16="http://schemas.microsoft.com/office/drawing/2014/main" val="1756568696"/>
                   </a:ext>
                 </a:extLst>
               </a:tr>
@@ -38833,7 +39134,7 @@
                 </a:tc>
                 <a:extLst>
                   <a:ext uri="{0D108BD9-81ED-4DB2-BD59-A6C34878D82A}">
-                    <a16:rowId xmlns:a16="http://schemas.microsoft.com/office/drawing/2014/main" xmlns="" val="2886293465"/>
+                    <a16:rowId xmlns="" xmlns:a16="http://schemas.microsoft.com/office/drawing/2014/main" val="2886293465"/>
                   </a:ext>
                 </a:extLst>
               </a:tr>
@@ -38925,7 +39226,7 @@
                 </a:tc>
                 <a:extLst>
                   <a:ext uri="{0D108BD9-81ED-4DB2-BD59-A6C34878D82A}">
-                    <a16:rowId xmlns:a16="http://schemas.microsoft.com/office/drawing/2014/main" xmlns="" val="1696131995"/>
+                    <a16:rowId xmlns="" xmlns:a16="http://schemas.microsoft.com/office/drawing/2014/main" val="1696131995"/>
                   </a:ext>
                 </a:extLst>
               </a:tr>
@@ -38938,7 +39239,7 @@
           <p:cNvPr id="26" name="淘宝-想搞设计PPT(倒卖必究)-3">
             <a:extLst>
               <a:ext uri="{FF2B5EF4-FFF2-40B4-BE49-F238E27FC236}">
-                <a16:creationId xmlns:a16="http://schemas.microsoft.com/office/drawing/2014/main" xmlns="" id="{B9D23FF6-EC74-B30F-E7E9-229D0EF877CE}"/>
+                <a16:creationId xmlns="" xmlns:a16="http://schemas.microsoft.com/office/drawing/2014/main" id="{B9D23FF6-EC74-B30F-E7E9-229D0EF877CE}"/>
               </a:ext>
             </a:extLst>
           </p:cNvPr>
@@ -39416,7 +39717,7 @@
           <p:cNvPr id="5" name="Table 4">
             <a:extLst>
               <a:ext uri="{FF2B5EF4-FFF2-40B4-BE49-F238E27FC236}">
-                <a16:creationId xmlns:a16="http://schemas.microsoft.com/office/drawing/2014/main" xmlns="" id="{CA2288CC-9E95-D30F-B374-21B6E55FF577}"/>
+                <a16:creationId xmlns="" xmlns:a16="http://schemas.microsoft.com/office/drawing/2014/main" id="{CA2288CC-9E95-D30F-B374-21B6E55FF577}"/>
               </a:ext>
             </a:extLst>
           </p:cNvPr>
@@ -39445,21 +39746,21 @@
                 <a:gridCol w="1080119">
                   <a:extLst>
                     <a:ext uri="{9D8B030D-6E8A-4147-A177-3AD203B41FA5}">
-                      <a16:colId xmlns:a16="http://schemas.microsoft.com/office/drawing/2014/main" xmlns="" val="3133072510"/>
+                      <a16:colId xmlns="" xmlns:a16="http://schemas.microsoft.com/office/drawing/2014/main" val="3133072510"/>
                     </a:ext>
                   </a:extLst>
                 </a:gridCol>
                 <a:gridCol w="4824536">
                   <a:extLst>
                     <a:ext uri="{9D8B030D-6E8A-4147-A177-3AD203B41FA5}">
-                      <a16:colId xmlns:a16="http://schemas.microsoft.com/office/drawing/2014/main" xmlns="" val="1687284556"/>
+                      <a16:colId xmlns="" xmlns:a16="http://schemas.microsoft.com/office/drawing/2014/main" val="1687284556"/>
                     </a:ext>
                   </a:extLst>
                 </a:gridCol>
                 <a:gridCol w="2736302">
                   <a:extLst>
                     <a:ext uri="{9D8B030D-6E8A-4147-A177-3AD203B41FA5}">
-                      <a16:colId xmlns:a16="http://schemas.microsoft.com/office/drawing/2014/main" xmlns="" val="3434043508"/>
+                      <a16:colId xmlns="" xmlns:a16="http://schemas.microsoft.com/office/drawing/2014/main" val="3434043508"/>
                     </a:ext>
                   </a:extLst>
                 </a:gridCol>
@@ -39542,7 +39843,7 @@
                 </a:tc>
                 <a:extLst>
                   <a:ext uri="{0D108BD9-81ED-4DB2-BD59-A6C34878D82A}">
-                    <a16:rowId xmlns:a16="http://schemas.microsoft.com/office/drawing/2014/main" xmlns="" val="406415979"/>
+                    <a16:rowId xmlns="" xmlns:a16="http://schemas.microsoft.com/office/drawing/2014/main" val="406415979"/>
                   </a:ext>
                 </a:extLst>
               </a:tr>
@@ -39636,7 +39937,7 @@
                 </a:tc>
                 <a:extLst>
                   <a:ext uri="{0D108BD9-81ED-4DB2-BD59-A6C34878D82A}">
-                    <a16:rowId xmlns:a16="http://schemas.microsoft.com/office/drawing/2014/main" xmlns="" val="1879225488"/>
+                    <a16:rowId xmlns="" xmlns:a16="http://schemas.microsoft.com/office/drawing/2014/main" val="1879225488"/>
                   </a:ext>
                 </a:extLst>
               </a:tr>
@@ -39974,7 +40275,7 @@
                 </a:tc>
                 <a:extLst>
                   <a:ext uri="{0D108BD9-81ED-4DB2-BD59-A6C34878D82A}">
-                    <a16:rowId xmlns:a16="http://schemas.microsoft.com/office/drawing/2014/main" xmlns="" val="1616225758"/>
+                    <a16:rowId xmlns="" xmlns:a16="http://schemas.microsoft.com/office/drawing/2014/main" val="1616225758"/>
                   </a:ext>
                 </a:extLst>
               </a:tr>
@@ -40270,7 +40571,7 @@
                 </a:tc>
                 <a:extLst>
                   <a:ext uri="{0D108BD9-81ED-4DB2-BD59-A6C34878D82A}">
-                    <a16:rowId xmlns:a16="http://schemas.microsoft.com/office/drawing/2014/main" xmlns="" val="1063751039"/>
+                    <a16:rowId xmlns="" xmlns:a16="http://schemas.microsoft.com/office/drawing/2014/main" val="1063751039"/>
                   </a:ext>
                 </a:extLst>
               </a:tr>
@@ -40737,7 +41038,7 @@
                 </a:tc>
                 <a:extLst>
                   <a:ext uri="{0D108BD9-81ED-4DB2-BD59-A6C34878D82A}">
-                    <a16:rowId xmlns:a16="http://schemas.microsoft.com/office/drawing/2014/main" xmlns="" val="3497000097"/>
+                    <a16:rowId xmlns="" xmlns:a16="http://schemas.microsoft.com/office/drawing/2014/main" val="3497000097"/>
                   </a:ext>
                 </a:extLst>
               </a:tr>
@@ -41050,7 +41351,7 @@
                 </a:tc>
                 <a:extLst>
                   <a:ext uri="{0D108BD9-81ED-4DB2-BD59-A6C34878D82A}">
-                    <a16:rowId xmlns:a16="http://schemas.microsoft.com/office/drawing/2014/main" xmlns="" val="4194304568"/>
+                    <a16:rowId xmlns="" xmlns:a16="http://schemas.microsoft.com/office/drawing/2014/main" val="4194304568"/>
                   </a:ext>
                 </a:extLst>
               </a:tr>
@@ -41881,7 +42182,7 @@
           <p:cNvPr id="17" name="组合 8">
             <a:extLst>
               <a:ext uri="{FF2B5EF4-FFF2-40B4-BE49-F238E27FC236}">
-                <a16:creationId xmlns:a16="http://schemas.microsoft.com/office/drawing/2014/main" xmlns="" id="{8E58FFA6-3C6A-027A-3F74-3C1AC84575F7}"/>
+                <a16:creationId xmlns="" xmlns:a16="http://schemas.microsoft.com/office/drawing/2014/main" id="{8E58FFA6-3C6A-027A-3F74-3C1AC84575F7}"/>
               </a:ext>
             </a:extLst>
           </p:cNvPr>
@@ -41901,7 +42202,7 @@
             <p:cNvPr id="18" name="矩形 9">
               <a:extLst>
                 <a:ext uri="{FF2B5EF4-FFF2-40B4-BE49-F238E27FC236}">
-                  <a16:creationId xmlns:a16="http://schemas.microsoft.com/office/drawing/2014/main" xmlns="" id="{04EB26EE-7B39-322E-1F7C-537257322EC7}"/>
+                  <a16:creationId xmlns="" xmlns:a16="http://schemas.microsoft.com/office/drawing/2014/main" id="{04EB26EE-7B39-322E-1F7C-537257322EC7}"/>
                 </a:ext>
               </a:extLst>
             </p:cNvPr>
@@ -41958,7 +42259,7 @@
             <p:cNvPr id="19" name="矩形 5">
               <a:extLst>
                 <a:ext uri="{FF2B5EF4-FFF2-40B4-BE49-F238E27FC236}">
-                  <a16:creationId xmlns:a16="http://schemas.microsoft.com/office/drawing/2014/main" xmlns="" id="{F3B04437-2406-9B1E-C580-D208843959F6}"/>
+                  <a16:creationId xmlns="" xmlns:a16="http://schemas.microsoft.com/office/drawing/2014/main" id="{F3B04437-2406-9B1E-C580-D208843959F6}"/>
                 </a:ext>
               </a:extLst>
             </p:cNvPr>
@@ -41997,7 +42298,7 @@
           <p:cNvPr id="21" name="组合 3">
             <a:extLst>
               <a:ext uri="{FF2B5EF4-FFF2-40B4-BE49-F238E27FC236}">
-                <a16:creationId xmlns:a16="http://schemas.microsoft.com/office/drawing/2014/main" xmlns="" id="{61348E64-F66F-312C-049C-60E52BA53622}"/>
+                <a16:creationId xmlns="" xmlns:a16="http://schemas.microsoft.com/office/drawing/2014/main" id="{61348E64-F66F-312C-049C-60E52BA53622}"/>
               </a:ext>
             </a:extLst>
           </p:cNvPr>
@@ -42017,7 +42318,7 @@
             <p:cNvPr id="22" name="矩形 7">
               <a:extLst>
                 <a:ext uri="{FF2B5EF4-FFF2-40B4-BE49-F238E27FC236}">
-                  <a16:creationId xmlns:a16="http://schemas.microsoft.com/office/drawing/2014/main" xmlns="" id="{454BADA0-BFD9-D75F-45D0-DB304366E87B}"/>
+                  <a16:creationId xmlns="" xmlns:a16="http://schemas.microsoft.com/office/drawing/2014/main" id="{454BADA0-BFD9-D75F-45D0-DB304366E87B}"/>
                 </a:ext>
               </a:extLst>
             </p:cNvPr>
@@ -42078,7 +42379,7 @@
             <p:cNvPr id="23" name="矩形 2">
               <a:extLst>
                 <a:ext uri="{FF2B5EF4-FFF2-40B4-BE49-F238E27FC236}">
-                  <a16:creationId xmlns:a16="http://schemas.microsoft.com/office/drawing/2014/main" xmlns="" id="{FE246C74-0DCF-AAA4-9D7C-A13DD95EA0AB}"/>
+                  <a16:creationId xmlns="" xmlns:a16="http://schemas.microsoft.com/office/drawing/2014/main" id="{FE246C74-0DCF-AAA4-9D7C-A13DD95EA0AB}"/>
                 </a:ext>
               </a:extLst>
             </p:cNvPr>
@@ -43284,7 +43585,7 @@
   <a:extraClrSchemeLst/>
   <a:extLst>
     <a:ext uri="{05A4C25C-085E-4340-85A3-A5531E510DB2}">
-      <thm15:themeFamily xmlns:thm15="http://schemas.microsoft.com/office/thememl/2012/main" xmlns="" name="Office Theme" id="{62F939B6-93AF-4DB8-9C6B-D6C7DFDC589F}" vid="{4A3C46E8-61CC-4603-A589-7422A47A8E4A}"/>
+      <thm15:themeFamily xmlns:thm15="http://schemas.microsoft.com/office/thememl/2012/main" name="Office Theme" id="{62F939B6-93AF-4DB8-9C6B-D6C7DFDC589F}" vid="{4A3C46E8-61CC-4603-A589-7422A47A8E4A}"/>
     </a:ext>
   </a:extLst>
 </a:theme>
@@ -43574,7 +43875,7 @@
   <a:extraClrSchemeLst/>
   <a:extLst>
     <a:ext uri="{05A4C25C-085E-4340-85A3-A5531E510DB2}">
-      <thm15:themeFamily xmlns:thm15="http://schemas.microsoft.com/office/thememl/2012/main" xmlns="" name="Office Theme" id="{62F939B6-93AF-4DB8-9C6B-D6C7DFDC589F}" vid="{4A3C46E8-61CC-4603-A589-7422A47A8E4A}"/>
+      <thm15:themeFamily xmlns:thm15="http://schemas.microsoft.com/office/thememl/2012/main" name="Office Theme" id="{62F939B6-93AF-4DB8-9C6B-D6C7DFDC589F}" vid="{4A3C46E8-61CC-4603-A589-7422A47A8E4A}"/>
     </a:ext>
   </a:extLst>
 </a:theme>
